--- a/Docs/EV speed advisor.pptx
+++ b/Docs/EV speed advisor.pptx
@@ -10,13 +10,13 @@
   <p:sldIdLst>
     <p:sldId id="257" r:id="rId2"/>
     <p:sldId id="258" r:id="rId3"/>
-    <p:sldId id="259" r:id="rId4"/>
+    <p:sldId id="269" r:id="rId4"/>
     <p:sldId id="260" r:id="rId5"/>
-    <p:sldId id="261" r:id="rId6"/>
-    <p:sldId id="262" r:id="rId7"/>
+    <p:sldId id="272" r:id="rId6"/>
+    <p:sldId id="271" r:id="rId7"/>
     <p:sldId id="263" r:id="rId8"/>
     <p:sldId id="264" r:id="rId9"/>
-    <p:sldId id="265" r:id="rId10"/>
+    <p:sldId id="256" r:id="rId10"/>
   </p:sldIdLst>
   <p:sldSz cx="12192000" cy="6858000"/>
   <p:notesSz cx="6858000" cy="9144000"/>
@@ -115,6 +115,11 @@
       </a:defRPr>
     </a:lvl9pPr>
   </p:defaultTextStyle>
+  <p:extLst>
+    <p:ext uri="{EFAFB233-063F-42B5-8137-9DF3F51BA10A}">
+      <p15:sldGuideLst xmlns:p15="http://schemas.microsoft.com/office/powerpoint/2012/main"/>
+    </p:ext>
+  </p:extLst>
 </p:presentation>
 </file>
 
@@ -125,91 +130,67 @@
   <c:roundedCorners val="0"/>
   <c:style val="2"/>
   <c:chart>
-    <c:title>
-      <c:tx>
-        <c:rich>
-          <a:bodyPr/>
-          <a:lstStyle/>
-          <a:p>
-            <a:pPr>
-              <a:defRPr sz="1800" b="0" i="0" u="none" strike="noStrike">
-                <a:solidFill>
-                  <a:srgbClr val="000000"/>
-                </a:solidFill>
-                <a:latin typeface="Arial"/>
-              </a:defRPr>
-            </a:pPr>
-            <a:r>
-              <a:rPr lang="ko-KR" altLang="en-US" sz="1800" b="0" i="0" u="none" strike="noStrike">
-                <a:solidFill>
-                  <a:srgbClr val="000000"/>
-                </a:solidFill>
-                <a:latin typeface="Arial"/>
-              </a:rPr>
-              <a:t>모델별 예측 오차 비교 </a:t>
-            </a:r>
-            <a:r>
-              <a:rPr lang="en-US" altLang="ko-KR" sz="1800" b="0" i="0" u="none" strike="noStrike">
-                <a:solidFill>
-                  <a:srgbClr val="000000"/>
-                </a:solidFill>
-                <a:latin typeface="Arial"/>
-              </a:rPr>
-              <a:t>(</a:t>
-            </a:r>
-            <a:r>
-              <a:rPr lang="ko-KR" altLang="en-US" sz="1800" b="0" i="0" u="none" strike="noStrike">
-                <a:solidFill>
-                  <a:srgbClr val="000000"/>
-                </a:solidFill>
-                <a:latin typeface="Arial"/>
-              </a:rPr>
-              <a:t>낮을수록 우수</a:t>
-            </a:r>
-            <a:r>
-              <a:rPr lang="en-US" altLang="ko-KR" sz="1800" b="0" i="0" u="none" strike="noStrike">
-                <a:solidFill>
-                  <a:srgbClr val="000000"/>
-                </a:solidFill>
-                <a:latin typeface="Arial"/>
-              </a:rPr>
-              <a:t>)</a:t>
-            </a:r>
-          </a:p>
-        </c:rich>
-      </c:tx>
-      <c:overlay val="0"/>
-    </c:title>
-    <c:autoTitleDeleted val="0"/>
+    <c:autoTitleDeleted val="1"/>
     <c:plotArea>
       <c:layout/>
       <c:barChart>
-        <c:barDir val="col"/>
+        <c:barDir val="bar"/>
         <c:grouping val="clustered"/>
         <c:varyColors val="0"/>
         <c:ser>
           <c:idx val="0"/>
           <c:order val="0"/>
           <c:tx>
-            <c:strRef>
-              <c:f>Sheet1!$B$1</c:f>
-              <c:strCache>
-                <c:ptCount val="1"/>
-                <c:pt idx="0">
-                  <c:v>RMSE</c:v>
-                </c:pt>
-              </c:strCache>
-            </c:strRef>
+            <c:v>Test RMSE</c:v>
           </c:tx>
-          <c:spPr>
-            <a:solidFill>
-              <a:srgbClr val="0D8F6B"/>
-            </a:solidFill>
-            <a:effectLst/>
-          </c:spPr>
-          <c:invertIfNegative val="0"/>
+          <c:invertIfNegative val="1"/>
+          <c:dPt>
+            <c:idx val="0"/>
+            <c:invertIfNegative val="1"/>
+            <c:bubble3D val="0"/>
+            <c:spPr>
+              <a:solidFill>
+                <a:srgbClr val="95A2A8"/>
+              </a:solidFill>
+            </c:spPr>
+            <c:extLst>
+              <c:ext xmlns:c16="http://schemas.microsoft.com/office/drawing/2014/chart" uri="{C3380CC4-5D6E-409C-BE32-E72D297353CC}">
+                <c16:uniqueId val="{00000001-8380-4844-B713-DCE587920546}"/>
+              </c:ext>
+            </c:extLst>
+          </c:dPt>
+          <c:dPt>
+            <c:idx val="1"/>
+            <c:invertIfNegative val="1"/>
+            <c:bubble3D val="0"/>
+            <c:spPr>
+              <a:solidFill>
+                <a:srgbClr val="18BC88"/>
+              </a:solidFill>
+            </c:spPr>
+            <c:extLst>
+              <c:ext xmlns:c16="http://schemas.microsoft.com/office/drawing/2014/chart" uri="{C3380CC4-5D6E-409C-BE32-E72D297353CC}">
+                <c16:uniqueId val="{00000003-8380-4844-B713-DCE587920546}"/>
+              </c:ext>
+            </c:extLst>
+          </c:dPt>
+          <c:dPt>
+            <c:idx val="2"/>
+            <c:invertIfNegative val="1"/>
+            <c:bubble3D val="0"/>
+            <c:spPr>
+              <a:solidFill>
+                <a:srgbClr val="2F6BE8"/>
+              </a:solidFill>
+            </c:spPr>
+            <c:extLst>
+              <c:ext xmlns:c16="http://schemas.microsoft.com/office/drawing/2014/chart" uri="{C3380CC4-5D6E-409C-BE32-E72D297353CC}">
+                <c16:uniqueId val="{00000005-8380-4844-B713-DCE587920546}"/>
+              </c:ext>
+            </c:extLst>
+          </c:dPt>
           <c:dLbls>
-            <c:numFmt formatCode="#,##0" sourceLinked="0"/>
+            <c:numFmt formatCode="0.000" sourceLinked="0"/>
             <c:spPr>
               <a:noFill/>
               <a:ln>
@@ -217,27 +198,13 @@
               </a:ln>
               <a:effectLst/>
             </c:spPr>
-            <c:txPr>
-              <a:bodyPr/>
-              <a:lstStyle/>
-              <a:p>
-                <a:pPr>
-                  <a:defRPr sz="1200" b="0" i="0" u="none" strike="noStrike">
-                    <a:solidFill>
-                      <a:srgbClr val="000000"/>
-                    </a:solidFill>
-                    <a:latin typeface="Arial"/>
-                  </a:defRPr>
-                </a:pPr>
-                <a:endParaRPr lang="ko-KR"/>
-              </a:p>
-            </c:txPr>
+            <c:dLblPos val="outEnd"/>
             <c:showLegendKey val="0"/>
             <c:showVal val="1"/>
             <c:showCatName val="0"/>
             <c:showSerName val="0"/>
             <c:showPercent val="0"/>
-            <c:showBubbleSize val="0"/>
+            <c:showBubbleSize val="1"/>
             <c:showLeaderLines val="0"/>
             <c:extLst>
               <c:ext xmlns:c15="http://schemas.microsoft.com/office/drawing/2012/chart" uri="{CE6537A1-D6FC-4f65-9D91-7224C49458BB}">
@@ -246,142 +213,37 @@
             </c:extLst>
           </c:dLbls>
           <c:cat>
-            <c:strRef>
-              <c:f>Sheet1!$A$2:$A$4</c:f>
-              <c:strCache>
-                <c:ptCount val="3"/>
-                <c:pt idx="0">
-                  <c:v>Linear Regression</c:v>
-                </c:pt>
-                <c:pt idx="1">
-                  <c:v>Random Forest</c:v>
-                </c:pt>
-                <c:pt idx="2">
-                  <c:v>XGBoost</c:v>
-                </c:pt>
-              </c:strCache>
-            </c:strRef>
+            <c:strLit>
+              <c:ptCount val="3"/>
+              <c:pt idx="0">
+                <c:v>Linear</c:v>
+              </c:pt>
+              <c:pt idx="1">
+                <c:v>RF</c:v>
+              </c:pt>
+              <c:pt idx="2">
+                <c:v>XGBoost</c:v>
+              </c:pt>
+            </c:strLit>
           </c:cat>
           <c:val>
-            <c:numRef>
-              <c:f>Sheet1!$B$2:$B$4</c:f>
-              <c:numCache>
-                <c:formatCode>General</c:formatCode>
-                <c:ptCount val="3"/>
-                <c:pt idx="0">
-                  <c:v>0.997</c:v>
-                </c:pt>
-                <c:pt idx="1">
-                  <c:v>1.1930000000000001</c:v>
-                </c:pt>
-                <c:pt idx="2">
-                  <c:v>0.86599999999999999</c:v>
-                </c:pt>
-              </c:numCache>
-            </c:numRef>
+            <c:numLit>
+              <c:formatCode>0.000</c:formatCode>
+              <c:ptCount val="3"/>
+              <c:pt idx="0">
+                <c:v>0.997</c:v>
+              </c:pt>
+              <c:pt idx="1">
+                <c:v>1.1930000000000001</c:v>
+              </c:pt>
+              <c:pt idx="2">
+                <c:v>0.86599999999999999</c:v>
+              </c:pt>
+            </c:numLit>
           </c:val>
           <c:extLst>
             <c:ext xmlns:c16="http://schemas.microsoft.com/office/drawing/2014/chart" uri="{C3380CC4-5D6E-409C-BE32-E72D297353CC}">
-              <c16:uniqueId val="{00000000-77C6-49B7-9ED5-22DF1D556ACC}"/>
-            </c:ext>
-          </c:extLst>
-        </c:ser>
-        <c:ser>
-          <c:idx val="1"/>
-          <c:order val="1"/>
-          <c:tx>
-            <c:strRef>
-              <c:f>Sheet1!$C$1</c:f>
-              <c:strCache>
-                <c:ptCount val="1"/>
-                <c:pt idx="0">
-                  <c:v>MAE</c:v>
-                </c:pt>
-              </c:strCache>
-            </c:strRef>
-          </c:tx>
-          <c:spPr>
-            <a:solidFill>
-              <a:srgbClr val="F0A34A"/>
-            </a:solidFill>
-            <a:effectLst/>
-          </c:spPr>
-          <c:invertIfNegative val="0"/>
-          <c:dLbls>
-            <c:numFmt formatCode="#,##0" sourceLinked="0"/>
-            <c:spPr>
-              <a:noFill/>
-              <a:ln>
-                <a:noFill/>
-              </a:ln>
-              <a:effectLst/>
-            </c:spPr>
-            <c:txPr>
-              <a:bodyPr/>
-              <a:lstStyle/>
-              <a:p>
-                <a:pPr>
-                  <a:defRPr sz="1200" b="0" i="0" u="none" strike="noStrike">
-                    <a:solidFill>
-                      <a:srgbClr val="000000"/>
-                    </a:solidFill>
-                    <a:latin typeface="Arial"/>
-                  </a:defRPr>
-                </a:pPr>
-                <a:endParaRPr lang="ko-KR"/>
-              </a:p>
-            </c:txPr>
-            <c:showLegendKey val="0"/>
-            <c:showVal val="1"/>
-            <c:showCatName val="0"/>
-            <c:showSerName val="0"/>
-            <c:showPercent val="0"/>
-            <c:showBubbleSize val="0"/>
-            <c:showLeaderLines val="0"/>
-            <c:extLst>
-              <c:ext xmlns:c15="http://schemas.microsoft.com/office/drawing/2012/chart" uri="{CE6537A1-D6FC-4f65-9D91-7224C49458BB}">
-                <c15:showLeaderLines val="0"/>
-              </c:ext>
-            </c:extLst>
-          </c:dLbls>
-          <c:cat>
-            <c:strRef>
-              <c:f>Sheet1!$A$2:$A$4</c:f>
-              <c:strCache>
-                <c:ptCount val="3"/>
-                <c:pt idx="0">
-                  <c:v>Linear Regression</c:v>
-                </c:pt>
-                <c:pt idx="1">
-                  <c:v>Random Forest</c:v>
-                </c:pt>
-                <c:pt idx="2">
-                  <c:v>XGBoost</c:v>
-                </c:pt>
-              </c:strCache>
-            </c:strRef>
-          </c:cat>
-          <c:val>
-            <c:numRef>
-              <c:f>Sheet1!$C$2:$C$4</c:f>
-              <c:numCache>
-                <c:formatCode>General</c:formatCode>
-                <c:ptCount val="3"/>
-                <c:pt idx="0">
-                  <c:v>0.79400000000000004</c:v>
-                </c:pt>
-                <c:pt idx="1">
-                  <c:v>0.94799999999999995</c:v>
-                </c:pt>
-                <c:pt idx="2">
-                  <c:v>0.69299999999999995</c:v>
-                </c:pt>
-              </c:numCache>
-            </c:numRef>
-          </c:val>
-          <c:extLst>
-            <c:ext xmlns:c16="http://schemas.microsoft.com/office/drawing/2014/chart" uri="{C3380CC4-5D6E-409C-BE32-E72D297353CC}">
-              <c16:uniqueId val="{00000001-77C6-49B7-9ED5-22DF1D556ACC}"/>
+              <c16:uniqueId val="{00000006-8380-4844-B713-DCE587920546}"/>
             </c:ext>
           </c:extLst>
         </c:ser>
@@ -393,21 +255,21 @@
           <c:showPercent val="0"/>
           <c:showBubbleSize val="0"/>
         </c:dLbls>
-        <c:gapWidth val="150"/>
+        <c:gapWidth val="65"/>
         <c:axId val="2094734554"/>
         <c:axId val="2094734552"/>
       </c:barChart>
       <c:catAx>
         <c:axId val="2094734554"/>
         <c:scaling>
-          <c:orientation val="minMax"/>
+          <c:orientation val="maxMin"/>
         </c:scaling>
         <c:delete val="0"/>
-        <c:axPos val="b"/>
+        <c:axPos val="l"/>
         <c:numFmt formatCode="General" sourceLinked="1"/>
         <c:majorTickMark val="out"/>
         <c:minorTickMark val="none"/>
-        <c:tickLblPos val="low"/>
+        <c:tickLblPos val="nextTo"/>
         <c:spPr>
           <a:ln w="12700" cap="flat">
             <a:solidFill>
@@ -443,11 +305,11 @@
         <c:axId val="2094734552"/>
         <c:scaling>
           <c:orientation val="minMax"/>
-          <c:max val="1.4"/>
+          <c:max val="1.3"/>
           <c:min val="0"/>
         </c:scaling>
         <c:delete val="0"/>
-        <c:axPos val="l"/>
+        <c:axPos val="t"/>
         <c:majorGridlines>
           <c:spPr>
             <a:ln w="12700" cap="flat">
@@ -459,10 +321,10 @@
             </a:ln>
           </c:spPr>
         </c:majorGridlines>
-        <c:numFmt formatCode="General" sourceLinked="0"/>
+        <c:numFmt formatCode="0.0" sourceLinked="0"/>
         <c:majorTickMark val="out"/>
         <c:minorTickMark val="none"/>
-        <c:tickLblPos val="nextTo"/>
+        <c:tickLblPos val="low"/>
         <c:spPr>
           <a:ln w="12700" cap="flat">
             <a:solidFill>
@@ -499,10 +361,6 @@
         <a:effectLst/>
       </c:spPr>
     </c:plotArea>
-    <c:legend>
-      <c:legendPos val="b"/>
-      <c:overlay val="0"/>
-    </c:legend>
     <c:plotVisOnly val="1"/>
     <c:dispBlanksAs val="span"/>
     <c:showDLblsOverMax val="1"/>
@@ -2582,7 +2440,7 @@
         </p:nvSpPr>
         <p:spPr>
           <a:xfrm>
-            <a:off x="1009625" y="2769691"/>
+            <a:off x="1009624" y="3202485"/>
             <a:ext cx="4086123" cy="885825"/>
           </a:xfrm>
           <a:prstGeom prst="rect">
@@ -2621,7 +2479,7 @@
         </p:nvSpPr>
         <p:spPr>
           <a:xfrm>
-            <a:off x="1009625" y="4373017"/>
+            <a:off x="1009624" y="4092527"/>
             <a:ext cx="4086123" cy="0"/>
           </a:xfrm>
           <a:prstGeom prst="line">
@@ -2648,7 +2506,7 @@
         </p:nvSpPr>
         <p:spPr>
           <a:xfrm>
-            <a:off x="1009625" y="5011192"/>
+            <a:off x="1009624" y="4337002"/>
             <a:ext cx="4086123" cy="265658"/>
           </a:xfrm>
           <a:prstGeom prst="rect">
@@ -2681,316 +2539,6 @@
       </p:sp>
       <p:sp>
         <p:nvSpPr>
-          <p:cNvPr id="10" name="Shape 8"/>
-          <p:cNvSpPr/>
-          <p:nvPr/>
-        </p:nvSpPr>
-        <p:spPr>
-          <a:xfrm>
-            <a:off x="6223000" y="4905375"/>
-            <a:ext cx="4730750" cy="28575"/>
-          </a:xfrm>
-          <a:prstGeom prst="rect">
-            <a:avLst/>
-          </a:prstGeom>
-          <a:solidFill>
-            <a:srgbClr val="8DA19C"/>
-          </a:solidFill>
-          <a:ln w="12700">
-            <a:solidFill>
-              <a:srgbClr val="FFFFFF">
-                <a:alpha val="0"/>
-              </a:srgbClr>
-            </a:solidFill>
-            <a:prstDash val="solid"/>
-          </a:ln>
-        </p:spPr>
-        <p:txBody>
-          <a:bodyPr/>
-          <a:lstStyle/>
-          <a:p>
-            <a:endParaRPr lang="ko-KR" altLang="en-US"/>
-          </a:p>
-        </p:txBody>
-      </p:sp>
-      <p:sp>
-        <p:nvSpPr>
-          <p:cNvPr id="11" name="Shape 9"/>
-          <p:cNvSpPr/>
-          <p:nvPr/>
-        </p:nvSpPr>
-        <p:spPr>
-          <a:xfrm>
-            <a:off x="6191095" y="2133600"/>
-            <a:ext cx="28574" cy="2800350"/>
-          </a:xfrm>
-          <a:prstGeom prst="rect">
-            <a:avLst/>
-          </a:prstGeom>
-          <a:solidFill>
-            <a:srgbClr val="8DA19C"/>
-          </a:solidFill>
-          <a:ln w="12700">
-            <a:solidFill>
-              <a:srgbClr val="FFFFFF">
-                <a:alpha val="0"/>
-              </a:srgbClr>
-            </a:solidFill>
-            <a:prstDash val="solid"/>
-          </a:ln>
-        </p:spPr>
-        <p:txBody>
-          <a:bodyPr/>
-          <a:lstStyle/>
-          <a:p>
-            <a:endParaRPr lang="ko-KR" altLang="en-US"/>
-          </a:p>
-        </p:txBody>
-      </p:sp>
-      <p:sp>
-        <p:nvSpPr>
-          <p:cNvPr id="12" name="Shape 10"/>
-          <p:cNvSpPr/>
-          <p:nvPr/>
-        </p:nvSpPr>
-        <p:spPr>
-          <a:xfrm>
-            <a:off x="6508954" y="2914236"/>
-            <a:ext cx="4031416" cy="0"/>
-          </a:xfrm>
-          <a:prstGeom prst="line">
-            <a:avLst/>
-          </a:prstGeom>
-          <a:solidFill>
-            <a:srgbClr val="FFFFFF">
-              <a:alpha val="0"/>
-            </a:srgbClr>
-          </a:solidFill>
-          <a:ln w="66675">
-            <a:solidFill>
-              <a:srgbClr val="13A779"/>
-            </a:solidFill>
-            <a:prstDash val="solid"/>
-          </a:ln>
-        </p:spPr>
-      </p:sp>
-      <p:sp>
-        <p:nvSpPr>
-          <p:cNvPr id="13" name="Shape 11"/>
-          <p:cNvSpPr/>
-          <p:nvPr/>
-        </p:nvSpPr>
-        <p:spPr>
-          <a:xfrm>
-            <a:off x="6470487" y="4622604"/>
-            <a:ext cx="4051201" cy="0"/>
-          </a:xfrm>
-          <a:prstGeom prst="line">
-            <a:avLst/>
-          </a:prstGeom>
-          <a:solidFill>
-            <a:srgbClr val="FFFFFF">
-              <a:alpha val="0"/>
-            </a:srgbClr>
-          </a:solidFill>
-          <a:ln w="66675">
-            <a:solidFill>
-              <a:srgbClr val="F39C4A"/>
-            </a:solidFill>
-            <a:prstDash val="solid"/>
-          </a:ln>
-        </p:spPr>
-      </p:sp>
-      <p:sp>
-        <p:nvSpPr>
-          <p:cNvPr id="14" name="Text 12"/>
-          <p:cNvSpPr/>
-          <p:nvPr/>
-        </p:nvSpPr>
-        <p:spPr>
-          <a:xfrm>
-            <a:off x="10204294" y="4295775"/>
-            <a:ext cx="1149222" cy="228600"/>
-          </a:xfrm>
-          <a:prstGeom prst="rect">
-            <a:avLst/>
-          </a:prstGeom>
-          <a:noFill/>
-          <a:ln/>
-        </p:spPr>
-        <p:txBody>
-          <a:bodyPr wrap="square" lIns="0" tIns="0" rIns="0" bIns="0" rtlCol="0" anchor="t"/>
-          <a:lstStyle/>
-          <a:p>
-            <a:pPr marL="0" indent="0" algn="l">
-              <a:buNone/>
-            </a:pPr>
-            <a:r>
-              <a:rPr lang="en-US" sz="1350" b="1" dirty="0">
-                <a:solidFill>
-                  <a:srgbClr val="078661"/>
-                </a:solidFill>
-                <a:latin typeface="Malgun Gothic" pitchFamily="34" charset="0"/>
-                <a:ea typeface="Malgun Gothic" pitchFamily="34" charset="-122"/>
-                <a:cs typeface="Malgun Gothic" pitchFamily="34" charset="-120"/>
-              </a:rPr>
-              <a:t>에너지 소비 ↑</a:t>
-            </a:r>
-            <a:endParaRPr lang="en-US" sz="1350" dirty="0"/>
-          </a:p>
-        </p:txBody>
-      </p:sp>
-      <p:sp>
-        <p:nvSpPr>
-          <p:cNvPr id="15" name="Text 13"/>
-          <p:cNvSpPr/>
-          <p:nvPr/>
-        </p:nvSpPr>
-        <p:spPr>
-          <a:xfrm>
-            <a:off x="10321717" y="2343150"/>
-            <a:ext cx="917502" cy="228600"/>
-          </a:xfrm>
-          <a:prstGeom prst="rect">
-            <a:avLst/>
-          </a:prstGeom>
-          <a:noFill/>
-          <a:ln/>
-        </p:spPr>
-        <p:txBody>
-          <a:bodyPr wrap="square" lIns="0" tIns="0" rIns="0" bIns="0" rtlCol="0" anchor="t"/>
-          <a:lstStyle/>
-          <a:p>
-            <a:pPr marL="0" indent="0" algn="l">
-              <a:buNone/>
-            </a:pPr>
-            <a:r>
-              <a:rPr lang="en-US" sz="1350" b="1" dirty="0">
-                <a:solidFill>
-                  <a:srgbClr val="D8741F"/>
-                </a:solidFill>
-                <a:latin typeface="Malgun Gothic" pitchFamily="34" charset="0"/>
-                <a:ea typeface="Malgun Gothic" pitchFamily="34" charset="-122"/>
-                <a:cs typeface="Malgun Gothic" pitchFamily="34" charset="-120"/>
-              </a:rPr>
-              <a:t>주행시간 ↓</a:t>
-            </a:r>
-            <a:endParaRPr lang="en-US" sz="1350" dirty="0"/>
-          </a:p>
-        </p:txBody>
-      </p:sp>
-      <p:sp>
-        <p:nvSpPr>
-          <p:cNvPr id="16" name="Text 14"/>
-          <p:cNvSpPr/>
-          <p:nvPr/>
-        </p:nvSpPr>
-        <p:spPr>
-          <a:xfrm>
-            <a:off x="10547483" y="5086350"/>
-            <a:ext cx="663162" cy="200025"/>
-          </a:xfrm>
-          <a:prstGeom prst="rect">
-            <a:avLst/>
-          </a:prstGeom>
-          <a:noFill/>
-          <a:ln/>
-        </p:spPr>
-        <p:txBody>
-          <a:bodyPr wrap="square" lIns="0" tIns="0" rIns="0" bIns="0" rtlCol="0" anchor="t"/>
-          <a:lstStyle/>
-          <a:p>
-            <a:pPr marL="0" indent="0" algn="l">
-              <a:buNone/>
-            </a:pPr>
-            <a:r>
-              <a:rPr lang="en-US" sz="1200" dirty="0">
-                <a:solidFill>
-                  <a:srgbClr val="5E716C"/>
-                </a:solidFill>
-                <a:latin typeface="Malgun Gothic" pitchFamily="34" charset="0"/>
-                <a:ea typeface="Malgun Gothic" pitchFamily="34" charset="-122"/>
-                <a:cs typeface="Malgun Gothic" pitchFamily="34" charset="-120"/>
-              </a:rPr>
-              <a:t>주행 속도</a:t>
-            </a:r>
-            <a:endParaRPr lang="en-US" sz="1200" dirty="0"/>
-          </a:p>
-        </p:txBody>
-      </p:sp>
-      <p:sp>
-        <p:nvSpPr>
-          <p:cNvPr id="17" name="Text 15"/>
-          <p:cNvSpPr/>
-          <p:nvPr/>
-        </p:nvSpPr>
-        <p:spPr>
-          <a:xfrm>
-            <a:off x="5905352" y="1857375"/>
-            <a:ext cx="304792" cy="200025"/>
-          </a:xfrm>
-          <a:prstGeom prst="rect">
-            <a:avLst/>
-          </a:prstGeom>
-          <a:noFill/>
-          <a:ln/>
-        </p:spPr>
-        <p:txBody>
-          <a:bodyPr wrap="square" lIns="0" tIns="0" rIns="0" bIns="0" rtlCol="0" anchor="t"/>
-          <a:lstStyle/>
-          <a:p>
-            <a:pPr marL="0" indent="0" algn="l">
-              <a:buNone/>
-            </a:pPr>
-            <a:r>
-              <a:rPr lang="en-US" sz="1200" dirty="0">
-                <a:solidFill>
-                  <a:srgbClr val="5E716C"/>
-                </a:solidFill>
-                <a:latin typeface="Malgun Gothic" pitchFamily="34" charset="0"/>
-                <a:ea typeface="Malgun Gothic" pitchFamily="34" charset="-122"/>
-                <a:cs typeface="Malgun Gothic" pitchFamily="34" charset="-120"/>
-              </a:rPr>
-              <a:t>비용</a:t>
-            </a:r>
-            <a:endParaRPr lang="en-US" sz="1200" dirty="0"/>
-          </a:p>
-        </p:txBody>
-      </p:sp>
-      <p:sp>
-        <p:nvSpPr>
-          <p:cNvPr id="18" name="Shape 16"/>
-          <p:cNvSpPr/>
-          <p:nvPr/>
-        </p:nvSpPr>
-        <p:spPr>
-          <a:xfrm>
-            <a:off x="8286543" y="3524250"/>
-            <a:ext cx="781030" cy="781050"/>
-          </a:xfrm>
-          <a:prstGeom prst="ellipse">
-            <a:avLst/>
-          </a:prstGeom>
-          <a:solidFill>
-            <a:srgbClr val="10232B"/>
-          </a:solidFill>
-          <a:ln w="57150">
-            <a:solidFill>
-              <a:srgbClr val="FFFFFF"/>
-            </a:solidFill>
-            <a:prstDash val="solid"/>
-          </a:ln>
-        </p:spPr>
-        <p:txBody>
-          <a:bodyPr/>
-          <a:lstStyle/>
-          <a:p>
-            <a:endParaRPr lang="ko-KR" altLang="en-US"/>
-          </a:p>
-        </p:txBody>
-      </p:sp>
-      <p:sp>
-        <p:nvSpPr>
           <p:cNvPr id="19" name="Text 17"/>
           <p:cNvSpPr/>
           <p:nvPr/>
@@ -3067,6 +2615,36 @@
           </a:p>
         </p:txBody>
       </p:sp>
+      <p:pic>
+        <p:nvPicPr>
+          <p:cNvPr id="28" name="그림 27">
+            <a:extLst>
+              <a:ext uri="{FF2B5EF4-FFF2-40B4-BE49-F238E27FC236}">
+                <a16:creationId xmlns:a16="http://schemas.microsoft.com/office/drawing/2014/main" id="{CDBA5B07-056A-3327-24B0-D16F37D63339}"/>
+              </a:ext>
+            </a:extLst>
+          </p:cNvPr>
+          <p:cNvPicPr>
+            <a:picLocks noChangeAspect="1"/>
+          </p:cNvPicPr>
+          <p:nvPr/>
+        </p:nvPicPr>
+        <p:blipFill>
+          <a:blip r:embed="rId3"/>
+          <a:stretch>
+            <a:fillRect/>
+          </a:stretch>
+        </p:blipFill>
+        <p:spPr>
+          <a:xfrm>
+            <a:off x="5606125" y="1856338"/>
+            <a:ext cx="6076878" cy="3621574"/>
+          </a:xfrm>
+          <a:prstGeom prst="rect">
+            <a:avLst/>
+          </a:prstGeom>
+        </p:spPr>
+      </p:pic>
     </p:spTree>
     <p:extLst>
       <p:ext uri="{BB962C8B-B14F-4D97-AF65-F5344CB8AC3E}">
@@ -3112,7 +2690,7 @@
             <a:avLst/>
           </a:prstGeom>
           <a:solidFill>
-            <a:srgbClr val="FFFFFF"/>
+            <a:srgbClr val="F7F9F9"/>
           </a:solidFill>
           <a:ln w="12700">
             <a:solidFill>
@@ -3140,7 +2718,7 @@
         <p:spPr>
           <a:xfrm>
             <a:off x="647684" y="419100"/>
-            <a:ext cx="1584831" cy="171450"/>
+            <a:ext cx="1892302" cy="200025"/>
           </a:xfrm>
           <a:prstGeom prst="rect">
             <a:avLst/>
@@ -3156,17 +2734,17 @@
               <a:buNone/>
             </a:pPr>
             <a:r>
-              <a:rPr lang="en-US" sz="1050" b="1" dirty="0">
+              <a:rPr lang="en-US" sz="1350" b="1" dirty="0">
                 <a:solidFill>
-                  <a:srgbClr val="0D9F76"/>
+                  <a:srgbClr val="00A982"/>
                 </a:solidFill>
-                <a:latin typeface="Malgun Gothic" pitchFamily="34" charset="0"/>
-                <a:ea typeface="Malgun Gothic" pitchFamily="34" charset="-122"/>
-                <a:cs typeface="Malgun Gothic" pitchFamily="34" charset="-120"/>
+                <a:latin typeface="Arial" pitchFamily="34" charset="0"/>
+                <a:ea typeface="Arial" pitchFamily="34" charset="-122"/>
+                <a:cs typeface="Arial" pitchFamily="34" charset="-120"/>
               </a:rPr>
-              <a:t>02 · DATA &amp; TARGET</a:t>
+              <a:t>02 · DATA STRUCTURE</a:t>
             </a:r>
-            <a:endParaRPr lang="en-US" sz="1050" dirty="0"/>
+            <a:endParaRPr lang="en-US" sz="1350" dirty="0"/>
           </a:p>
         </p:txBody>
       </p:sp>
@@ -3178,8 +2756,8 @@
         </p:nvSpPr>
         <p:spPr>
           <a:xfrm>
-            <a:off x="647684" y="704850"/>
-            <a:ext cx="10572486" cy="457200"/>
+            <a:off x="647684" y="723900"/>
+            <a:ext cx="10667733" cy="495300"/>
           </a:xfrm>
           <a:prstGeom prst="rect">
             <a:avLst/>
@@ -3195,17 +2773,17 @@
               <a:buNone/>
             </a:pPr>
             <a:r>
-              <a:rPr lang="en-US" sz="2700" b="1" dirty="0">
+              <a:rPr lang="en-US" sz="3000" b="1" dirty="0">
                 <a:solidFill>
-                  <a:srgbClr val="10232B"/>
+                  <a:srgbClr val="071B26"/>
                 </a:solidFill>
-                <a:latin typeface="Malgun Gothic" pitchFamily="34" charset="0"/>
-                <a:ea typeface="Malgun Gothic" pitchFamily="34" charset="-122"/>
-                <a:cs typeface="Malgun Gothic" pitchFamily="34" charset="-120"/>
+                <a:latin typeface="Arial" pitchFamily="34" charset="0"/>
+                <a:ea typeface="Arial" pitchFamily="34" charset="-122"/>
+                <a:cs typeface="Arial" pitchFamily="34" charset="-120"/>
               </a:rPr>
-              <a:t>9개 주행 조건으로 단위거리 에너지 소비를 예측한다</a:t>
+              <a:t>데이터셋 구조 : 주행 조건 → 에너지 소비량</a:t>
             </a:r>
-            <a:endParaRPr lang="en-US" sz="2700" dirty="0"/>
+            <a:endParaRPr lang="en-US" sz="3000" dirty="0"/>
           </a:p>
         </p:txBody>
       </p:sp>
@@ -3217,14 +2795,14 @@
         </p:nvSpPr>
         <p:spPr>
           <a:xfrm>
-            <a:off x="647684" y="1676400"/>
-            <a:ext cx="2511263" cy="1257300"/>
-          </a:xfrm>
-          <a:prstGeom prst="rect">
-            <a:avLst/>
-          </a:prstGeom>
-          <a:solidFill>
-            <a:srgbClr val="F0F5F3"/>
+            <a:off x="647684" y="1323975"/>
+            <a:ext cx="10896328" cy="19050"/>
+          </a:xfrm>
+          <a:prstGeom prst="rect">
+            <a:avLst/>
+          </a:prstGeom>
+          <a:solidFill>
+            <a:srgbClr val="DCE5E4"/>
           </a:solidFill>
           <a:ln w="12700">
             <a:solidFill>
@@ -3251,24 +2829,31 @@
         </p:nvSpPr>
         <p:spPr>
           <a:xfrm>
-            <a:off x="671496" y="1676400"/>
-            <a:ext cx="0" cy="1257300"/>
-          </a:xfrm>
-          <a:prstGeom prst="line">
-            <a:avLst/>
-          </a:prstGeom>
-          <a:solidFill>
-            <a:srgbClr val="FFFFFF">
-              <a:alpha val="0"/>
-            </a:srgbClr>
-          </a:solidFill>
-          <a:ln w="47625">
-            <a:solidFill>
-              <a:srgbClr val="18AA7E"/>
-            </a:solidFill>
-            <a:prstDash val="solid"/>
-          </a:ln>
-        </p:spPr>
+            <a:off x="761981" y="1543050"/>
+            <a:ext cx="3276518" cy="3105150"/>
+          </a:xfrm>
+          <a:prstGeom prst="rect">
+            <a:avLst/>
+          </a:prstGeom>
+          <a:solidFill>
+            <a:srgbClr val="EEF2F1"/>
+          </a:solidFill>
+          <a:ln w="12700">
+            <a:solidFill>
+              <a:srgbClr val="FFFFFF">
+                <a:alpha val="0"/>
+              </a:srgbClr>
+            </a:solidFill>
+            <a:prstDash val="solid"/>
+          </a:ln>
+        </p:spPr>
+        <p:txBody>
+          <a:bodyPr/>
+          <a:lstStyle/>
+          <a:p>
+            <a:endParaRPr lang="ko-KR" altLang="en-US"/>
+          </a:p>
+        </p:txBody>
       </p:sp>
       <p:sp>
         <p:nvSpPr>
@@ -3278,8 +2863,8 @@
         </p:nvSpPr>
         <p:spPr>
           <a:xfrm>
-            <a:off x="866753" y="1866900"/>
-            <a:ext cx="2120748" cy="247650"/>
+            <a:off x="1009625" y="1809750"/>
+            <a:ext cx="1128089" cy="361950"/>
           </a:xfrm>
           <a:prstGeom prst="rect">
             <a:avLst/>
@@ -3295,30 +2880,64 @@
               <a:buNone/>
             </a:pPr>
             <a:r>
-              <a:rPr lang="en-US" sz="1450" b="1" dirty="0">
+              <a:rPr lang="en-US" sz="2050" b="1" dirty="0">
                 <a:solidFill>
-                  <a:srgbClr val="0A7659"/>
+                  <a:srgbClr val="2F6BE8"/>
                 </a:solidFill>
-                <a:latin typeface="Malgun Gothic" pitchFamily="34" charset="0"/>
-                <a:ea typeface="Malgun Gothic" pitchFamily="34" charset="-122"/>
-                <a:cs typeface="Malgun Gothic" pitchFamily="34" charset="-120"/>
+                <a:latin typeface="Arial" pitchFamily="34" charset="0"/>
+                <a:ea typeface="Arial" pitchFamily="34" charset="-122"/>
+                <a:cs typeface="Arial" pitchFamily="34" charset="-120"/>
               </a:rPr>
-              <a:t>speed_kmh</a:t>
+              <a:t>주행 조건</a:t>
             </a:r>
-            <a:endParaRPr lang="en-US" sz="1450" dirty="0"/>
-          </a:p>
-        </p:txBody>
-      </p:sp>
-      <p:sp>
-        <p:nvSpPr>
-          <p:cNvPr id="8" name="Text 6"/>
-          <p:cNvSpPr/>
-          <p:nvPr/>
-        </p:nvSpPr>
-        <p:spPr>
-          <a:xfrm>
-            <a:off x="866753" y="2114550"/>
-            <a:ext cx="2120748" cy="205680"/>
+            <a:endParaRPr lang="en-US" sz="2050" dirty="0"/>
+          </a:p>
+        </p:txBody>
+      </p:sp>
+      <p:sp>
+        <p:nvSpPr>
+          <p:cNvPr id="8" name="Shape 6"/>
+          <p:cNvSpPr/>
+          <p:nvPr/>
+        </p:nvSpPr>
+        <p:spPr>
+          <a:xfrm>
+            <a:off x="1009625" y="2400300"/>
+            <a:ext cx="2781230" cy="400050"/>
+          </a:xfrm>
+          <a:prstGeom prst="rect">
+            <a:avLst/>
+          </a:prstGeom>
+          <a:solidFill>
+            <a:srgbClr val="FFFFFF"/>
+          </a:solidFill>
+          <a:ln w="12700">
+            <a:solidFill>
+              <a:srgbClr val="FFFFFF">
+                <a:alpha val="0"/>
+              </a:srgbClr>
+            </a:solidFill>
+            <a:prstDash val="solid"/>
+          </a:ln>
+        </p:spPr>
+        <p:txBody>
+          <a:bodyPr/>
+          <a:lstStyle/>
+          <a:p>
+            <a:endParaRPr lang="ko-KR" altLang="en-US"/>
+          </a:p>
+        </p:txBody>
+      </p:sp>
+      <p:sp>
+        <p:nvSpPr>
+          <p:cNvPr id="9" name="Text 7"/>
+          <p:cNvSpPr/>
+          <p:nvPr/>
+        </p:nvSpPr>
+        <p:spPr>
+          <a:xfrm>
+            <a:off x="1181070" y="2495550"/>
+            <a:ext cx="886398" cy="200025"/>
           </a:xfrm>
           <a:prstGeom prst="rect">
             <a:avLst/>
@@ -3334,51 +2953,17 @@
               <a:buNone/>
             </a:pPr>
             <a:r>
-              <a:rPr lang="en-US" sz="1200" dirty="0">
+              <a:rPr lang="en-US" sz="1350" dirty="0">
                 <a:solidFill>
-                  <a:srgbClr val="5D716B"/>
+                  <a:srgbClr val="22313B"/>
                 </a:solidFill>
-                <a:latin typeface="Malgun Gothic" pitchFamily="34" charset="0"/>
-                <a:ea typeface="Malgun Gothic" pitchFamily="34" charset="-122"/>
-                <a:cs typeface="Malgun Gothic" pitchFamily="34" charset="-120"/>
+                <a:latin typeface="Arial" pitchFamily="34" charset="0"/>
+                <a:ea typeface="Arial" pitchFamily="34" charset="-122"/>
+                <a:cs typeface="Arial" pitchFamily="34" charset="-120"/>
               </a:rPr>
-              <a:t>주행 속도</a:t>
+              <a:t>speed_kmh</a:t>
             </a:r>
-            <a:endParaRPr lang="en-US" sz="1200" dirty="0"/>
-          </a:p>
-        </p:txBody>
-      </p:sp>
-      <p:sp>
-        <p:nvSpPr>
-          <p:cNvPr id="9" name="Shape 7"/>
-          <p:cNvSpPr/>
-          <p:nvPr/>
-        </p:nvSpPr>
-        <p:spPr>
-          <a:xfrm>
-            <a:off x="3273244" y="1676400"/>
-            <a:ext cx="2511412" cy="1257300"/>
-          </a:xfrm>
-          <a:prstGeom prst="rect">
-            <a:avLst/>
-          </a:prstGeom>
-          <a:solidFill>
-            <a:srgbClr val="F0F5F3"/>
-          </a:solidFill>
-          <a:ln w="12700">
-            <a:solidFill>
-              <a:srgbClr val="FFFFFF">
-                <a:alpha val="0"/>
-              </a:srgbClr>
-            </a:solidFill>
-            <a:prstDash val="solid"/>
-          </a:ln>
-        </p:spPr>
-        <p:txBody>
-          <a:bodyPr/>
-          <a:lstStyle/>
-          <a:p>
-            <a:endParaRPr lang="ko-KR" altLang="en-US"/>
+            <a:endParaRPr lang="en-US" sz="1350" dirty="0"/>
           </a:p>
         </p:txBody>
       </p:sp>
@@ -3390,24 +2975,31 @@
         </p:nvSpPr>
         <p:spPr>
           <a:xfrm>
-            <a:off x="3297056" y="1676400"/>
-            <a:ext cx="0" cy="1257300"/>
-          </a:xfrm>
-          <a:prstGeom prst="line">
-            <a:avLst/>
-          </a:prstGeom>
-          <a:solidFill>
-            <a:srgbClr val="FFFFFF">
-              <a:alpha val="0"/>
-            </a:srgbClr>
-          </a:solidFill>
-          <a:ln w="47625">
-            <a:solidFill>
-              <a:srgbClr val="18AA7E"/>
-            </a:solidFill>
-            <a:prstDash val="solid"/>
-          </a:ln>
-        </p:spPr>
+            <a:off x="1009625" y="2895600"/>
+            <a:ext cx="2781230" cy="400050"/>
+          </a:xfrm>
+          <a:prstGeom prst="rect">
+            <a:avLst/>
+          </a:prstGeom>
+          <a:solidFill>
+            <a:srgbClr val="FFFFFF"/>
+          </a:solidFill>
+          <a:ln w="12700">
+            <a:solidFill>
+              <a:srgbClr val="FFFFFF">
+                <a:alpha val="0"/>
+              </a:srgbClr>
+            </a:solidFill>
+            <a:prstDash val="solid"/>
+          </a:ln>
+        </p:spPr>
+        <p:txBody>
+          <a:bodyPr/>
+          <a:lstStyle/>
+          <a:p>
+            <a:endParaRPr lang="ko-KR" altLang="en-US"/>
+          </a:p>
+        </p:txBody>
       </p:sp>
       <p:sp>
         <p:nvSpPr>
@@ -3417,8 +3009,8 @@
         </p:nvSpPr>
         <p:spPr>
           <a:xfrm>
-            <a:off x="3492313" y="1866900"/>
-            <a:ext cx="2120897" cy="247650"/>
+            <a:off x="1181070" y="2990850"/>
+            <a:ext cx="1201162" cy="200025"/>
           </a:xfrm>
           <a:prstGeom prst="rect">
             <a:avLst/>
@@ -3434,30 +3026,64 @@
               <a:buNone/>
             </a:pPr>
             <a:r>
-              <a:rPr lang="en-US" sz="1450" b="1" dirty="0">
+              <a:rPr lang="en-US" sz="1350" dirty="0">
                 <a:solidFill>
-                  <a:srgbClr val="0A7659"/>
+                  <a:srgbClr val="22313B"/>
                 </a:solidFill>
-                <a:latin typeface="Malgun Gothic" pitchFamily="34" charset="0"/>
-                <a:ea typeface="Malgun Gothic" pitchFamily="34" charset="-122"/>
-                <a:cs typeface="Malgun Gothic" pitchFamily="34" charset="-120"/>
+                <a:latin typeface="Arial" pitchFamily="34" charset="0"/>
+                <a:ea typeface="Arial" pitchFamily="34" charset="-122"/>
+                <a:cs typeface="Arial" pitchFamily="34" charset="-120"/>
               </a:rPr>
-              <a:t>payload_kg</a:t>
+              <a:t>road_grade_pct</a:t>
             </a:r>
-            <a:endParaRPr lang="en-US" sz="1450" dirty="0"/>
-          </a:p>
-        </p:txBody>
-      </p:sp>
-      <p:sp>
-        <p:nvSpPr>
-          <p:cNvPr id="12" name="Text 10"/>
-          <p:cNvSpPr/>
-          <p:nvPr/>
-        </p:nvSpPr>
-        <p:spPr>
-          <a:xfrm>
-            <a:off x="3492313" y="2114550"/>
-            <a:ext cx="2120897" cy="205680"/>
+            <a:endParaRPr lang="en-US" sz="1350" dirty="0"/>
+          </a:p>
+        </p:txBody>
+      </p:sp>
+      <p:sp>
+        <p:nvSpPr>
+          <p:cNvPr id="12" name="Shape 10"/>
+          <p:cNvSpPr/>
+          <p:nvPr/>
+        </p:nvSpPr>
+        <p:spPr>
+          <a:xfrm>
+            <a:off x="1009625" y="3390900"/>
+            <a:ext cx="2781230" cy="400050"/>
+          </a:xfrm>
+          <a:prstGeom prst="rect">
+            <a:avLst/>
+          </a:prstGeom>
+          <a:solidFill>
+            <a:srgbClr val="FFFFFF"/>
+          </a:solidFill>
+          <a:ln w="12700">
+            <a:solidFill>
+              <a:srgbClr val="FFFFFF">
+                <a:alpha val="0"/>
+              </a:srgbClr>
+            </a:solidFill>
+            <a:prstDash val="solid"/>
+          </a:ln>
+        </p:spPr>
+        <p:txBody>
+          <a:bodyPr/>
+          <a:lstStyle/>
+          <a:p>
+            <a:endParaRPr lang="ko-KR" altLang="en-US"/>
+          </a:p>
+        </p:txBody>
+      </p:sp>
+      <p:sp>
+        <p:nvSpPr>
+          <p:cNvPr id="13" name="Text 11"/>
+          <p:cNvSpPr/>
+          <p:nvPr/>
+        </p:nvSpPr>
+        <p:spPr>
+          <a:xfrm>
+            <a:off x="1181070" y="3486150"/>
+            <a:ext cx="1296112" cy="200025"/>
           </a:xfrm>
           <a:prstGeom prst="rect">
             <a:avLst/>
@@ -3473,51 +3099,17 @@
               <a:buNone/>
             </a:pPr>
             <a:r>
-              <a:rPr lang="en-US" sz="1200" dirty="0">
+              <a:rPr lang="en-US" sz="1350" dirty="0">
                 <a:solidFill>
-                  <a:srgbClr val="5D716B"/>
+                  <a:srgbClr val="22313B"/>
                 </a:solidFill>
-                <a:latin typeface="Malgun Gothic" pitchFamily="34" charset="0"/>
-                <a:ea typeface="Malgun Gothic" pitchFamily="34" charset="-122"/>
-                <a:cs typeface="Malgun Gothic" pitchFamily="34" charset="-120"/>
+                <a:latin typeface="Arial" pitchFamily="34" charset="0"/>
+                <a:ea typeface="Arial" pitchFamily="34" charset="-122"/>
+                <a:cs typeface="Arial" pitchFamily="34" charset="-120"/>
               </a:rPr>
-              <a:t>적재 하중</a:t>
+              <a:t>trip_distance_km</a:t>
             </a:r>
-            <a:endParaRPr lang="en-US" sz="1200" dirty="0"/>
-          </a:p>
-        </p:txBody>
-      </p:sp>
-      <p:sp>
-        <p:nvSpPr>
-          <p:cNvPr id="13" name="Shape 11"/>
-          <p:cNvSpPr/>
-          <p:nvPr/>
-        </p:nvSpPr>
-        <p:spPr>
-          <a:xfrm>
-            <a:off x="5898953" y="1676400"/>
-            <a:ext cx="2511263" cy="1257300"/>
-          </a:xfrm>
-          <a:prstGeom prst="rect">
-            <a:avLst/>
-          </a:prstGeom>
-          <a:solidFill>
-            <a:srgbClr val="F0F5F3"/>
-          </a:solidFill>
-          <a:ln w="12700">
-            <a:solidFill>
-              <a:srgbClr val="FFFFFF">
-                <a:alpha val="0"/>
-              </a:srgbClr>
-            </a:solidFill>
-            <a:prstDash val="solid"/>
-          </a:ln>
-        </p:spPr>
-        <p:txBody>
-          <a:bodyPr/>
-          <a:lstStyle/>
-          <a:p>
-            <a:endParaRPr lang="ko-KR" altLang="en-US"/>
+            <a:endParaRPr lang="en-US" sz="1350" dirty="0"/>
           </a:p>
         </p:txBody>
       </p:sp>
@@ -3529,24 +3121,31 @@
         </p:nvSpPr>
         <p:spPr>
           <a:xfrm>
-            <a:off x="5922765" y="1676400"/>
-            <a:ext cx="0" cy="1257300"/>
-          </a:xfrm>
-          <a:prstGeom prst="line">
-            <a:avLst/>
-          </a:prstGeom>
-          <a:solidFill>
-            <a:srgbClr val="FFFFFF">
-              <a:alpha val="0"/>
-            </a:srgbClr>
-          </a:solidFill>
-          <a:ln w="47625">
-            <a:solidFill>
-              <a:srgbClr val="18AA7E"/>
-            </a:solidFill>
-            <a:prstDash val="solid"/>
-          </a:ln>
-        </p:spPr>
+            <a:off x="1009625" y="3886200"/>
+            <a:ext cx="2781230" cy="400050"/>
+          </a:xfrm>
+          <a:prstGeom prst="rect">
+            <a:avLst/>
+          </a:prstGeom>
+          <a:solidFill>
+            <a:srgbClr val="FFFFFF"/>
+          </a:solidFill>
+          <a:ln w="12700">
+            <a:solidFill>
+              <a:srgbClr val="FFFFFF">
+                <a:alpha val="0"/>
+              </a:srgbClr>
+            </a:solidFill>
+            <a:prstDash val="solid"/>
+          </a:ln>
+        </p:spPr>
+        <p:txBody>
+          <a:bodyPr/>
+          <a:lstStyle/>
+          <a:p>
+            <a:endParaRPr lang="ko-KR" altLang="en-US"/>
+          </a:p>
+        </p:txBody>
       </p:sp>
       <p:sp>
         <p:nvSpPr>
@@ -3556,8 +3155,8 @@
         </p:nvSpPr>
         <p:spPr>
           <a:xfrm>
-            <a:off x="6118022" y="1866900"/>
-            <a:ext cx="2120748" cy="247650"/>
+            <a:off x="1181070" y="3981450"/>
+            <a:ext cx="1458182" cy="200025"/>
           </a:xfrm>
           <a:prstGeom prst="rect">
             <a:avLst/>
@@ -3573,30 +3172,98 @@
               <a:buNone/>
             </a:pPr>
             <a:r>
-              <a:rPr lang="en-US" sz="1450" b="1" dirty="0">
+              <a:rPr lang="en-US" sz="1350" dirty="0">
                 <a:solidFill>
-                  <a:srgbClr val="0A7659"/>
+                  <a:srgbClr val="22313B"/>
                 </a:solidFill>
-                <a:latin typeface="Malgun Gothic" pitchFamily="34" charset="0"/>
-                <a:ea typeface="Malgun Gothic" pitchFamily="34" charset="-122"/>
-                <a:cs typeface="Malgun Gothic" pitchFamily="34" charset="-120"/>
+                <a:latin typeface="Arial" pitchFamily="34" charset="0"/>
+                <a:ea typeface="Arial" pitchFamily="34" charset="-122"/>
+                <a:cs typeface="Arial" pitchFamily="34" charset="-120"/>
               </a:rPr>
-              <a:t>ambient_temp_C</a:t>
+              <a:t>driving_style_index</a:t>
             </a:r>
-            <a:endParaRPr lang="en-US" sz="1450" dirty="0"/>
-          </a:p>
-        </p:txBody>
-      </p:sp>
-      <p:sp>
-        <p:nvSpPr>
-          <p:cNvPr id="16" name="Text 14"/>
-          <p:cNvSpPr/>
-          <p:nvPr/>
-        </p:nvSpPr>
-        <p:spPr>
-          <a:xfrm>
-            <a:off x="6118022" y="2114550"/>
-            <a:ext cx="2120748" cy="205680"/>
+            <a:endParaRPr lang="en-US" sz="1350" dirty="0"/>
+          </a:p>
+        </p:txBody>
+      </p:sp>
+      <p:sp>
+        <p:nvSpPr>
+          <p:cNvPr id="16" name="Shape 14"/>
+          <p:cNvSpPr/>
+          <p:nvPr/>
+        </p:nvSpPr>
+        <p:spPr>
+          <a:xfrm>
+            <a:off x="761981" y="1543050"/>
+            <a:ext cx="3276518" cy="76200"/>
+          </a:xfrm>
+          <a:prstGeom prst="rect">
+            <a:avLst/>
+          </a:prstGeom>
+          <a:solidFill>
+            <a:srgbClr val="2F6BE8"/>
+          </a:solidFill>
+          <a:ln w="12700">
+            <a:solidFill>
+              <a:srgbClr val="FFFFFF">
+                <a:alpha val="0"/>
+              </a:srgbClr>
+            </a:solidFill>
+            <a:prstDash val="solid"/>
+          </a:ln>
+        </p:spPr>
+        <p:txBody>
+          <a:bodyPr/>
+          <a:lstStyle/>
+          <a:p>
+            <a:endParaRPr lang="ko-KR" altLang="en-US"/>
+          </a:p>
+        </p:txBody>
+      </p:sp>
+      <p:sp>
+        <p:nvSpPr>
+          <p:cNvPr id="17" name="Shape 15"/>
+          <p:cNvSpPr/>
+          <p:nvPr/>
+        </p:nvSpPr>
+        <p:spPr>
+          <a:xfrm>
+            <a:off x="4457589" y="1543050"/>
+            <a:ext cx="3276518" cy="3105150"/>
+          </a:xfrm>
+          <a:prstGeom prst="rect">
+            <a:avLst/>
+          </a:prstGeom>
+          <a:solidFill>
+            <a:srgbClr val="EEF2F1"/>
+          </a:solidFill>
+          <a:ln w="12700">
+            <a:solidFill>
+              <a:srgbClr val="FFFFFF">
+                <a:alpha val="0"/>
+              </a:srgbClr>
+            </a:solidFill>
+            <a:prstDash val="solid"/>
+          </a:ln>
+        </p:spPr>
+        <p:txBody>
+          <a:bodyPr/>
+          <a:lstStyle/>
+          <a:p>
+            <a:endParaRPr lang="ko-KR" altLang="en-US"/>
+          </a:p>
+        </p:txBody>
+      </p:sp>
+      <p:sp>
+        <p:nvSpPr>
+          <p:cNvPr id="18" name="Text 16"/>
+          <p:cNvSpPr/>
+          <p:nvPr/>
+        </p:nvSpPr>
+        <p:spPr>
+          <a:xfrm>
+            <a:off x="4705232" y="1809750"/>
+            <a:ext cx="1128089" cy="361950"/>
           </a:xfrm>
           <a:prstGeom prst="rect">
             <a:avLst/>
@@ -3612,91 +3279,64 @@
               <a:buNone/>
             </a:pPr>
             <a:r>
-              <a:rPr lang="en-US" sz="1200" dirty="0">
+              <a:rPr lang="en-US" sz="2050" b="1" dirty="0">
                 <a:solidFill>
-                  <a:srgbClr val="5D716B"/>
+                  <a:srgbClr val="20A879"/>
                 </a:solidFill>
-                <a:latin typeface="Malgun Gothic" pitchFamily="34" charset="0"/>
-                <a:ea typeface="Malgun Gothic" pitchFamily="34" charset="-122"/>
-                <a:cs typeface="Malgun Gothic" pitchFamily="34" charset="-120"/>
+                <a:latin typeface="Arial" pitchFamily="34" charset="0"/>
+                <a:ea typeface="Arial" pitchFamily="34" charset="-122"/>
+                <a:cs typeface="Arial" pitchFamily="34" charset="-120"/>
               </a:rPr>
-              <a:t>외부 온도</a:t>
+              <a:t>차량 상태</a:t>
             </a:r>
-            <a:endParaRPr lang="en-US" sz="1200" dirty="0"/>
-          </a:p>
-        </p:txBody>
-      </p:sp>
-      <p:sp>
-        <p:nvSpPr>
-          <p:cNvPr id="17" name="Shape 15"/>
-          <p:cNvSpPr/>
-          <p:nvPr/>
-        </p:nvSpPr>
-        <p:spPr>
-          <a:xfrm>
-            <a:off x="647684" y="3048000"/>
-            <a:ext cx="2511263" cy="1257300"/>
-          </a:xfrm>
-          <a:prstGeom prst="rect">
-            <a:avLst/>
-          </a:prstGeom>
-          <a:solidFill>
-            <a:srgbClr val="F0F5F3"/>
-          </a:solidFill>
-          <a:ln w="12700">
-            <a:solidFill>
-              <a:srgbClr val="FFFFFF">
-                <a:alpha val="0"/>
-              </a:srgbClr>
-            </a:solidFill>
-            <a:prstDash val="solid"/>
-          </a:ln>
-        </p:spPr>
-        <p:txBody>
-          <a:bodyPr/>
-          <a:lstStyle/>
-          <a:p>
-            <a:endParaRPr lang="ko-KR" altLang="en-US"/>
-          </a:p>
-        </p:txBody>
-      </p:sp>
-      <p:sp>
-        <p:nvSpPr>
-          <p:cNvPr id="18" name="Shape 16"/>
-          <p:cNvSpPr/>
-          <p:nvPr/>
-        </p:nvSpPr>
-        <p:spPr>
-          <a:xfrm>
-            <a:off x="671496" y="3048000"/>
-            <a:ext cx="0" cy="1257300"/>
-          </a:xfrm>
-          <a:prstGeom prst="line">
-            <a:avLst/>
-          </a:prstGeom>
-          <a:solidFill>
-            <a:srgbClr val="FFFFFF">
-              <a:alpha val="0"/>
-            </a:srgbClr>
-          </a:solidFill>
-          <a:ln w="47625">
-            <a:solidFill>
-              <a:srgbClr val="18AA7E"/>
-            </a:solidFill>
-            <a:prstDash val="solid"/>
-          </a:ln>
-        </p:spPr>
-      </p:sp>
-      <p:sp>
-        <p:nvSpPr>
-          <p:cNvPr id="19" name="Text 17"/>
-          <p:cNvSpPr/>
-          <p:nvPr/>
-        </p:nvSpPr>
-        <p:spPr>
-          <a:xfrm>
-            <a:off x="866753" y="3238500"/>
-            <a:ext cx="2120748" cy="247650"/>
+            <a:endParaRPr lang="en-US" sz="2050" dirty="0"/>
+          </a:p>
+        </p:txBody>
+      </p:sp>
+      <p:sp>
+        <p:nvSpPr>
+          <p:cNvPr id="19" name="Shape 17"/>
+          <p:cNvSpPr/>
+          <p:nvPr/>
+        </p:nvSpPr>
+        <p:spPr>
+          <a:xfrm>
+            <a:off x="4705232" y="2400300"/>
+            <a:ext cx="2781230" cy="400050"/>
+          </a:xfrm>
+          <a:prstGeom prst="rect">
+            <a:avLst/>
+          </a:prstGeom>
+          <a:solidFill>
+            <a:srgbClr val="FFFFFF"/>
+          </a:solidFill>
+          <a:ln w="12700">
+            <a:solidFill>
+              <a:srgbClr val="FFFFFF">
+                <a:alpha val="0"/>
+              </a:srgbClr>
+            </a:solidFill>
+            <a:prstDash val="solid"/>
+          </a:ln>
+        </p:spPr>
+        <p:txBody>
+          <a:bodyPr/>
+          <a:lstStyle/>
+          <a:p>
+            <a:endParaRPr lang="ko-KR" altLang="en-US"/>
+          </a:p>
+        </p:txBody>
+      </p:sp>
+      <p:sp>
+        <p:nvSpPr>
+          <p:cNvPr id="20" name="Text 18"/>
+          <p:cNvSpPr/>
+          <p:nvPr/>
+        </p:nvSpPr>
+        <p:spPr>
+          <a:xfrm>
+            <a:off x="4876678" y="2495550"/>
+            <a:ext cx="877022" cy="200025"/>
           </a:xfrm>
           <a:prstGeom prst="rect">
             <a:avLst/>
@@ -3712,30 +3352,64 @@
               <a:buNone/>
             </a:pPr>
             <a:r>
-              <a:rPr lang="en-US" sz="1450" b="1" dirty="0">
+              <a:rPr lang="en-US" sz="1350" dirty="0">
                 <a:solidFill>
-                  <a:srgbClr val="0A7659"/>
+                  <a:srgbClr val="22313B"/>
                 </a:solidFill>
-                <a:latin typeface="Malgun Gothic" pitchFamily="34" charset="0"/>
-                <a:ea typeface="Malgun Gothic" pitchFamily="34" charset="-122"/>
-                <a:cs typeface="Malgun Gothic" pitchFamily="34" charset="-120"/>
+                <a:latin typeface="Arial" pitchFamily="34" charset="0"/>
+                <a:ea typeface="Arial" pitchFamily="34" charset="-122"/>
+                <a:cs typeface="Arial" pitchFamily="34" charset="-120"/>
               </a:rPr>
-              <a:t>hvac_power_kw</a:t>
+              <a:t>payload_kg</a:t>
             </a:r>
-            <a:endParaRPr lang="en-US" sz="1450" dirty="0"/>
-          </a:p>
-        </p:txBody>
-      </p:sp>
-      <p:sp>
-        <p:nvSpPr>
-          <p:cNvPr id="20" name="Text 18"/>
-          <p:cNvSpPr/>
-          <p:nvPr/>
-        </p:nvSpPr>
-        <p:spPr>
-          <a:xfrm>
-            <a:off x="866753" y="3486150"/>
-            <a:ext cx="2120748" cy="205680"/>
+            <a:endParaRPr lang="en-US" sz="1350" dirty="0"/>
+          </a:p>
+        </p:txBody>
+      </p:sp>
+      <p:sp>
+        <p:nvSpPr>
+          <p:cNvPr id="21" name="Shape 19"/>
+          <p:cNvSpPr/>
+          <p:nvPr/>
+        </p:nvSpPr>
+        <p:spPr>
+          <a:xfrm>
+            <a:off x="4705232" y="2895600"/>
+            <a:ext cx="2781230" cy="400050"/>
+          </a:xfrm>
+          <a:prstGeom prst="rect">
+            <a:avLst/>
+          </a:prstGeom>
+          <a:solidFill>
+            <a:srgbClr val="FFFFFF"/>
+          </a:solidFill>
+          <a:ln w="12700">
+            <a:solidFill>
+              <a:srgbClr val="FFFFFF">
+                <a:alpha val="0"/>
+              </a:srgbClr>
+            </a:solidFill>
+            <a:prstDash val="solid"/>
+          </a:ln>
+        </p:spPr>
+        <p:txBody>
+          <a:bodyPr/>
+          <a:lstStyle/>
+          <a:p>
+            <a:endParaRPr lang="ko-KR" altLang="en-US"/>
+          </a:p>
+        </p:txBody>
+      </p:sp>
+      <p:sp>
+        <p:nvSpPr>
+          <p:cNvPr id="22" name="Text 20"/>
+          <p:cNvSpPr/>
+          <p:nvPr/>
+        </p:nvSpPr>
+        <p:spPr>
+          <a:xfrm>
+            <a:off x="4876678" y="2990850"/>
+            <a:ext cx="1219914" cy="200025"/>
           </a:xfrm>
           <a:prstGeom prst="rect">
             <a:avLst/>
@@ -3751,91 +3425,64 @@
               <a:buNone/>
             </a:pPr>
             <a:r>
-              <a:rPr lang="en-US" sz="1200" dirty="0">
+              <a:rPr lang="en-US" sz="1350" dirty="0">
                 <a:solidFill>
-                  <a:srgbClr val="5D716B"/>
+                  <a:srgbClr val="22313B"/>
                 </a:solidFill>
-                <a:latin typeface="Malgun Gothic" pitchFamily="34" charset="0"/>
-                <a:ea typeface="Malgun Gothic" pitchFamily="34" charset="-122"/>
-                <a:cs typeface="Malgun Gothic" pitchFamily="34" charset="-120"/>
+                <a:latin typeface="Arial" pitchFamily="34" charset="0"/>
+                <a:ea typeface="Arial" pitchFamily="34" charset="-122"/>
+                <a:cs typeface="Arial" pitchFamily="34" charset="-120"/>
               </a:rPr>
-              <a:t>냉난방 소비 전력</a:t>
+              <a:t>battery_temp_C</a:t>
             </a:r>
-            <a:endParaRPr lang="en-US" sz="1200" dirty="0"/>
-          </a:p>
-        </p:txBody>
-      </p:sp>
-      <p:sp>
-        <p:nvSpPr>
-          <p:cNvPr id="21" name="Shape 19"/>
-          <p:cNvSpPr/>
-          <p:nvPr/>
-        </p:nvSpPr>
-        <p:spPr>
-          <a:xfrm>
-            <a:off x="3273244" y="3048000"/>
-            <a:ext cx="2511412" cy="1257300"/>
-          </a:xfrm>
-          <a:prstGeom prst="rect">
-            <a:avLst/>
-          </a:prstGeom>
-          <a:solidFill>
-            <a:srgbClr val="F0F5F3"/>
-          </a:solidFill>
-          <a:ln w="12700">
-            <a:solidFill>
-              <a:srgbClr val="FFFFFF">
-                <a:alpha val="0"/>
-              </a:srgbClr>
-            </a:solidFill>
-            <a:prstDash val="solid"/>
-          </a:ln>
-        </p:spPr>
-        <p:txBody>
-          <a:bodyPr/>
-          <a:lstStyle/>
-          <a:p>
-            <a:endParaRPr lang="ko-KR" altLang="en-US"/>
-          </a:p>
-        </p:txBody>
-      </p:sp>
-      <p:sp>
-        <p:nvSpPr>
-          <p:cNvPr id="22" name="Shape 20"/>
-          <p:cNvSpPr/>
-          <p:nvPr/>
-        </p:nvSpPr>
-        <p:spPr>
-          <a:xfrm>
-            <a:off x="3297056" y="3048000"/>
-            <a:ext cx="0" cy="1257300"/>
-          </a:xfrm>
-          <a:prstGeom prst="line">
-            <a:avLst/>
-          </a:prstGeom>
-          <a:solidFill>
-            <a:srgbClr val="FFFFFF">
-              <a:alpha val="0"/>
-            </a:srgbClr>
-          </a:solidFill>
-          <a:ln w="47625">
-            <a:solidFill>
-              <a:srgbClr val="18AA7E"/>
-            </a:solidFill>
-            <a:prstDash val="solid"/>
-          </a:ln>
-        </p:spPr>
-      </p:sp>
-      <p:sp>
-        <p:nvSpPr>
-          <p:cNvPr id="23" name="Text 21"/>
-          <p:cNvSpPr/>
-          <p:nvPr/>
-        </p:nvSpPr>
-        <p:spPr>
-          <a:xfrm>
-            <a:off x="3492313" y="3238500"/>
-            <a:ext cx="2120897" cy="247650"/>
+            <a:endParaRPr lang="en-US" sz="1350" dirty="0"/>
+          </a:p>
+        </p:txBody>
+      </p:sp>
+      <p:sp>
+        <p:nvSpPr>
+          <p:cNvPr id="23" name="Shape 21"/>
+          <p:cNvSpPr/>
+          <p:nvPr/>
+        </p:nvSpPr>
+        <p:spPr>
+          <a:xfrm>
+            <a:off x="4705232" y="3390900"/>
+            <a:ext cx="2781230" cy="400050"/>
+          </a:xfrm>
+          <a:prstGeom prst="rect">
+            <a:avLst/>
+          </a:prstGeom>
+          <a:solidFill>
+            <a:srgbClr val="FFFFFF"/>
+          </a:solidFill>
+          <a:ln w="12700">
+            <a:solidFill>
+              <a:srgbClr val="FFFFFF">
+                <a:alpha val="0"/>
+              </a:srgbClr>
+            </a:solidFill>
+            <a:prstDash val="solid"/>
+          </a:ln>
+        </p:spPr>
+        <p:txBody>
+          <a:bodyPr/>
+          <a:lstStyle/>
+          <a:p>
+            <a:endParaRPr lang="ko-KR" altLang="en-US"/>
+          </a:p>
+        </p:txBody>
+      </p:sp>
+      <p:sp>
+        <p:nvSpPr>
+          <p:cNvPr id="24" name="Text 22"/>
+          <p:cNvSpPr/>
+          <p:nvPr/>
+        </p:nvSpPr>
+        <p:spPr>
+          <a:xfrm>
+            <a:off x="4876678" y="3486150"/>
+            <a:ext cx="1343736" cy="200025"/>
           </a:xfrm>
           <a:prstGeom prst="rect">
             <a:avLst/>
@@ -3851,30 +3498,98 @@
               <a:buNone/>
             </a:pPr>
             <a:r>
-              <a:rPr lang="en-US" sz="1450" b="1" dirty="0">
+              <a:rPr lang="en-US" sz="1350" dirty="0">
                 <a:solidFill>
-                  <a:srgbClr val="0A7659"/>
+                  <a:srgbClr val="22313B"/>
                 </a:solidFill>
-                <a:latin typeface="Malgun Gothic" pitchFamily="34" charset="0"/>
-                <a:ea typeface="Malgun Gothic" pitchFamily="34" charset="-122"/>
-                <a:cs typeface="Malgun Gothic" pitchFamily="34" charset="-120"/>
+                <a:latin typeface="Arial" pitchFamily="34" charset="0"/>
+                <a:ea typeface="Arial" pitchFamily="34" charset="-122"/>
+                <a:cs typeface="Arial" pitchFamily="34" charset="-120"/>
               </a:rPr>
-              <a:t>road_grade_pct</a:t>
+              <a:t>tire_pressure_bar</a:t>
             </a:r>
-            <a:endParaRPr lang="en-US" sz="1450" dirty="0"/>
-          </a:p>
-        </p:txBody>
-      </p:sp>
-      <p:sp>
-        <p:nvSpPr>
-          <p:cNvPr id="24" name="Text 22"/>
-          <p:cNvSpPr/>
-          <p:nvPr/>
-        </p:nvSpPr>
-        <p:spPr>
-          <a:xfrm>
-            <a:off x="3492313" y="3486150"/>
-            <a:ext cx="2120897" cy="205680"/>
+            <a:endParaRPr lang="en-US" sz="1350" dirty="0"/>
+          </a:p>
+        </p:txBody>
+      </p:sp>
+      <p:sp>
+        <p:nvSpPr>
+          <p:cNvPr id="25" name="Shape 23"/>
+          <p:cNvSpPr/>
+          <p:nvPr/>
+        </p:nvSpPr>
+        <p:spPr>
+          <a:xfrm>
+            <a:off x="4457589" y="1543050"/>
+            <a:ext cx="3276518" cy="76200"/>
+          </a:xfrm>
+          <a:prstGeom prst="rect">
+            <a:avLst/>
+          </a:prstGeom>
+          <a:solidFill>
+            <a:srgbClr val="20BF8D"/>
+          </a:solidFill>
+          <a:ln w="12700">
+            <a:solidFill>
+              <a:srgbClr val="FFFFFF">
+                <a:alpha val="0"/>
+              </a:srgbClr>
+            </a:solidFill>
+            <a:prstDash val="solid"/>
+          </a:ln>
+        </p:spPr>
+        <p:txBody>
+          <a:bodyPr/>
+          <a:lstStyle/>
+          <a:p>
+            <a:endParaRPr lang="ko-KR" altLang="en-US"/>
+          </a:p>
+        </p:txBody>
+      </p:sp>
+      <p:sp>
+        <p:nvSpPr>
+          <p:cNvPr id="26" name="Shape 24"/>
+          <p:cNvSpPr/>
+          <p:nvPr/>
+        </p:nvSpPr>
+        <p:spPr>
+          <a:xfrm>
+            <a:off x="8153196" y="1543050"/>
+            <a:ext cx="3276518" cy="3105150"/>
+          </a:xfrm>
+          <a:prstGeom prst="rect">
+            <a:avLst/>
+          </a:prstGeom>
+          <a:solidFill>
+            <a:srgbClr val="EEF2F1"/>
+          </a:solidFill>
+          <a:ln w="12700">
+            <a:solidFill>
+              <a:srgbClr val="FFFFFF">
+                <a:alpha val="0"/>
+              </a:srgbClr>
+            </a:solidFill>
+            <a:prstDash val="solid"/>
+          </a:ln>
+        </p:spPr>
+        <p:txBody>
+          <a:bodyPr/>
+          <a:lstStyle/>
+          <a:p>
+            <a:endParaRPr lang="ko-KR" altLang="en-US"/>
+          </a:p>
+        </p:txBody>
+      </p:sp>
+      <p:sp>
+        <p:nvSpPr>
+          <p:cNvPr id="27" name="Text 25"/>
+          <p:cNvSpPr/>
+          <p:nvPr/>
+        </p:nvSpPr>
+        <p:spPr>
+          <a:xfrm>
+            <a:off x="8400840" y="1809750"/>
+            <a:ext cx="1822355" cy="361950"/>
           </a:xfrm>
           <a:prstGeom prst="rect">
             <a:avLst/>
@@ -3890,91 +3605,64 @@
               <a:buNone/>
             </a:pPr>
             <a:r>
-              <a:rPr lang="en-US" sz="1200" dirty="0">
+              <a:rPr lang="en-US" sz="2050" b="1" dirty="0">
                 <a:solidFill>
-                  <a:srgbClr val="5D716B"/>
+                  <a:srgbClr val="E88900"/>
                 </a:solidFill>
-                <a:latin typeface="Malgun Gothic" pitchFamily="34" charset="0"/>
-                <a:ea typeface="Malgun Gothic" pitchFamily="34" charset="-122"/>
-                <a:cs typeface="Malgun Gothic" pitchFamily="34" charset="-120"/>
+                <a:latin typeface="Arial" pitchFamily="34" charset="0"/>
+                <a:ea typeface="Arial" pitchFamily="34" charset="-122"/>
+                <a:cs typeface="Arial" pitchFamily="34" charset="-120"/>
               </a:rPr>
-              <a:t>도로 경사도</a:t>
+              <a:t>환경 · 부가전력</a:t>
             </a:r>
-            <a:endParaRPr lang="en-US" sz="1200" dirty="0"/>
-          </a:p>
-        </p:txBody>
-      </p:sp>
-      <p:sp>
-        <p:nvSpPr>
-          <p:cNvPr id="25" name="Shape 23"/>
-          <p:cNvSpPr/>
-          <p:nvPr/>
-        </p:nvSpPr>
-        <p:spPr>
-          <a:xfrm>
-            <a:off x="5898953" y="3048000"/>
-            <a:ext cx="2511263" cy="1257300"/>
-          </a:xfrm>
-          <a:prstGeom prst="rect">
-            <a:avLst/>
-          </a:prstGeom>
-          <a:solidFill>
-            <a:srgbClr val="F0F5F3"/>
-          </a:solidFill>
-          <a:ln w="12700">
-            <a:solidFill>
-              <a:srgbClr val="FFFFFF">
-                <a:alpha val="0"/>
-              </a:srgbClr>
-            </a:solidFill>
-            <a:prstDash val="solid"/>
-          </a:ln>
-        </p:spPr>
-        <p:txBody>
-          <a:bodyPr/>
-          <a:lstStyle/>
-          <a:p>
-            <a:endParaRPr lang="ko-KR" altLang="en-US"/>
-          </a:p>
-        </p:txBody>
-      </p:sp>
-      <p:sp>
-        <p:nvSpPr>
-          <p:cNvPr id="26" name="Shape 24"/>
-          <p:cNvSpPr/>
-          <p:nvPr/>
-        </p:nvSpPr>
-        <p:spPr>
-          <a:xfrm>
-            <a:off x="5922765" y="3048000"/>
-            <a:ext cx="0" cy="1257300"/>
-          </a:xfrm>
-          <a:prstGeom prst="line">
-            <a:avLst/>
-          </a:prstGeom>
-          <a:solidFill>
-            <a:srgbClr val="FFFFFF">
-              <a:alpha val="0"/>
-            </a:srgbClr>
-          </a:solidFill>
-          <a:ln w="47625">
-            <a:solidFill>
-              <a:srgbClr val="18AA7E"/>
-            </a:solidFill>
-            <a:prstDash val="solid"/>
-          </a:ln>
-        </p:spPr>
-      </p:sp>
-      <p:sp>
-        <p:nvSpPr>
-          <p:cNvPr id="27" name="Text 25"/>
-          <p:cNvSpPr/>
-          <p:nvPr/>
-        </p:nvSpPr>
-        <p:spPr>
-          <a:xfrm>
-            <a:off x="6118022" y="3238500"/>
-            <a:ext cx="2120748" cy="247650"/>
+            <a:endParaRPr lang="en-US" sz="2050" dirty="0"/>
+          </a:p>
+        </p:txBody>
+      </p:sp>
+      <p:sp>
+        <p:nvSpPr>
+          <p:cNvPr id="28" name="Shape 26"/>
+          <p:cNvSpPr/>
+          <p:nvPr/>
+        </p:nvSpPr>
+        <p:spPr>
+          <a:xfrm>
+            <a:off x="8400840" y="2400300"/>
+            <a:ext cx="2781230" cy="400050"/>
+          </a:xfrm>
+          <a:prstGeom prst="rect">
+            <a:avLst/>
+          </a:prstGeom>
+          <a:solidFill>
+            <a:srgbClr val="FFFFFF"/>
+          </a:solidFill>
+          <a:ln w="12700">
+            <a:solidFill>
+              <a:srgbClr val="FFFFFF">
+                <a:alpha val="0"/>
+              </a:srgbClr>
+            </a:solidFill>
+            <a:prstDash val="solid"/>
+          </a:ln>
+        </p:spPr>
+        <p:txBody>
+          <a:bodyPr/>
+          <a:lstStyle/>
+          <a:p>
+            <a:endParaRPr lang="ko-KR" altLang="en-US"/>
+          </a:p>
+        </p:txBody>
+      </p:sp>
+      <p:sp>
+        <p:nvSpPr>
+          <p:cNvPr id="29" name="Text 27"/>
+          <p:cNvSpPr/>
+          <p:nvPr/>
+        </p:nvSpPr>
+        <p:spPr>
+          <a:xfrm>
+            <a:off x="8572286" y="2495550"/>
+            <a:ext cx="1305636" cy="200025"/>
           </a:xfrm>
           <a:prstGeom prst="rect">
             <a:avLst/>
@@ -3990,30 +3678,64 @@
               <a:buNone/>
             </a:pPr>
             <a:r>
-              <a:rPr lang="en-US" sz="1450" b="1" dirty="0">
+              <a:rPr lang="en-US" sz="1350" dirty="0">
                 <a:solidFill>
-                  <a:srgbClr val="0A7659"/>
+                  <a:srgbClr val="22313B"/>
                 </a:solidFill>
-                <a:latin typeface="Malgun Gothic" pitchFamily="34" charset="0"/>
-                <a:ea typeface="Malgun Gothic" pitchFamily="34" charset="-122"/>
-                <a:cs typeface="Malgun Gothic" pitchFamily="34" charset="-120"/>
+                <a:latin typeface="Arial" pitchFamily="34" charset="0"/>
+                <a:ea typeface="Arial" pitchFamily="34" charset="-122"/>
+                <a:cs typeface="Arial" pitchFamily="34" charset="-120"/>
               </a:rPr>
-              <a:t>battery_temp_C</a:t>
+              <a:t>ambient_temp_C</a:t>
             </a:r>
-            <a:endParaRPr lang="en-US" sz="1450" dirty="0"/>
-          </a:p>
-        </p:txBody>
-      </p:sp>
-      <p:sp>
-        <p:nvSpPr>
-          <p:cNvPr id="28" name="Text 26"/>
-          <p:cNvSpPr/>
-          <p:nvPr/>
-        </p:nvSpPr>
-        <p:spPr>
-          <a:xfrm>
-            <a:off x="6118022" y="3486150"/>
-            <a:ext cx="2120748" cy="205680"/>
+            <a:endParaRPr lang="en-US" sz="1350" dirty="0"/>
+          </a:p>
+        </p:txBody>
+      </p:sp>
+      <p:sp>
+        <p:nvSpPr>
+          <p:cNvPr id="30" name="Shape 28"/>
+          <p:cNvSpPr/>
+          <p:nvPr/>
+        </p:nvSpPr>
+        <p:spPr>
+          <a:xfrm>
+            <a:off x="8400840" y="2895600"/>
+            <a:ext cx="2781230" cy="400050"/>
+          </a:xfrm>
+          <a:prstGeom prst="rect">
+            <a:avLst/>
+          </a:prstGeom>
+          <a:solidFill>
+            <a:srgbClr val="FFFFFF"/>
+          </a:solidFill>
+          <a:ln w="12700">
+            <a:solidFill>
+              <a:srgbClr val="FFFFFF">
+                <a:alpha val="0"/>
+              </a:srgbClr>
+            </a:solidFill>
+            <a:prstDash val="solid"/>
+          </a:ln>
+        </p:spPr>
+        <p:txBody>
+          <a:bodyPr/>
+          <a:lstStyle/>
+          <a:p>
+            <a:endParaRPr lang="ko-KR" altLang="en-US"/>
+          </a:p>
+        </p:txBody>
+      </p:sp>
+      <p:sp>
+        <p:nvSpPr>
+          <p:cNvPr id="31" name="Text 29"/>
+          <p:cNvSpPr/>
+          <p:nvPr/>
+        </p:nvSpPr>
+        <p:spPr>
+          <a:xfrm>
+            <a:off x="8572286" y="2990850"/>
+            <a:ext cx="1229438" cy="200025"/>
           </a:xfrm>
           <a:prstGeom prst="rect">
             <a:avLst/>
@@ -4029,91 +3751,98 @@
               <a:buNone/>
             </a:pPr>
             <a:r>
-              <a:rPr lang="en-US" sz="1200" dirty="0">
+              <a:rPr lang="en-US" sz="1350" dirty="0">
                 <a:solidFill>
-                  <a:srgbClr val="5D716B"/>
+                  <a:srgbClr val="22313B"/>
                 </a:solidFill>
-                <a:latin typeface="Malgun Gothic" pitchFamily="34" charset="0"/>
-                <a:ea typeface="Malgun Gothic" pitchFamily="34" charset="-122"/>
-                <a:cs typeface="Malgun Gothic" pitchFamily="34" charset="-120"/>
+                <a:latin typeface="Arial" pitchFamily="34" charset="0"/>
+                <a:ea typeface="Arial" pitchFamily="34" charset="-122"/>
+                <a:cs typeface="Arial" pitchFamily="34" charset="-120"/>
               </a:rPr>
-              <a:t>배터리 온도</a:t>
+              <a:t>hvac_power_kw</a:t>
             </a:r>
-            <a:endParaRPr lang="en-US" sz="1200" dirty="0"/>
-          </a:p>
-        </p:txBody>
-      </p:sp>
-      <p:sp>
-        <p:nvSpPr>
-          <p:cNvPr id="29" name="Shape 27"/>
-          <p:cNvSpPr/>
-          <p:nvPr/>
-        </p:nvSpPr>
-        <p:spPr>
-          <a:xfrm>
-            <a:off x="647684" y="4419600"/>
-            <a:ext cx="2511263" cy="1257300"/>
-          </a:xfrm>
-          <a:prstGeom prst="rect">
-            <a:avLst/>
-          </a:prstGeom>
-          <a:solidFill>
-            <a:srgbClr val="F0F5F3"/>
-          </a:solidFill>
-          <a:ln w="12700">
-            <a:solidFill>
-              <a:srgbClr val="FFFFFF">
-                <a:alpha val="0"/>
-              </a:srgbClr>
-            </a:solidFill>
-            <a:prstDash val="solid"/>
-          </a:ln>
-        </p:spPr>
-        <p:txBody>
-          <a:bodyPr/>
-          <a:lstStyle/>
-          <a:p>
-            <a:endParaRPr lang="ko-KR" altLang="en-US"/>
-          </a:p>
-        </p:txBody>
-      </p:sp>
-      <p:sp>
-        <p:nvSpPr>
-          <p:cNvPr id="30" name="Shape 28"/>
-          <p:cNvSpPr/>
-          <p:nvPr/>
-        </p:nvSpPr>
-        <p:spPr>
-          <a:xfrm>
-            <a:off x="671496" y="4419600"/>
-            <a:ext cx="0" cy="1257300"/>
-          </a:xfrm>
-          <a:prstGeom prst="line">
-            <a:avLst/>
-          </a:prstGeom>
-          <a:solidFill>
-            <a:srgbClr val="FFFFFF">
-              <a:alpha val="0"/>
-            </a:srgbClr>
-          </a:solidFill>
-          <a:ln w="47625">
-            <a:solidFill>
-              <a:srgbClr val="18AA7E"/>
-            </a:solidFill>
-            <a:prstDash val="solid"/>
-          </a:ln>
-        </p:spPr>
-      </p:sp>
-      <p:sp>
-        <p:nvSpPr>
-          <p:cNvPr id="31" name="Text 29"/>
-          <p:cNvSpPr/>
-          <p:nvPr/>
-        </p:nvSpPr>
-        <p:spPr>
-          <a:xfrm>
-            <a:off x="866753" y="4610100"/>
-            <a:ext cx="2120748" cy="247650"/>
+            <a:endParaRPr lang="en-US" sz="1350" dirty="0"/>
+          </a:p>
+        </p:txBody>
+      </p:sp>
+      <p:sp>
+        <p:nvSpPr>
+          <p:cNvPr id="32" name="Shape 30"/>
+          <p:cNvSpPr/>
+          <p:nvPr/>
+        </p:nvSpPr>
+        <p:spPr>
+          <a:xfrm>
+            <a:off x="8153196" y="1543050"/>
+            <a:ext cx="3276518" cy="76200"/>
+          </a:xfrm>
+          <a:prstGeom prst="rect">
+            <a:avLst/>
+          </a:prstGeom>
+          <a:solidFill>
+            <a:srgbClr val="F5A33B"/>
+          </a:solidFill>
+          <a:ln w="12700">
+            <a:solidFill>
+              <a:srgbClr val="FFFFFF">
+                <a:alpha val="0"/>
+              </a:srgbClr>
+            </a:solidFill>
+            <a:prstDash val="solid"/>
+          </a:ln>
+        </p:spPr>
+        <p:txBody>
+          <a:bodyPr/>
+          <a:lstStyle/>
+          <a:p>
+            <a:endParaRPr lang="ko-KR" altLang="en-US"/>
+          </a:p>
+        </p:txBody>
+      </p:sp>
+      <p:sp>
+        <p:nvSpPr>
+          <p:cNvPr id="36" name="Shape 34"/>
+          <p:cNvSpPr/>
+          <p:nvPr/>
+        </p:nvSpPr>
+        <p:spPr>
+          <a:xfrm>
+            <a:off x="2952676" y="5314950"/>
+            <a:ext cx="6286343" cy="838200"/>
+          </a:xfrm>
+          <a:prstGeom prst="rect">
+            <a:avLst/>
+          </a:prstGeom>
+          <a:solidFill>
+            <a:srgbClr val="102832"/>
+          </a:solidFill>
+          <a:ln w="12700">
+            <a:solidFill>
+              <a:srgbClr val="FFFFFF">
+                <a:alpha val="0"/>
+              </a:srgbClr>
+            </a:solidFill>
+            <a:prstDash val="solid"/>
+          </a:ln>
+        </p:spPr>
+        <p:txBody>
+          <a:bodyPr/>
+          <a:lstStyle/>
+          <a:p>
+            <a:endParaRPr lang="ko-KR" altLang="en-US"/>
+          </a:p>
+        </p:txBody>
+      </p:sp>
+      <p:sp>
+        <p:nvSpPr>
+          <p:cNvPr id="37" name="Text 35"/>
+          <p:cNvSpPr/>
+          <p:nvPr/>
+        </p:nvSpPr>
+        <p:spPr>
+          <a:xfrm>
+            <a:off x="3238419" y="5524500"/>
+            <a:ext cx="5714857" cy="295275"/>
           </a:xfrm>
           <a:prstGeom prst="rect">
             <a:avLst/>
@@ -4125,497 +3854,34 @@
           <a:bodyPr wrap="square" lIns="0" tIns="0" rIns="0" bIns="0" rtlCol="0" anchor="t"/>
           <a:lstStyle/>
           <a:p>
-            <a:pPr marL="0" indent="0" algn="l">
+            <a:pPr marL="0" indent="0" algn="ctr">
               <a:buNone/>
             </a:pPr>
             <a:r>
-              <a:rPr lang="en-US" sz="1450" b="1" dirty="0">
-                <a:solidFill>
-                  <a:srgbClr val="0A7659"/>
-                </a:solidFill>
-                <a:latin typeface="Malgun Gothic" pitchFamily="34" charset="0"/>
-                <a:ea typeface="Malgun Gothic" pitchFamily="34" charset="-122"/>
-                <a:cs typeface="Malgun Gothic" pitchFamily="34" charset="-120"/>
-              </a:rPr>
-              <a:t>driving_style_index</a:t>
-            </a:r>
-            <a:endParaRPr lang="en-US" sz="1450" dirty="0"/>
-          </a:p>
-        </p:txBody>
-      </p:sp>
-      <p:sp>
-        <p:nvSpPr>
-          <p:cNvPr id="32" name="Text 30"/>
-          <p:cNvSpPr/>
-          <p:nvPr/>
-        </p:nvSpPr>
-        <p:spPr>
-          <a:xfrm>
-            <a:off x="866753" y="4857750"/>
-            <a:ext cx="2120748" cy="205680"/>
-          </a:xfrm>
-          <a:prstGeom prst="rect">
-            <a:avLst/>
-          </a:prstGeom>
-          <a:noFill/>
-          <a:ln/>
-        </p:spPr>
-        <p:txBody>
-          <a:bodyPr wrap="square" lIns="0" tIns="0" rIns="0" bIns="0" rtlCol="0" anchor="t"/>
-          <a:lstStyle/>
-          <a:p>
-            <a:pPr marL="0" indent="0" algn="l">
-              <a:buNone/>
-            </a:pPr>
-            <a:r>
-              <a:rPr lang="en-US" sz="1200" dirty="0">
-                <a:solidFill>
-                  <a:srgbClr val="5D716B"/>
-                </a:solidFill>
-                <a:latin typeface="Malgun Gothic" pitchFamily="34" charset="0"/>
-                <a:ea typeface="Malgun Gothic" pitchFamily="34" charset="-122"/>
-                <a:cs typeface="Malgun Gothic" pitchFamily="34" charset="-120"/>
-              </a:rPr>
-              <a:t>운전 스타일 지수</a:t>
-            </a:r>
-            <a:endParaRPr lang="en-US" sz="1200" dirty="0"/>
-          </a:p>
-        </p:txBody>
-      </p:sp>
-      <p:sp>
-        <p:nvSpPr>
-          <p:cNvPr id="33" name="Shape 31"/>
-          <p:cNvSpPr/>
-          <p:nvPr/>
-        </p:nvSpPr>
-        <p:spPr>
-          <a:xfrm>
-            <a:off x="3273244" y="4419600"/>
-            <a:ext cx="2511412" cy="1257300"/>
-          </a:xfrm>
-          <a:prstGeom prst="rect">
-            <a:avLst/>
-          </a:prstGeom>
-          <a:solidFill>
-            <a:srgbClr val="F0F5F3"/>
-          </a:solidFill>
-          <a:ln w="12700">
-            <a:solidFill>
-              <a:srgbClr val="FFFFFF">
-                <a:alpha val="0"/>
-              </a:srgbClr>
-            </a:solidFill>
-            <a:prstDash val="solid"/>
-          </a:ln>
-        </p:spPr>
-        <p:txBody>
-          <a:bodyPr/>
-          <a:lstStyle/>
-          <a:p>
-            <a:endParaRPr lang="ko-KR" altLang="en-US"/>
-          </a:p>
-        </p:txBody>
-      </p:sp>
-      <p:sp>
-        <p:nvSpPr>
-          <p:cNvPr id="34" name="Shape 32"/>
-          <p:cNvSpPr/>
-          <p:nvPr/>
-        </p:nvSpPr>
-        <p:spPr>
-          <a:xfrm>
-            <a:off x="3297056" y="4419600"/>
-            <a:ext cx="0" cy="1257300"/>
-          </a:xfrm>
-          <a:prstGeom prst="line">
-            <a:avLst/>
-          </a:prstGeom>
-          <a:solidFill>
-            <a:srgbClr val="FFFFFF">
-              <a:alpha val="0"/>
-            </a:srgbClr>
-          </a:solidFill>
-          <a:ln w="47625">
-            <a:solidFill>
-              <a:srgbClr val="18AA7E"/>
-            </a:solidFill>
-            <a:prstDash val="solid"/>
-          </a:ln>
-        </p:spPr>
-      </p:sp>
-      <p:sp>
-        <p:nvSpPr>
-          <p:cNvPr id="35" name="Text 33"/>
-          <p:cNvSpPr/>
-          <p:nvPr/>
-        </p:nvSpPr>
-        <p:spPr>
-          <a:xfrm>
-            <a:off x="3492313" y="4610100"/>
-            <a:ext cx="2120897" cy="247650"/>
-          </a:xfrm>
-          <a:prstGeom prst="rect">
-            <a:avLst/>
-          </a:prstGeom>
-          <a:noFill/>
-          <a:ln/>
-        </p:spPr>
-        <p:txBody>
-          <a:bodyPr wrap="square" lIns="0" tIns="0" rIns="0" bIns="0" rtlCol="0" anchor="t"/>
-          <a:lstStyle/>
-          <a:p>
-            <a:pPr marL="0" indent="0" algn="l">
-              <a:buNone/>
-            </a:pPr>
-            <a:r>
-              <a:rPr lang="en-US" sz="1450" b="1" dirty="0">
-                <a:solidFill>
-                  <a:srgbClr val="0A7659"/>
-                </a:solidFill>
-                <a:latin typeface="Malgun Gothic" pitchFamily="34" charset="0"/>
-                <a:ea typeface="Malgun Gothic" pitchFamily="34" charset="-122"/>
-                <a:cs typeface="Malgun Gothic" pitchFamily="34" charset="-120"/>
-              </a:rPr>
-              <a:t>tire_pressure_bar</a:t>
-            </a:r>
-            <a:endParaRPr lang="en-US" sz="1450" dirty="0"/>
-          </a:p>
-        </p:txBody>
-      </p:sp>
-      <p:sp>
-        <p:nvSpPr>
-          <p:cNvPr id="36" name="Text 34"/>
-          <p:cNvSpPr/>
-          <p:nvPr/>
-        </p:nvSpPr>
-        <p:spPr>
-          <a:xfrm>
-            <a:off x="3492313" y="4857750"/>
-            <a:ext cx="2120897" cy="205680"/>
-          </a:xfrm>
-          <a:prstGeom prst="rect">
-            <a:avLst/>
-          </a:prstGeom>
-          <a:noFill/>
-          <a:ln/>
-        </p:spPr>
-        <p:txBody>
-          <a:bodyPr wrap="square" lIns="0" tIns="0" rIns="0" bIns="0" rtlCol="0" anchor="t"/>
-          <a:lstStyle/>
-          <a:p>
-            <a:pPr marL="0" indent="0" algn="l">
-              <a:buNone/>
-            </a:pPr>
-            <a:r>
-              <a:rPr lang="en-US" sz="1200" dirty="0">
-                <a:solidFill>
-                  <a:srgbClr val="5D716B"/>
-                </a:solidFill>
-                <a:latin typeface="Malgun Gothic" pitchFamily="34" charset="0"/>
-                <a:ea typeface="Malgun Gothic" pitchFamily="34" charset="-122"/>
-                <a:cs typeface="Malgun Gothic" pitchFamily="34" charset="-120"/>
-              </a:rPr>
-              <a:t>타이어 공기압</a:t>
-            </a:r>
-            <a:endParaRPr lang="en-US" sz="1200" dirty="0"/>
-          </a:p>
-        </p:txBody>
-      </p:sp>
-      <p:sp>
-        <p:nvSpPr>
-          <p:cNvPr id="37" name="Shape 35"/>
-          <p:cNvSpPr/>
-          <p:nvPr/>
-        </p:nvSpPr>
-        <p:spPr>
-          <a:xfrm>
-            <a:off x="5898953" y="4419600"/>
-            <a:ext cx="2511263" cy="1257300"/>
-          </a:xfrm>
-          <a:prstGeom prst="rect">
-            <a:avLst/>
-          </a:prstGeom>
-          <a:solidFill>
-            <a:srgbClr val="F0F5F3"/>
-          </a:solidFill>
-          <a:ln w="12700">
-            <a:solidFill>
-              <a:srgbClr val="FFFFFF">
-                <a:alpha val="0"/>
-              </a:srgbClr>
-            </a:solidFill>
-            <a:prstDash val="solid"/>
-          </a:ln>
-        </p:spPr>
-        <p:txBody>
-          <a:bodyPr/>
-          <a:lstStyle/>
-          <a:p>
-            <a:endParaRPr lang="ko-KR" altLang="en-US"/>
-          </a:p>
-        </p:txBody>
-      </p:sp>
-      <p:sp>
-        <p:nvSpPr>
-          <p:cNvPr id="38" name="Shape 36"/>
-          <p:cNvSpPr/>
-          <p:nvPr/>
-        </p:nvSpPr>
-        <p:spPr>
-          <a:xfrm>
-            <a:off x="5922765" y="4419600"/>
-            <a:ext cx="0" cy="1257300"/>
-          </a:xfrm>
-          <a:prstGeom prst="line">
-            <a:avLst/>
-          </a:prstGeom>
-          <a:solidFill>
-            <a:srgbClr val="FFFFFF">
-              <a:alpha val="0"/>
-            </a:srgbClr>
-          </a:solidFill>
-          <a:ln w="47625">
-            <a:solidFill>
-              <a:srgbClr val="18AA7E"/>
-            </a:solidFill>
-            <a:prstDash val="solid"/>
-          </a:ln>
-        </p:spPr>
-      </p:sp>
-      <p:sp>
-        <p:nvSpPr>
-          <p:cNvPr id="39" name="Text 37"/>
-          <p:cNvSpPr/>
-          <p:nvPr/>
-        </p:nvSpPr>
-        <p:spPr>
-          <a:xfrm>
-            <a:off x="6118022" y="4610100"/>
-            <a:ext cx="2120748" cy="247650"/>
-          </a:xfrm>
-          <a:prstGeom prst="rect">
-            <a:avLst/>
-          </a:prstGeom>
-          <a:noFill/>
-          <a:ln/>
-        </p:spPr>
-        <p:txBody>
-          <a:bodyPr wrap="square" lIns="0" tIns="0" rIns="0" bIns="0" rtlCol="0" anchor="t"/>
-          <a:lstStyle/>
-          <a:p>
-            <a:pPr marL="0" indent="0" algn="l">
-              <a:buNone/>
-            </a:pPr>
-            <a:r>
-              <a:rPr lang="en-US" sz="1450" b="1" dirty="0">
-                <a:solidFill>
-                  <a:srgbClr val="0A7659"/>
-                </a:solidFill>
-                <a:latin typeface="Malgun Gothic" pitchFamily="34" charset="0"/>
-                <a:ea typeface="Malgun Gothic" pitchFamily="34" charset="-122"/>
-                <a:cs typeface="Malgun Gothic" pitchFamily="34" charset="-120"/>
-              </a:rPr>
-              <a:t>trip_distance_km</a:t>
-            </a:r>
-            <a:endParaRPr lang="en-US" sz="1450" dirty="0"/>
-          </a:p>
-        </p:txBody>
-      </p:sp>
-      <p:sp>
-        <p:nvSpPr>
-          <p:cNvPr id="40" name="Text 38"/>
-          <p:cNvSpPr/>
-          <p:nvPr/>
-        </p:nvSpPr>
-        <p:spPr>
-          <a:xfrm>
-            <a:off x="6118022" y="4857750"/>
-            <a:ext cx="2120748" cy="205680"/>
-          </a:xfrm>
-          <a:prstGeom prst="rect">
-            <a:avLst/>
-          </a:prstGeom>
-          <a:noFill/>
-          <a:ln/>
-        </p:spPr>
-        <p:txBody>
-          <a:bodyPr wrap="square" lIns="0" tIns="0" rIns="0" bIns="0" rtlCol="0" anchor="t"/>
-          <a:lstStyle/>
-          <a:p>
-            <a:pPr marL="0" indent="0" algn="l">
-              <a:buNone/>
-            </a:pPr>
-            <a:r>
-              <a:rPr lang="en-US" sz="1200" dirty="0">
-                <a:solidFill>
-                  <a:srgbClr val="5D716B"/>
-                </a:solidFill>
-                <a:latin typeface="Malgun Gothic" pitchFamily="34" charset="0"/>
-                <a:ea typeface="Malgun Gothic" pitchFamily="34" charset="-122"/>
-                <a:cs typeface="Malgun Gothic" pitchFamily="34" charset="-120"/>
-              </a:rPr>
-              <a:t>주행 거리</a:t>
-            </a:r>
-            <a:endParaRPr lang="en-US" sz="1200" dirty="0"/>
-          </a:p>
-        </p:txBody>
-      </p:sp>
-      <p:sp>
-        <p:nvSpPr>
-          <p:cNvPr id="41" name="Shape 39"/>
-          <p:cNvSpPr/>
-          <p:nvPr/>
-        </p:nvSpPr>
-        <p:spPr>
-          <a:xfrm>
-            <a:off x="8419889" y="3390900"/>
-            <a:ext cx="361941" cy="38100"/>
-          </a:xfrm>
-          <a:prstGeom prst="rect">
-            <a:avLst/>
-          </a:prstGeom>
-          <a:solidFill>
-            <a:srgbClr val="18AA7E"/>
-          </a:solidFill>
-          <a:ln w="12700">
-            <a:solidFill>
-              <a:srgbClr val="FFFFFF">
-                <a:alpha val="0"/>
-              </a:srgbClr>
-            </a:solidFill>
-            <a:prstDash val="solid"/>
-          </a:ln>
-        </p:spPr>
-        <p:txBody>
-          <a:bodyPr/>
-          <a:lstStyle/>
-          <a:p>
-            <a:endParaRPr lang="ko-KR" altLang="en-US"/>
-          </a:p>
-        </p:txBody>
-      </p:sp>
-      <p:sp>
-        <p:nvSpPr>
-          <p:cNvPr id="42" name="Shape 40"/>
-          <p:cNvSpPr/>
-          <p:nvPr/>
-        </p:nvSpPr>
-        <p:spPr>
-          <a:xfrm>
-            <a:off x="8877078" y="1676400"/>
-            <a:ext cx="2666933" cy="4000500"/>
-          </a:xfrm>
-          <a:prstGeom prst="rect">
-            <a:avLst/>
-          </a:prstGeom>
-          <a:solidFill>
-            <a:srgbClr val="0D2630"/>
-          </a:solidFill>
-          <a:ln w="12700">
-            <a:solidFill>
-              <a:srgbClr val="FFFFFF">
-                <a:alpha val="0"/>
-              </a:srgbClr>
-            </a:solidFill>
-            <a:prstDash val="solid"/>
-          </a:ln>
-        </p:spPr>
-        <p:txBody>
-          <a:bodyPr/>
-          <a:lstStyle/>
-          <a:p>
-            <a:endParaRPr lang="ko-KR" altLang="en-US"/>
-          </a:p>
-        </p:txBody>
-      </p:sp>
-      <p:sp>
-        <p:nvSpPr>
-          <p:cNvPr id="43" name="Text 41"/>
-          <p:cNvSpPr/>
-          <p:nvPr/>
-        </p:nvSpPr>
-        <p:spPr>
-          <a:xfrm>
-            <a:off x="9162821" y="1962150"/>
-            <a:ext cx="2095448" cy="200025"/>
-          </a:xfrm>
-          <a:prstGeom prst="rect">
-            <a:avLst/>
-          </a:prstGeom>
-          <a:noFill/>
-          <a:ln/>
-        </p:spPr>
-        <p:txBody>
-          <a:bodyPr wrap="square" lIns="0" tIns="0" rIns="0" bIns="0" rtlCol="0" anchor="t"/>
-          <a:lstStyle/>
-          <a:p>
-            <a:pPr marL="0" indent="0" algn="l">
-              <a:buNone/>
-            </a:pPr>
-            <a:r>
-              <a:rPr lang="en-US" sz="1050" b="1" dirty="0">
-                <a:solidFill>
-                  <a:srgbClr val="61E1B9"/>
-                </a:solidFill>
-                <a:latin typeface="Malgun Gothic" pitchFamily="34" charset="0"/>
-                <a:ea typeface="Malgun Gothic" pitchFamily="34" charset="-122"/>
-                <a:cs typeface="Malgun Gothic" pitchFamily="34" charset="-120"/>
-              </a:rPr>
-              <a:t>REGRESSION TARGET</a:t>
-            </a:r>
-            <a:endParaRPr lang="en-US" sz="1050" dirty="0"/>
-          </a:p>
-        </p:txBody>
-      </p:sp>
-      <p:sp>
-        <p:nvSpPr>
-          <p:cNvPr id="44" name="Text 42"/>
-          <p:cNvSpPr/>
-          <p:nvPr/>
-        </p:nvSpPr>
-        <p:spPr>
-          <a:xfrm>
-            <a:off x="9162821" y="2760985"/>
-            <a:ext cx="2095448" cy="955030"/>
-          </a:xfrm>
-          <a:prstGeom prst="rect">
-            <a:avLst/>
-          </a:prstGeom>
-          <a:noFill/>
-          <a:ln/>
-        </p:spPr>
-        <p:txBody>
-          <a:bodyPr wrap="square" lIns="0" tIns="0" rIns="0" bIns="0" rtlCol="0" anchor="t"/>
-          <a:lstStyle/>
-          <a:p>
-            <a:pPr marL="0" indent="0" algn="l">
-              <a:buNone/>
-            </a:pPr>
-            <a:r>
-              <a:rPr lang="en-US" sz="1400" b="1" dirty="0">
+              <a:rPr lang="en-US" sz="1650" b="1" dirty="0">
                 <a:solidFill>
                   <a:srgbClr val="FFFFFF"/>
                 </a:solidFill>
-                <a:latin typeface="Malgun Gothic" pitchFamily="34" charset="0"/>
-                <a:ea typeface="Malgun Gothic" pitchFamily="34" charset="-122"/>
-                <a:cs typeface="Malgun Gothic" pitchFamily="34" charset="-120"/>
+                <a:latin typeface="Arial" pitchFamily="34" charset="0"/>
+                <a:ea typeface="Arial" pitchFamily="34" charset="-122"/>
+                <a:cs typeface="Arial" pitchFamily="34" charset="-120"/>
               </a:rPr>
-              <a:t>Energy consumption</a:t>
+              <a:t>Target: energy_consumption_kwhper100km</a:t>
             </a:r>
-            <a:endParaRPr lang="en-US" sz="1400" dirty="0"/>
-          </a:p>
-        </p:txBody>
-      </p:sp>
-      <p:sp>
-        <p:nvSpPr>
-          <p:cNvPr id="45" name="Text 43"/>
-          <p:cNvSpPr/>
-          <p:nvPr/>
-        </p:nvSpPr>
-        <p:spPr>
-          <a:xfrm>
-            <a:off x="9162821" y="3049265"/>
-            <a:ext cx="2095448" cy="1143000"/>
+            <a:endParaRPr lang="en-US" sz="1650" dirty="0"/>
+          </a:p>
+        </p:txBody>
+      </p:sp>
+      <p:sp>
+        <p:nvSpPr>
+          <p:cNvPr id="38" name="Text 36"/>
+          <p:cNvSpPr/>
+          <p:nvPr/>
+        </p:nvSpPr>
+        <p:spPr>
+          <a:xfrm>
+            <a:off x="3238419" y="5810250"/>
+            <a:ext cx="5714857" cy="200025"/>
           </a:xfrm>
           <a:prstGeom prst="rect">
             <a:avLst/>
@@ -4627,114 +3893,19 @@
           <a:bodyPr wrap="square" lIns="0" tIns="0" rIns="0" bIns="0" rtlCol="0" anchor="t"/>
           <a:lstStyle/>
           <a:p>
-            <a:pPr marL="0" indent="0" algn="l">
-              <a:buNone/>
-            </a:pPr>
-            <a:r>
-              <a:rPr lang="en-US" sz="2800" b="1" dirty="0">
-                <a:solidFill>
-                  <a:srgbClr val="5CE5BA"/>
-                </a:solidFill>
-                <a:latin typeface="Malgun Gothic" pitchFamily="34" charset="0"/>
-                <a:ea typeface="Malgun Gothic" pitchFamily="34" charset="-122"/>
-                <a:cs typeface="Malgun Gothic" pitchFamily="34" charset="-120"/>
-              </a:rPr>
-              <a:t>kWh/100km</a:t>
-            </a:r>
-            <a:endParaRPr lang="en-US" sz="2800" dirty="0"/>
-          </a:p>
-        </p:txBody>
-      </p:sp>
-      <p:sp>
-        <p:nvSpPr>
-          <p:cNvPr id="46" name="Text 44"/>
-          <p:cNvSpPr/>
-          <p:nvPr/>
-        </p:nvSpPr>
-        <p:spPr>
-          <a:xfrm>
-            <a:off x="9162821" y="4222105"/>
-            <a:ext cx="2095448" cy="685800"/>
-          </a:xfrm>
-          <a:prstGeom prst="rect">
-            <a:avLst/>
-          </a:prstGeom>
-          <a:noFill/>
-          <a:ln/>
-        </p:spPr>
-        <p:txBody>
-          <a:bodyPr wrap="square" lIns="0" tIns="0" rIns="0" bIns="0" rtlCol="0" anchor="t"/>
-          <a:lstStyle/>
-          <a:p>
-            <a:pPr marL="0" indent="0" algn="l">
-              <a:buNone/>
-            </a:pPr>
-            <a:r>
-              <a:rPr lang="en-US" sz="1200" dirty="0">
-                <a:solidFill>
-                  <a:srgbClr val="C6D6D2"/>
-                </a:solidFill>
-                <a:latin typeface="Malgun Gothic" pitchFamily="34" charset="0"/>
-                <a:ea typeface="Malgun Gothic" pitchFamily="34" charset="-122"/>
-                <a:cs typeface="Malgun Gothic" pitchFamily="34" charset="-120"/>
-              </a:rPr>
-              <a:t>차량·환경 조건을 입력받아</a:t>
-            </a:r>
-            <a:endParaRPr lang="en-US" sz="1200" dirty="0"/>
-          </a:p>
-          <a:p>
-            <a:pPr marL="0" indent="0" algn="l">
-              <a:buNone/>
-            </a:pPr>
-            <a:r>
-              <a:rPr lang="en-US" sz="1200" dirty="0">
-                <a:solidFill>
-                  <a:srgbClr val="C6D6D2"/>
-                </a:solidFill>
-                <a:latin typeface="Malgun Gothic" pitchFamily="34" charset="0"/>
-                <a:ea typeface="Malgun Gothic" pitchFamily="34" charset="-122"/>
-                <a:cs typeface="Malgun Gothic" pitchFamily="34" charset="-120"/>
-              </a:rPr>
-              <a:t>100km당 에너지 소비량을 예측</a:t>
-            </a:r>
-            <a:endParaRPr lang="en-US" sz="1200" dirty="0"/>
-          </a:p>
-        </p:txBody>
-      </p:sp>
-      <p:sp>
-        <p:nvSpPr>
-          <p:cNvPr id="47" name="Text 45"/>
-          <p:cNvSpPr/>
-          <p:nvPr/>
-        </p:nvSpPr>
-        <p:spPr>
-          <a:xfrm>
-            <a:off x="647684" y="6353175"/>
-            <a:ext cx="5965031" cy="200025"/>
-          </a:xfrm>
-          <a:prstGeom prst="rect">
-            <a:avLst/>
-          </a:prstGeom>
-          <a:noFill/>
-          <a:ln/>
-        </p:spPr>
-        <p:txBody>
-          <a:bodyPr wrap="square" lIns="0" tIns="0" rIns="0" bIns="0" rtlCol="0" anchor="t"/>
-          <a:lstStyle/>
-          <a:p>
-            <a:pPr marL="0" indent="0" algn="l">
+            <a:pPr marL="0" indent="0" algn="ctr">
               <a:buNone/>
             </a:pPr>
             <a:r>
               <a:rPr lang="en-US" sz="1150" dirty="0">
                 <a:solidFill>
-                  <a:srgbClr val="647771"/>
+                  <a:srgbClr val="C4D2D7"/>
                 </a:solidFill>
-                <a:latin typeface="Malgun Gothic" pitchFamily="34" charset="0"/>
-                <a:ea typeface="Malgun Gothic" pitchFamily="34" charset="-122"/>
-                <a:cs typeface="Malgun Gothic" pitchFamily="34" charset="-120"/>
+                <a:latin typeface="Arial" pitchFamily="34" charset="0"/>
+                <a:ea typeface="Arial" pitchFamily="34" charset="-122"/>
+                <a:cs typeface="Arial" pitchFamily="34" charset="-120"/>
               </a:rPr>
-              <a:t>전처리: 결측치·명확한 이상치 없음 · 수치형 원본 변수 중심 · grade_group은 학습에서 제외</a:t>
+              <a:t>100km 당 예상 에너지 소비량을 회귀모델로 예측한다.</a:t>
             </a:r>
             <a:endParaRPr lang="en-US" sz="1150" dirty="0"/>
           </a:p>
@@ -4742,14 +3913,14 @@
       </p:sp>
       <p:sp>
         <p:nvSpPr>
-          <p:cNvPr id="48" name="Text 46"/>
-          <p:cNvSpPr/>
-          <p:nvPr/>
-        </p:nvSpPr>
-        <p:spPr>
-          <a:xfrm>
-            <a:off x="11397122" y="6400800"/>
-            <a:ext cx="146890" cy="171450"/>
+          <p:cNvPr id="39" name="Text 37"/>
+          <p:cNvSpPr/>
+          <p:nvPr/>
+        </p:nvSpPr>
+        <p:spPr>
+          <a:xfrm>
+            <a:off x="11226800" y="6477000"/>
+            <a:ext cx="355600" cy="203200"/>
           </a:xfrm>
           <a:prstGeom prst="rect">
             <a:avLst/>
@@ -4767,11 +3938,11 @@
             <a:r>
               <a:rPr lang="en-US" sz="1050" dirty="0">
                 <a:solidFill>
-                  <a:srgbClr val="8B9A96"/>
+                  <a:srgbClr val="748B93"/>
                 </a:solidFill>
-                <a:latin typeface="Malgun Gothic" pitchFamily="34" charset="0"/>
-                <a:ea typeface="Malgun Gothic" pitchFamily="34" charset="-122"/>
-                <a:cs typeface="Malgun Gothic" pitchFamily="34" charset="-120"/>
+                <a:latin typeface="Arial" pitchFamily="34" charset="0"/>
+                <a:ea typeface="Arial" pitchFamily="34" charset="-122"/>
+                <a:cs typeface="Arial" pitchFamily="34" charset="-120"/>
               </a:rPr>
               <a:t>03</a:t>
             </a:r>
@@ -4779,10 +3950,64 @@
           </a:p>
         </p:txBody>
       </p:sp>
+      <p:sp>
+        <p:nvSpPr>
+          <p:cNvPr id="40" name="화살표: 아래쪽 39">
+            <a:extLst>
+              <a:ext uri="{FF2B5EF4-FFF2-40B4-BE49-F238E27FC236}">
+                <a16:creationId xmlns:a16="http://schemas.microsoft.com/office/drawing/2014/main" id="{57DB8FD2-2CDE-4BE3-826F-1C23578F8193}"/>
+              </a:ext>
+            </a:extLst>
+          </p:cNvPr>
+          <p:cNvSpPr/>
+          <p:nvPr/>
+        </p:nvSpPr>
+        <p:spPr>
+          <a:xfrm>
+            <a:off x="5981700" y="4724400"/>
+            <a:ext cx="228600" cy="533400"/>
+          </a:xfrm>
+          <a:prstGeom prst="downArrow">
+            <a:avLst/>
+          </a:prstGeom>
+          <a:solidFill>
+            <a:srgbClr val="82939A"/>
+          </a:solidFill>
+          <a:ln w="12700" cap="flat" cmpd="sng" algn="ctr">
+            <a:noFill/>
+            <a:prstDash val="solid"/>
+            <a:miter lim="800000"/>
+          </a:ln>
+        </p:spPr>
+        <p:style>
+          <a:lnRef idx="2">
+            <a:schemeClr val="accent1">
+              <a:shade val="15000"/>
+            </a:schemeClr>
+          </a:lnRef>
+          <a:fillRef idx="1">
+            <a:schemeClr val="accent1"/>
+          </a:fillRef>
+          <a:effectRef idx="0">
+            <a:schemeClr val="accent1"/>
+          </a:effectRef>
+          <a:fontRef idx="minor">
+            <a:schemeClr val="lt1"/>
+          </a:fontRef>
+        </p:style>
+        <p:txBody>
+          <a:bodyPr vertOverflow="clip" horzOverflow="clip" rtlCol="0" anchor="t"/>
+          <a:lstStyle/>
+          <a:p>
+            <a:pPr algn="l"/>
+            <a:endParaRPr lang="ko-KR" altLang="en-US"/>
+          </a:p>
+        </p:txBody>
+      </p:sp>
     </p:spTree>
     <p:extLst>
       <p:ext uri="{BB962C8B-B14F-4D97-AF65-F5344CB8AC3E}">
-        <p14:creationId xmlns:p14="http://schemas.microsoft.com/office/powerpoint/2010/main" val="2864834629"/>
+        <p14:creationId xmlns:p14="http://schemas.microsoft.com/office/powerpoint/2010/main" val="3640316439"/>
       </p:ext>
     </p:extLst>
   </p:cSld>
@@ -8727,118 +7952,6 @@
       </p:sp>
       <p:sp>
         <p:nvSpPr>
-          <p:cNvPr id="121" name="Text 119"/>
-          <p:cNvSpPr/>
-          <p:nvPr/>
-        </p:nvSpPr>
-        <p:spPr>
-          <a:xfrm>
-            <a:off x="8581810" y="2463998"/>
-            <a:ext cx="2638359" cy="1756916"/>
-          </a:xfrm>
-          <a:prstGeom prst="rect">
-            <a:avLst/>
-          </a:prstGeom>
-          <a:noFill/>
-          <a:ln/>
-        </p:spPr>
-        <p:txBody>
-          <a:bodyPr wrap="square" lIns="0" tIns="0" rIns="0" bIns="0" rtlCol="0" anchor="t"/>
-          <a:lstStyle/>
-          <a:p>
-            <a:pPr marL="0" indent="0" algn="l">
-              <a:buNone/>
-            </a:pPr>
-            <a:r>
-              <a:rPr lang="en-US" b="1" dirty="0">
-                <a:solidFill>
-                  <a:srgbClr val="FFFFFF"/>
-                </a:solidFill>
-                <a:latin typeface="Malgun Gothic" pitchFamily="34" charset="0"/>
-                <a:ea typeface="Malgun Gothic" pitchFamily="34" charset="-122"/>
-                <a:cs typeface="Malgun Gothic" pitchFamily="34" charset="-120"/>
-              </a:rPr>
-              <a:t>소비량은 단일 요인보다</a:t>
-            </a:r>
-            <a:endParaRPr lang="en-US" dirty="0"/>
-          </a:p>
-          <a:p>
-            <a:pPr marL="0" indent="0" algn="l">
-              <a:buNone/>
-            </a:pPr>
-            <a:r>
-              <a:rPr lang="en-US" b="1" dirty="0">
-                <a:solidFill>
-                  <a:srgbClr val="FFFFFF"/>
-                </a:solidFill>
-                <a:latin typeface="Malgun Gothic" pitchFamily="34" charset="0"/>
-                <a:ea typeface="Malgun Gothic" pitchFamily="34" charset="-122"/>
-                <a:cs typeface="Malgun Gothic" pitchFamily="34" charset="-120"/>
-              </a:rPr>
-              <a:t>복합적인 운행 조건의</a:t>
-            </a:r>
-            <a:endParaRPr lang="en-US" dirty="0"/>
-          </a:p>
-          <a:p>
-            <a:pPr marL="0" indent="0" algn="l">
-              <a:buNone/>
-            </a:pPr>
-            <a:r>
-              <a:rPr lang="en-US" b="1" dirty="0">
-                <a:solidFill>
-                  <a:srgbClr val="FFFFFF"/>
-                </a:solidFill>
-                <a:latin typeface="Malgun Gothic" pitchFamily="34" charset="0"/>
-                <a:ea typeface="Malgun Gothic" pitchFamily="34" charset="-122"/>
-                <a:cs typeface="Malgun Gothic" pitchFamily="34" charset="-120"/>
-              </a:rPr>
-              <a:t>상호작용으로 결정된다</a:t>
-            </a:r>
-            <a:endParaRPr lang="en-US" dirty="0"/>
-          </a:p>
-        </p:txBody>
-      </p:sp>
-      <p:sp>
-        <p:nvSpPr>
-          <p:cNvPr id="122" name="Text 120"/>
-          <p:cNvSpPr/>
-          <p:nvPr/>
-        </p:nvSpPr>
-        <p:spPr>
-          <a:xfrm>
-            <a:off x="8581810" y="4343400"/>
-            <a:ext cx="2638359" cy="736600"/>
-          </a:xfrm>
-          <a:prstGeom prst="rect">
-            <a:avLst/>
-          </a:prstGeom>
-          <a:noFill/>
-          <a:ln/>
-        </p:spPr>
-        <p:txBody>
-          <a:bodyPr wrap="square" lIns="0" tIns="0" rIns="0" bIns="0" rtlCol="0" anchor="t"/>
-          <a:lstStyle/>
-          <a:p>
-            <a:pPr marL="0" indent="0" algn="l">
-              <a:buNone/>
-            </a:pPr>
-            <a:r>
-              <a:rPr lang="en-US" sz="1300" dirty="0">
-                <a:solidFill>
-                  <a:srgbClr val="C8D7D4"/>
-                </a:solidFill>
-                <a:latin typeface="Malgun Gothic" pitchFamily="34" charset="0"/>
-                <a:ea typeface="Malgun Gothic" pitchFamily="34" charset="-122"/>
-                <a:cs typeface="Malgun Gothic" pitchFamily="34" charset="-120"/>
-              </a:rPr>
-              <a:t>선형 관계만 가정하기보다, 비선형성과 변수 간 상호작용을 학습할 수 있는 모델이 필요하다.</a:t>
-            </a:r>
-            <a:endParaRPr lang="en-US" sz="1300" dirty="0"/>
-          </a:p>
-        </p:txBody>
-      </p:sp>
-      <p:sp>
-        <p:nvSpPr>
           <p:cNvPr id="123" name="Text 121"/>
           <p:cNvSpPr/>
           <p:nvPr/>
@@ -8939,6 +8052,36 @@
           <a:xfrm>
             <a:off x="660400" y="1625600"/>
             <a:ext cx="7048500" cy="3810000"/>
+          </a:xfrm>
+          <a:prstGeom prst="rect">
+            <a:avLst/>
+          </a:prstGeom>
+        </p:spPr>
+      </p:pic>
+      <p:pic>
+        <p:nvPicPr>
+          <p:cNvPr id="90" name="그림 89">
+            <a:extLst>
+              <a:ext uri="{FF2B5EF4-FFF2-40B4-BE49-F238E27FC236}">
+                <a16:creationId xmlns:a16="http://schemas.microsoft.com/office/drawing/2014/main" id="{CD828982-0430-A05A-4EBC-CC02C6B4B7BB}"/>
+              </a:ext>
+            </a:extLst>
+          </p:cNvPr>
+          <p:cNvPicPr>
+            <a:picLocks noChangeAspect="1"/>
+          </p:cNvPicPr>
+          <p:nvPr/>
+        </p:nvPicPr>
+        <p:blipFill>
+          <a:blip r:embed="rId4"/>
+          <a:stretch>
+            <a:fillRect/>
+          </a:stretch>
+        </p:blipFill>
+        <p:spPr>
+          <a:xfrm>
+            <a:off x="8349328" y="2571534"/>
+            <a:ext cx="3113723" cy="2324531"/>
           </a:xfrm>
           <a:prstGeom prst="rect">
             <a:avLst/>
@@ -8990,7 +8133,7 @@
             <a:avLst/>
           </a:prstGeom>
           <a:solidFill>
-            <a:srgbClr val="FFFFFF"/>
+            <a:srgbClr val="F7F9F9"/>
           </a:solidFill>
           <a:ln w="12700">
             <a:solidFill>
@@ -9018,7 +8161,7 @@
         <p:spPr>
           <a:xfrm>
             <a:off x="647684" y="419100"/>
-            <a:ext cx="1934122" cy="171450"/>
+            <a:ext cx="2667000" cy="228600"/>
           </a:xfrm>
           <a:prstGeom prst="rect">
             <a:avLst/>
@@ -9034,17 +8177,17 @@
               <a:buNone/>
             </a:pPr>
             <a:r>
-              <a:rPr lang="en-US" sz="1050" b="1" dirty="0">
+              <a:rPr lang="en-US" sz="1350" b="1" dirty="0">
                 <a:solidFill>
-                  <a:srgbClr val="0D9F76"/>
+                  <a:srgbClr val="00A982"/>
                 </a:solidFill>
-                <a:latin typeface="Malgun Gothic" pitchFamily="34" charset="0"/>
-                <a:ea typeface="Malgun Gothic" pitchFamily="34" charset="-122"/>
-                <a:cs typeface="Malgun Gothic" pitchFamily="34" charset="-120"/>
+                <a:latin typeface="Arial" pitchFamily="34" charset="0"/>
+                <a:ea typeface="Arial" pitchFamily="34" charset="-122"/>
+                <a:cs typeface="Arial" pitchFamily="34" charset="-120"/>
               </a:rPr>
-              <a:t>04 · MODEL BENCHMARK</a:t>
+              <a:t>04 · MODEL SELECTION</a:t>
             </a:r>
-            <a:endParaRPr lang="en-US" sz="1050" dirty="0"/>
+            <a:endParaRPr lang="en-US" sz="1350" dirty="0"/>
           </a:p>
         </p:txBody>
       </p:sp>
@@ -9056,8 +8199,8 @@
         </p:nvSpPr>
         <p:spPr>
           <a:xfrm>
-            <a:off x="647684" y="704850"/>
-            <a:ext cx="10667733" cy="457200"/>
+            <a:off x="647684" y="723900"/>
+            <a:ext cx="10667733" cy="495300"/>
           </a:xfrm>
           <a:prstGeom prst="rect">
             <a:avLst/>
@@ -9073,17 +8216,17 @@
               <a:buNone/>
             </a:pPr>
             <a:r>
-              <a:rPr lang="en-US" sz="2700" b="1" dirty="0">
+              <a:rPr lang="en-US" sz="3000" b="1" dirty="0">
                 <a:solidFill>
-                  <a:srgbClr val="10232B"/>
+                  <a:srgbClr val="071B26"/>
                 </a:solidFill>
-                <a:latin typeface="Malgun Gothic" pitchFamily="34" charset="0"/>
-                <a:ea typeface="Malgun Gothic" pitchFamily="34" charset="-122"/>
-                <a:cs typeface="Malgun Gothic" pitchFamily="34" charset="-120"/>
+                <a:latin typeface="Arial" pitchFamily="34" charset="0"/>
+                <a:ea typeface="Arial" pitchFamily="34" charset="-122"/>
+                <a:cs typeface="Arial" pitchFamily="34" charset="-120"/>
               </a:rPr>
-              <a:t>XGBoost가 오차와 설명력 모두에서 가장 우수했다</a:t>
+              <a:t>모델링 : 3개 회귀모델 비교 후 XGBoost 선택</a:t>
             </a:r>
-            <a:endParaRPr lang="en-US" sz="2700" dirty="0"/>
+            <a:endParaRPr lang="en-US" sz="3000" dirty="0"/>
           </a:p>
         </p:txBody>
       </p:sp>
@@ -9095,41 +8238,561 @@
         </p:nvSpPr>
         <p:spPr>
           <a:xfrm>
-            <a:off x="647684" y="1638300"/>
-            <a:ext cx="6762581" cy="3810000"/>
-          </a:xfrm>
-          <a:prstGeom prst="rect">
-            <a:avLst/>
-          </a:prstGeom>
-          <a:solidFill>
-            <a:srgbClr val="F4F7F6"/>
-          </a:solidFill>
-          <a:ln w="12700">
-            <a:solidFill>
-              <a:srgbClr val="FFFFFF">
-                <a:alpha val="0"/>
-              </a:srgbClr>
-            </a:solidFill>
-            <a:prstDash val="solid"/>
-          </a:ln>
-        </p:spPr>
-        <p:txBody>
-          <a:bodyPr/>
-          <a:lstStyle/>
-          <a:p>
-            <a:endParaRPr lang="ko-KR" altLang="en-US"/>
+            <a:off x="647684" y="1323975"/>
+            <a:ext cx="10896328" cy="19050"/>
+          </a:xfrm>
+          <a:prstGeom prst="rect">
+            <a:avLst/>
+          </a:prstGeom>
+          <a:solidFill>
+            <a:srgbClr val="DCE5E4"/>
+          </a:solidFill>
+          <a:ln w="12700">
+            <a:solidFill>
+              <a:srgbClr val="FFFFFF">
+                <a:alpha val="0"/>
+              </a:srgbClr>
+            </a:solidFill>
+            <a:prstDash val="solid"/>
+          </a:ln>
+        </p:spPr>
+        <p:txBody>
+          <a:bodyPr/>
+          <a:lstStyle/>
+          <a:p>
+            <a:endParaRPr lang="ko-KR" altLang="en-US"/>
+          </a:p>
+        </p:txBody>
+      </p:sp>
+      <p:sp>
+        <p:nvSpPr>
+          <p:cNvPr id="6" name="Shape 4"/>
+          <p:cNvSpPr/>
+          <p:nvPr/>
+        </p:nvSpPr>
+        <p:spPr>
+          <a:xfrm>
+            <a:off x="781030" y="1619250"/>
+            <a:ext cx="2857429" cy="1238250"/>
+          </a:xfrm>
+          <a:prstGeom prst="rect">
+            <a:avLst/>
+          </a:prstGeom>
+          <a:solidFill>
+            <a:srgbClr val="FFFFFF"/>
+          </a:solidFill>
+          <a:ln w="19050">
+            <a:solidFill>
+              <a:srgbClr val="D4DFDF"/>
+            </a:solidFill>
+            <a:prstDash val="solid"/>
+          </a:ln>
+        </p:spPr>
+        <p:txBody>
+          <a:bodyPr/>
+          <a:lstStyle/>
+          <a:p>
+            <a:endParaRPr lang="ko-KR" altLang="en-US"/>
+          </a:p>
+        </p:txBody>
+      </p:sp>
+      <p:sp>
+        <p:nvSpPr>
+          <p:cNvPr id="7" name="Text 5"/>
+          <p:cNvSpPr/>
+          <p:nvPr/>
+        </p:nvSpPr>
+        <p:spPr>
+          <a:xfrm>
+            <a:off x="1047724" y="1876425"/>
+            <a:ext cx="2268530" cy="314325"/>
+          </a:xfrm>
+          <a:prstGeom prst="rect">
+            <a:avLst/>
+          </a:prstGeom>
+          <a:noFill/>
+          <a:ln/>
+        </p:spPr>
+        <p:txBody>
+          <a:bodyPr wrap="square" lIns="0" tIns="0" rIns="0" bIns="0" rtlCol="0" anchor="t"/>
+          <a:lstStyle/>
+          <a:p>
+            <a:pPr marL="0" indent="0" algn="l">
+              <a:buNone/>
+            </a:pPr>
+            <a:r>
+              <a:rPr lang="en-US" sz="1800" b="1" dirty="0">
+                <a:solidFill>
+                  <a:srgbClr val="8B999F"/>
+                </a:solidFill>
+                <a:latin typeface="Arial" pitchFamily="34" charset="0"/>
+                <a:ea typeface="Arial" pitchFamily="34" charset="-122"/>
+                <a:cs typeface="Arial" pitchFamily="34" charset="-120"/>
+              </a:rPr>
+              <a:t>Linear Regression</a:t>
+            </a:r>
+            <a:endParaRPr lang="en-US" sz="1800" dirty="0"/>
+          </a:p>
+        </p:txBody>
+      </p:sp>
+      <p:sp>
+        <p:nvSpPr>
+          <p:cNvPr id="8" name="Text 6"/>
+          <p:cNvSpPr/>
+          <p:nvPr/>
+        </p:nvSpPr>
+        <p:spPr>
+          <a:xfrm>
+            <a:off x="1047724" y="2324100"/>
+            <a:ext cx="2159000" cy="533400"/>
+          </a:xfrm>
+          <a:prstGeom prst="rect">
+            <a:avLst/>
+          </a:prstGeom>
+          <a:noFill/>
+          <a:ln/>
+        </p:spPr>
+        <p:txBody>
+          <a:bodyPr wrap="square" lIns="0" tIns="0" rIns="0" bIns="0" rtlCol="0" anchor="t"/>
+          <a:lstStyle/>
+          <a:p>
+            <a:pPr marL="0" indent="0" algn="l">
+              <a:buNone/>
+            </a:pPr>
+            <a:r>
+              <a:rPr lang="en-US" sz="1300" dirty="0">
+                <a:solidFill>
+                  <a:srgbClr val="536C76"/>
+                </a:solidFill>
+                <a:latin typeface="Arial" pitchFamily="34" charset="0"/>
+                <a:ea typeface="Arial" pitchFamily="34" charset="-122"/>
+                <a:cs typeface="Arial" pitchFamily="34" charset="-120"/>
+              </a:rPr>
+              <a:t>선형 baseline</a:t>
+            </a:r>
+            <a:endParaRPr lang="en-US" sz="1300" dirty="0"/>
+          </a:p>
+          <a:p>
+            <a:pPr marL="0" indent="0" algn="l">
+              <a:buNone/>
+            </a:pPr>
+            <a:r>
+              <a:rPr lang="en-US" sz="1300" dirty="0">
+                <a:solidFill>
+                  <a:srgbClr val="536C76"/>
+                </a:solidFill>
+                <a:latin typeface="Arial" pitchFamily="34" charset="0"/>
+                <a:ea typeface="Arial" pitchFamily="34" charset="-122"/>
+                <a:cs typeface="Arial" pitchFamily="34" charset="-120"/>
+              </a:rPr>
+              <a:t>기본 구조 확인</a:t>
+            </a:r>
+            <a:endParaRPr lang="en-US" sz="1300" dirty="0"/>
+          </a:p>
+        </p:txBody>
+      </p:sp>
+      <p:sp>
+        <p:nvSpPr>
+          <p:cNvPr id="9" name="Shape 7"/>
+          <p:cNvSpPr/>
+          <p:nvPr/>
+        </p:nvSpPr>
+        <p:spPr>
+          <a:xfrm>
+            <a:off x="3771806" y="2219325"/>
+            <a:ext cx="800080" cy="19050"/>
+          </a:xfrm>
+          <a:prstGeom prst="rect">
+            <a:avLst/>
+          </a:prstGeom>
+          <a:solidFill>
+            <a:srgbClr val="87989F"/>
+          </a:solidFill>
+          <a:ln w="12700">
+            <a:solidFill>
+              <a:srgbClr val="FFFFFF">
+                <a:alpha val="0"/>
+              </a:srgbClr>
+            </a:solidFill>
+            <a:prstDash val="solid"/>
+          </a:ln>
+        </p:spPr>
+        <p:txBody>
+          <a:bodyPr/>
+          <a:lstStyle/>
+          <a:p>
+            <a:endParaRPr lang="ko-KR" altLang="en-US"/>
+          </a:p>
+        </p:txBody>
+      </p:sp>
+      <p:sp>
+        <p:nvSpPr>
+          <p:cNvPr id="10" name="Shape 8"/>
+          <p:cNvSpPr/>
+          <p:nvPr/>
+        </p:nvSpPr>
+        <p:spPr>
+          <a:xfrm>
+            <a:off x="4667133" y="1619250"/>
+            <a:ext cx="2857429" cy="1238250"/>
+          </a:xfrm>
+          <a:prstGeom prst="rect">
+            <a:avLst/>
+          </a:prstGeom>
+          <a:solidFill>
+            <a:srgbClr val="FFFFFF"/>
+          </a:solidFill>
+          <a:ln w="19050">
+            <a:solidFill>
+              <a:srgbClr val="D4DFDF"/>
+            </a:solidFill>
+            <a:prstDash val="solid"/>
+          </a:ln>
+        </p:spPr>
+        <p:txBody>
+          <a:bodyPr/>
+          <a:lstStyle/>
+          <a:p>
+            <a:endParaRPr lang="ko-KR" altLang="en-US"/>
+          </a:p>
+        </p:txBody>
+      </p:sp>
+      <p:sp>
+        <p:nvSpPr>
+          <p:cNvPr id="11" name="Text 9"/>
+          <p:cNvSpPr/>
+          <p:nvPr/>
+        </p:nvSpPr>
+        <p:spPr>
+          <a:xfrm>
+            <a:off x="4933827" y="1876425"/>
+            <a:ext cx="1888433" cy="314325"/>
+          </a:xfrm>
+          <a:prstGeom prst="rect">
+            <a:avLst/>
+          </a:prstGeom>
+          <a:noFill/>
+          <a:ln/>
+        </p:spPr>
+        <p:txBody>
+          <a:bodyPr wrap="square" lIns="0" tIns="0" rIns="0" bIns="0" rtlCol="0" anchor="t"/>
+          <a:lstStyle/>
+          <a:p>
+            <a:pPr marL="0" indent="0" algn="l">
+              <a:buNone/>
+            </a:pPr>
+            <a:r>
+              <a:rPr lang="en-US" sz="1800" b="1" dirty="0">
+                <a:solidFill>
+                  <a:srgbClr val="16B985"/>
+                </a:solidFill>
+                <a:latin typeface="Arial" pitchFamily="34" charset="0"/>
+                <a:ea typeface="Arial" pitchFamily="34" charset="-122"/>
+                <a:cs typeface="Arial" pitchFamily="34" charset="-120"/>
+              </a:rPr>
+              <a:t>Random Forest</a:t>
+            </a:r>
+            <a:endParaRPr lang="en-US" sz="1800" dirty="0"/>
+          </a:p>
+        </p:txBody>
+      </p:sp>
+      <p:sp>
+        <p:nvSpPr>
+          <p:cNvPr id="12" name="Text 10"/>
+          <p:cNvSpPr/>
+          <p:nvPr/>
+        </p:nvSpPr>
+        <p:spPr>
+          <a:xfrm>
+            <a:off x="4933827" y="2324100"/>
+            <a:ext cx="2159000" cy="533400"/>
+          </a:xfrm>
+          <a:prstGeom prst="rect">
+            <a:avLst/>
+          </a:prstGeom>
+          <a:noFill/>
+          <a:ln/>
+        </p:spPr>
+        <p:txBody>
+          <a:bodyPr wrap="square" lIns="0" tIns="0" rIns="0" bIns="0" rtlCol="0" anchor="t"/>
+          <a:lstStyle/>
+          <a:p>
+            <a:pPr marL="0" indent="0" algn="l">
+              <a:buNone/>
+            </a:pPr>
+            <a:r>
+              <a:rPr lang="en-US" sz="1300" dirty="0">
+                <a:solidFill>
+                  <a:srgbClr val="536C76"/>
+                </a:solidFill>
+                <a:latin typeface="Arial" pitchFamily="34" charset="0"/>
+                <a:ea typeface="Arial" pitchFamily="34" charset="-122"/>
+                <a:cs typeface="Arial" pitchFamily="34" charset="-120"/>
+              </a:rPr>
+              <a:t>비선형 · 상호작용 학습</a:t>
+            </a:r>
+            <a:endParaRPr lang="en-US" sz="1300" dirty="0"/>
+          </a:p>
+          <a:p>
+            <a:pPr marL="0" indent="0" algn="l">
+              <a:buNone/>
+            </a:pPr>
+            <a:r>
+              <a:rPr lang="en-US" sz="1300" dirty="0">
+                <a:solidFill>
+                  <a:srgbClr val="536C76"/>
+                </a:solidFill>
+                <a:latin typeface="Arial" pitchFamily="34" charset="0"/>
+                <a:ea typeface="Arial" pitchFamily="34" charset="-122"/>
+                <a:cs typeface="Arial" pitchFamily="34" charset="-120"/>
+              </a:rPr>
+              <a:t>트리 평균 ensemble</a:t>
+            </a:r>
+            <a:endParaRPr lang="en-US" sz="1300" dirty="0"/>
+          </a:p>
+        </p:txBody>
+      </p:sp>
+      <p:sp>
+        <p:nvSpPr>
+          <p:cNvPr id="13" name="Shape 11"/>
+          <p:cNvSpPr/>
+          <p:nvPr/>
+        </p:nvSpPr>
+        <p:spPr>
+          <a:xfrm>
+            <a:off x="7657909" y="2219325"/>
+            <a:ext cx="800080" cy="19050"/>
+          </a:xfrm>
+          <a:prstGeom prst="rect">
+            <a:avLst/>
+          </a:prstGeom>
+          <a:solidFill>
+            <a:srgbClr val="87989F"/>
+          </a:solidFill>
+          <a:ln w="12700">
+            <a:solidFill>
+              <a:srgbClr val="FFFFFF">
+                <a:alpha val="0"/>
+              </a:srgbClr>
+            </a:solidFill>
+            <a:prstDash val="solid"/>
+          </a:ln>
+        </p:spPr>
+        <p:txBody>
+          <a:bodyPr/>
+          <a:lstStyle/>
+          <a:p>
+            <a:endParaRPr lang="ko-KR" altLang="en-US"/>
+          </a:p>
+        </p:txBody>
+      </p:sp>
+      <p:sp>
+        <p:nvSpPr>
+          <p:cNvPr id="14" name="Shape 12"/>
+          <p:cNvSpPr/>
+          <p:nvPr/>
+        </p:nvSpPr>
+        <p:spPr>
+          <a:xfrm>
+            <a:off x="8553236" y="1619250"/>
+            <a:ext cx="2857429" cy="1238250"/>
+          </a:xfrm>
+          <a:prstGeom prst="rect">
+            <a:avLst/>
+          </a:prstGeom>
+          <a:solidFill>
+            <a:srgbClr val="FFFFFF"/>
+          </a:solidFill>
+          <a:ln w="19050">
+            <a:solidFill>
+              <a:srgbClr val="D4DFDF"/>
+            </a:solidFill>
+            <a:prstDash val="solid"/>
+          </a:ln>
+        </p:spPr>
+        <p:txBody>
+          <a:bodyPr/>
+          <a:lstStyle/>
+          <a:p>
+            <a:endParaRPr lang="ko-KR" altLang="en-US"/>
+          </a:p>
+        </p:txBody>
+      </p:sp>
+      <p:sp>
+        <p:nvSpPr>
+          <p:cNvPr id="15" name="Text 13"/>
+          <p:cNvSpPr/>
+          <p:nvPr/>
+        </p:nvSpPr>
+        <p:spPr>
+          <a:xfrm>
+            <a:off x="8819929" y="1876425"/>
+            <a:ext cx="1084335" cy="314325"/>
+          </a:xfrm>
+          <a:prstGeom prst="rect">
+            <a:avLst/>
+          </a:prstGeom>
+          <a:noFill/>
+          <a:ln/>
+        </p:spPr>
+        <p:txBody>
+          <a:bodyPr wrap="square" lIns="0" tIns="0" rIns="0" bIns="0" rtlCol="0" anchor="t"/>
+          <a:lstStyle/>
+          <a:p>
+            <a:pPr marL="0" indent="0" algn="l">
+              <a:buNone/>
+            </a:pPr>
+            <a:r>
+              <a:rPr lang="en-US" sz="1800" b="1" dirty="0">
+                <a:solidFill>
+                  <a:srgbClr val="2F6BE8"/>
+                </a:solidFill>
+                <a:latin typeface="Arial" pitchFamily="34" charset="0"/>
+                <a:ea typeface="Arial" pitchFamily="34" charset="-122"/>
+                <a:cs typeface="Arial" pitchFamily="34" charset="-120"/>
+              </a:rPr>
+              <a:t>XGBoost</a:t>
+            </a:r>
+            <a:endParaRPr lang="en-US" sz="1800" dirty="0"/>
+          </a:p>
+        </p:txBody>
+      </p:sp>
+      <p:sp>
+        <p:nvSpPr>
+          <p:cNvPr id="16" name="Text 14"/>
+          <p:cNvSpPr/>
+          <p:nvPr/>
+        </p:nvSpPr>
+        <p:spPr>
+          <a:xfrm>
+            <a:off x="8819929" y="2324100"/>
+            <a:ext cx="2159000" cy="533400"/>
+          </a:xfrm>
+          <a:prstGeom prst="rect">
+            <a:avLst/>
+          </a:prstGeom>
+          <a:noFill/>
+          <a:ln/>
+        </p:spPr>
+        <p:txBody>
+          <a:bodyPr wrap="square" lIns="0" tIns="0" rIns="0" bIns="0" rtlCol="0" anchor="t"/>
+          <a:lstStyle/>
+          <a:p>
+            <a:pPr marL="0" indent="0" algn="l">
+              <a:buNone/>
+            </a:pPr>
+            <a:r>
+              <a:rPr lang="en-US" sz="1300" dirty="0">
+                <a:solidFill>
+                  <a:srgbClr val="536C76"/>
+                </a:solidFill>
+                <a:latin typeface="Arial" pitchFamily="34" charset="0"/>
+                <a:ea typeface="Arial" pitchFamily="34" charset="-122"/>
+                <a:cs typeface="Arial" pitchFamily="34" charset="-120"/>
+              </a:rPr>
+              <a:t>잔차를 순차적으로 보완</a:t>
+            </a:r>
+            <a:endParaRPr lang="en-US" sz="1300" dirty="0"/>
+          </a:p>
+          <a:p>
+            <a:pPr marL="0" indent="0" algn="l">
+              <a:buNone/>
+            </a:pPr>
+            <a:r>
+              <a:rPr lang="en-US" sz="1300" dirty="0">
+                <a:solidFill>
+                  <a:srgbClr val="536C76"/>
+                </a:solidFill>
+                <a:latin typeface="Arial" pitchFamily="34" charset="0"/>
+                <a:ea typeface="Arial" pitchFamily="34" charset="-122"/>
+                <a:cs typeface="Arial" pitchFamily="34" charset="-120"/>
+              </a:rPr>
+              <a:t>최종 모델</a:t>
+            </a:r>
+            <a:endParaRPr lang="en-US" sz="1300" dirty="0"/>
+          </a:p>
+        </p:txBody>
+      </p:sp>
+      <p:sp>
+        <p:nvSpPr>
+          <p:cNvPr id="17" name="Shape 15"/>
+          <p:cNvSpPr/>
+          <p:nvPr/>
+        </p:nvSpPr>
+        <p:spPr>
+          <a:xfrm>
+            <a:off x="781030" y="3257550"/>
+            <a:ext cx="5048124" cy="2533650"/>
+          </a:xfrm>
+          <a:prstGeom prst="rect">
+            <a:avLst/>
+          </a:prstGeom>
+          <a:solidFill>
+            <a:srgbClr val="FFFFFF"/>
+          </a:solidFill>
+          <a:ln w="19050">
+            <a:solidFill>
+              <a:srgbClr val="D4DFDF"/>
+            </a:solidFill>
+            <a:prstDash val="solid"/>
+          </a:ln>
+        </p:spPr>
+        <p:txBody>
+          <a:bodyPr/>
+          <a:lstStyle/>
+          <a:p>
+            <a:endParaRPr lang="ko-KR" altLang="en-US"/>
+          </a:p>
+        </p:txBody>
+      </p:sp>
+      <p:sp>
+        <p:nvSpPr>
+          <p:cNvPr id="18" name="Text 16"/>
+          <p:cNvSpPr/>
+          <p:nvPr/>
+        </p:nvSpPr>
+        <p:spPr>
+          <a:xfrm>
+            <a:off x="1066773" y="3467100"/>
+            <a:ext cx="1878313" cy="314325"/>
+          </a:xfrm>
+          <a:prstGeom prst="rect">
+            <a:avLst/>
+          </a:prstGeom>
+          <a:noFill/>
+          <a:ln/>
+        </p:spPr>
+        <p:txBody>
+          <a:bodyPr wrap="square" lIns="0" tIns="0" rIns="0" bIns="0" rtlCol="0" anchor="t"/>
+          <a:lstStyle/>
+          <a:p>
+            <a:pPr marL="0" indent="0" algn="l">
+              <a:buNone/>
+            </a:pPr>
+            <a:r>
+              <a:rPr lang="en-US" sz="1800" b="1" dirty="0">
+                <a:solidFill>
+                  <a:srgbClr val="071B26"/>
+                </a:solidFill>
+                <a:latin typeface="Arial" pitchFamily="34" charset="0"/>
+                <a:ea typeface="Arial" pitchFamily="34" charset="-122"/>
+                <a:cs typeface="Arial" pitchFamily="34" charset="-120"/>
+              </a:rPr>
+              <a:t>Test RMSE 비교</a:t>
+            </a:r>
+            <a:endParaRPr lang="en-US" sz="1800" dirty="0"/>
           </a:p>
         </p:txBody>
       </p:sp>
       <p:graphicFrame>
         <p:nvGraphicFramePr>
-          <p:cNvPr id="6" name="Chart 0"/>
+          <p:cNvPr id="19" name="Chart 0"/>
           <p:cNvGraphicFramePr/>
           <p:nvPr/>
         </p:nvGraphicFramePr>
         <p:xfrm>
-          <a:off x="876278" y="1866900"/>
-          <a:ext cx="6305392" cy="3333750"/>
+          <a:off x="1028674" y="3829050"/>
+          <a:ext cx="4571886" cy="1714500"/>
         </p:xfrm>
         <a:graphic>
           <a:graphicData uri="http://schemas.openxmlformats.org/drawingml/2006/chart">
@@ -9139,48 +8802,46 @@
       </p:graphicFrame>
       <p:sp>
         <p:nvSpPr>
-          <p:cNvPr id="7" name="Shape 4"/>
-          <p:cNvSpPr/>
-          <p:nvPr/>
-        </p:nvSpPr>
-        <p:spPr>
-          <a:xfrm>
-            <a:off x="8038899" y="1638300"/>
-            <a:ext cx="3505112" cy="3810000"/>
-          </a:xfrm>
-          <a:prstGeom prst="rect">
-            <a:avLst/>
-          </a:prstGeom>
-          <a:solidFill>
-            <a:srgbClr val="0D2630"/>
-          </a:solidFill>
-          <a:ln w="12700">
-            <a:solidFill>
-              <a:srgbClr val="FFFFFF">
-                <a:alpha val="0"/>
-              </a:srgbClr>
-            </a:solidFill>
-            <a:prstDash val="solid"/>
-          </a:ln>
-        </p:spPr>
-        <p:txBody>
-          <a:bodyPr/>
-          <a:lstStyle/>
-          <a:p>
-            <a:endParaRPr lang="ko-KR" altLang="en-US"/>
-          </a:p>
-        </p:txBody>
-      </p:sp>
-      <p:sp>
-        <p:nvSpPr>
-          <p:cNvPr id="8" name="Text 5"/>
-          <p:cNvSpPr/>
-          <p:nvPr/>
-        </p:nvSpPr>
-        <p:spPr>
-          <a:xfrm>
-            <a:off x="8362741" y="1962150"/>
-            <a:ext cx="1212324" cy="352425"/>
+          <p:cNvPr id="20" name="Shape 17"/>
+          <p:cNvSpPr/>
+          <p:nvPr/>
+        </p:nvSpPr>
+        <p:spPr>
+          <a:xfrm>
+            <a:off x="6438739" y="3257550"/>
+            <a:ext cx="4971926" cy="2533650"/>
+          </a:xfrm>
+          <a:prstGeom prst="rect">
+            <a:avLst/>
+          </a:prstGeom>
+          <a:solidFill>
+            <a:srgbClr val="EAF1FF"/>
+          </a:solidFill>
+          <a:ln w="19050">
+            <a:solidFill>
+              <a:srgbClr val="A9C3FF"/>
+            </a:solidFill>
+            <a:prstDash val="solid"/>
+          </a:ln>
+        </p:spPr>
+        <p:txBody>
+          <a:bodyPr/>
+          <a:lstStyle/>
+          <a:p>
+            <a:endParaRPr lang="ko-KR" altLang="en-US"/>
+          </a:p>
+        </p:txBody>
+      </p:sp>
+      <p:sp>
+        <p:nvSpPr>
+          <p:cNvPr id="21" name="Text 18"/>
+          <p:cNvSpPr/>
+          <p:nvPr/>
+        </p:nvSpPr>
+        <p:spPr>
+          <a:xfrm>
+            <a:off x="6743531" y="3514725"/>
+            <a:ext cx="1608494" cy="342900"/>
           </a:xfrm>
           <a:prstGeom prst="rect">
             <a:avLst/>
@@ -9196,30 +8857,30 @@
               <a:buNone/>
             </a:pPr>
             <a:r>
-              <a:rPr lang="en-US" sz="1150" b="1" dirty="0">
+              <a:rPr lang="en-US" sz="1900" b="1" dirty="0">
                 <a:solidFill>
-                  <a:srgbClr val="073228"/>
+                  <a:srgbClr val="2F6BE8"/>
                 </a:solidFill>
-                <a:latin typeface="Malgun Gothic" pitchFamily="34" charset="0"/>
-                <a:ea typeface="Malgun Gothic" pitchFamily="34" charset="-122"/>
-                <a:cs typeface="Malgun Gothic" pitchFamily="34" charset="-120"/>
+                <a:latin typeface="Arial" pitchFamily="34" charset="0"/>
+                <a:ea typeface="Arial" pitchFamily="34" charset="-122"/>
+                <a:cs typeface="Arial" pitchFamily="34" charset="-120"/>
               </a:rPr>
-              <a:t>FINAL MODEL</a:t>
+              <a:t>최종 선택 근거</a:t>
             </a:r>
-            <a:endParaRPr lang="en-US" sz="1150" dirty="0"/>
-          </a:p>
-        </p:txBody>
-      </p:sp>
-      <p:sp>
-        <p:nvSpPr>
-          <p:cNvPr id="9" name="Text 6"/>
-          <p:cNvSpPr/>
-          <p:nvPr/>
-        </p:nvSpPr>
-        <p:spPr>
-          <a:xfrm>
-            <a:off x="8362741" y="2314575"/>
-            <a:ext cx="2857429" cy="720030"/>
+            <a:endParaRPr lang="en-US" sz="1900" dirty="0"/>
+          </a:p>
+        </p:txBody>
+      </p:sp>
+      <p:sp>
+        <p:nvSpPr>
+          <p:cNvPr id="22" name="Text 19"/>
+          <p:cNvSpPr/>
+          <p:nvPr/>
+        </p:nvSpPr>
+        <p:spPr>
+          <a:xfrm>
+            <a:off x="6743531" y="3962400"/>
+            <a:ext cx="4333767" cy="699195"/>
           </a:xfrm>
           <a:prstGeom prst="rect">
             <a:avLst/>
@@ -9235,47 +8896,81 @@
               <a:buNone/>
             </a:pPr>
             <a:r>
-              <a:rPr lang="en-US" sz="2100" b="1" dirty="0">
+              <a:rPr lang="en-US" sz="1350" dirty="0">
                 <a:solidFill>
-                  <a:srgbClr val="FFFFFF"/>
+                  <a:srgbClr val="22313B"/>
                 </a:solidFill>
-                <a:latin typeface="Malgun Gothic" pitchFamily="34" charset="0"/>
-                <a:ea typeface="Malgun Gothic" pitchFamily="34" charset="-122"/>
-                <a:cs typeface="Malgun Gothic" pitchFamily="34" charset="-120"/>
+                <a:latin typeface="Arial" pitchFamily="34" charset="0"/>
+                <a:ea typeface="Arial" pitchFamily="34" charset="-122"/>
+                <a:cs typeface="Arial" pitchFamily="34" charset="-120"/>
               </a:rPr>
-              <a:t>XGBoost</a:t>
+              <a:t>XGBoost는 RMSE, MAE, R² 모두에서 가장 우수하다.</a:t>
             </a:r>
-            <a:endParaRPr lang="en-US" sz="2100" dirty="0"/>
+            <a:endParaRPr lang="en-US" sz="1350" dirty="0"/>
           </a:p>
           <a:p>
             <a:pPr marL="0" indent="0" algn="l">
               <a:buNone/>
             </a:pPr>
             <a:r>
-              <a:rPr lang="en-US" sz="2100" b="1" dirty="0">
+              <a:rPr lang="en-US" sz="1350" dirty="0">
                 <a:solidFill>
-                  <a:srgbClr val="FFFFFF"/>
+                  <a:srgbClr val="22313B"/>
                 </a:solidFill>
-                <a:latin typeface="Malgun Gothic" pitchFamily="34" charset="0"/>
-                <a:ea typeface="Malgun Gothic" pitchFamily="34" charset="-122"/>
-                <a:cs typeface="Malgun Gothic" pitchFamily="34" charset="-120"/>
+                <a:latin typeface="Arial" pitchFamily="34" charset="0"/>
+                <a:ea typeface="Arial" pitchFamily="34" charset="-122"/>
+                <a:cs typeface="Arial" pitchFamily="34" charset="-120"/>
               </a:rPr>
-              <a:t>Regressor</a:t>
+              <a:t>R² 약 0.947로 테스트 데이터의 에너지 소비량 변동을 가장 잘 설명했다.</a:t>
             </a:r>
-            <a:endParaRPr lang="en-US" sz="2100" dirty="0"/>
-          </a:p>
-        </p:txBody>
-      </p:sp>
-      <p:sp>
-        <p:nvSpPr>
-          <p:cNvPr id="10" name="Text 7"/>
-          <p:cNvSpPr/>
-          <p:nvPr/>
-        </p:nvSpPr>
-        <p:spPr>
-          <a:xfrm>
-            <a:off x="8362741" y="3034605"/>
-            <a:ext cx="2857429" cy="247501"/>
+            <a:endParaRPr lang="en-US" sz="1350" dirty="0"/>
+          </a:p>
+        </p:txBody>
+      </p:sp>
+      <p:sp>
+        <p:nvSpPr>
+          <p:cNvPr id="23" name="Shape 20"/>
+          <p:cNvSpPr/>
+          <p:nvPr/>
+        </p:nvSpPr>
+        <p:spPr>
+          <a:xfrm>
+            <a:off x="6743531" y="4933950"/>
+            <a:ext cx="4400440" cy="552450"/>
+          </a:xfrm>
+          <a:prstGeom prst="rect">
+            <a:avLst/>
+          </a:prstGeom>
+          <a:solidFill>
+            <a:srgbClr val="FFFFFF"/>
+          </a:solidFill>
+          <a:ln w="12700">
+            <a:solidFill>
+              <a:srgbClr val="FFFFFF">
+                <a:alpha val="0"/>
+              </a:srgbClr>
+            </a:solidFill>
+            <a:prstDash val="solid"/>
+          </a:ln>
+        </p:spPr>
+        <p:txBody>
+          <a:bodyPr/>
+          <a:lstStyle/>
+          <a:p>
+            <a:endParaRPr lang="ko-KR" altLang="en-US"/>
+          </a:p>
+        </p:txBody>
+      </p:sp>
+      <p:sp>
+        <p:nvSpPr>
+          <p:cNvPr id="24" name="Text 21"/>
+          <p:cNvSpPr/>
+          <p:nvPr/>
+        </p:nvSpPr>
+        <p:spPr>
+          <a:xfrm>
+            <a:off x="6914977" y="5095875"/>
+            <a:ext cx="4057549" cy="224433"/>
           </a:xfrm>
           <a:prstGeom prst="rect">
             <a:avLst/>
@@ -9287,19 +8982,19 @@
           <a:bodyPr wrap="square" lIns="0" tIns="0" rIns="0" bIns="0" rtlCol="0" anchor="t"/>
           <a:lstStyle/>
           <a:p>
-            <a:pPr marL="0" indent="0" algn="l">
+            <a:pPr marL="0" indent="0" algn="ctr">
               <a:buNone/>
             </a:pPr>
             <a:r>
               <a:rPr lang="en-US" sz="1300" b="1" dirty="0">
                 <a:solidFill>
-                  <a:srgbClr val="C9D8D4"/>
+                  <a:srgbClr val="2F6BE8"/>
                 </a:solidFill>
-                <a:latin typeface="Malgun Gothic" pitchFamily="34" charset="0"/>
-                <a:ea typeface="Malgun Gothic" pitchFamily="34" charset="-122"/>
-                <a:cs typeface="Malgun Gothic" pitchFamily="34" charset="-120"/>
+                <a:latin typeface="Arial" pitchFamily="34" charset="0"/>
+                <a:ea typeface="Arial" pitchFamily="34" charset="-122"/>
+                <a:cs typeface="Arial" pitchFamily="34" charset="-120"/>
               </a:rPr>
-              <a:t>R² 0.947</a:t>
+              <a:t>XGBoost: RMSE 0.866 · MAE 0.693 · R² 0.947</a:t>
             </a:r>
             <a:endParaRPr lang="en-US" sz="1300" dirty="0"/>
           </a:p>
@@ -9307,14 +9002,14 @@
       </p:sp>
       <p:sp>
         <p:nvSpPr>
-          <p:cNvPr id="11" name="Text 8"/>
-          <p:cNvSpPr/>
-          <p:nvPr/>
-        </p:nvSpPr>
-        <p:spPr>
-          <a:xfrm>
-            <a:off x="8362741" y="3282107"/>
-            <a:ext cx="2857429" cy="495002"/>
+          <p:cNvPr id="25" name="Text 22"/>
+          <p:cNvSpPr/>
+          <p:nvPr/>
+        </p:nvSpPr>
+        <p:spPr>
+          <a:xfrm>
+            <a:off x="11258269" y="6496050"/>
+            <a:ext cx="285743" cy="171450"/>
           </a:xfrm>
           <a:prstGeom prst="rect">
             <a:avLst/>
@@ -9326,231 +9021,19 @@
           <a:bodyPr wrap="square" lIns="0" tIns="0" rIns="0" bIns="0" rtlCol="0" anchor="t"/>
           <a:lstStyle/>
           <a:p>
-            <a:pPr marL="0" indent="0" algn="l">
-              <a:buNone/>
-            </a:pPr>
-            <a:r>
-              <a:rPr lang="en-US" sz="1300" dirty="0">
-                <a:solidFill>
-                  <a:srgbClr val="C9D8D4"/>
-                </a:solidFill>
-                <a:latin typeface="Malgun Gothic" pitchFamily="34" charset="0"/>
-                <a:ea typeface="Malgun Gothic" pitchFamily="34" charset="-122"/>
-                <a:cs typeface="Malgun Gothic" pitchFamily="34" charset="-120"/>
-              </a:rPr>
-              <a:t>Linear Regression 0.929</a:t>
-            </a:r>
-            <a:endParaRPr lang="en-US" sz="1300" dirty="0"/>
-          </a:p>
-          <a:p>
-            <a:pPr marL="0" indent="0" algn="l">
-              <a:buNone/>
-            </a:pPr>
-            <a:r>
-              <a:rPr lang="en-US" sz="1300" dirty="0">
-                <a:solidFill>
-                  <a:srgbClr val="C9D8D4"/>
-                </a:solidFill>
-                <a:latin typeface="Malgun Gothic" pitchFamily="34" charset="0"/>
-                <a:ea typeface="Malgun Gothic" pitchFamily="34" charset="-122"/>
-                <a:cs typeface="Malgun Gothic" pitchFamily="34" charset="-120"/>
-              </a:rPr>
-              <a:t>Random Forest 0.899</a:t>
-            </a:r>
-            <a:endParaRPr lang="en-US" sz="1300" dirty="0"/>
-          </a:p>
-        </p:txBody>
-      </p:sp>
-      <p:sp>
-        <p:nvSpPr>
-          <p:cNvPr id="12" name="Text 9"/>
-          <p:cNvSpPr/>
-          <p:nvPr/>
-        </p:nvSpPr>
-        <p:spPr>
-          <a:xfrm>
-            <a:off x="8362741" y="3777109"/>
-            <a:ext cx="2857429" cy="495002"/>
-          </a:xfrm>
-          <a:prstGeom prst="rect">
-            <a:avLst/>
-          </a:prstGeom>
-          <a:noFill/>
-          <a:ln/>
-        </p:spPr>
-        <p:txBody>
-          <a:bodyPr wrap="square" lIns="0" tIns="0" rIns="0" bIns="0" rtlCol="0" anchor="t"/>
-          <a:lstStyle/>
-          <a:p>
-            <a:pPr marL="0" indent="0" algn="l">
-              <a:buNone/>
-            </a:pPr>
-            <a:r>
-              <a:rPr lang="en-US" sz="1300" dirty="0">
-                <a:solidFill>
-                  <a:srgbClr val="C9D8D4"/>
-                </a:solidFill>
-                <a:latin typeface="Malgun Gothic" pitchFamily="34" charset="0"/>
-                <a:ea typeface="Malgun Gothic" pitchFamily="34" charset="-122"/>
-                <a:cs typeface="Malgun Gothic" pitchFamily="34" charset="-120"/>
-              </a:rPr>
-              <a:t>비선형 관계와 변수 간 상호작용을 효과적으로 학습</a:t>
-            </a:r>
-            <a:endParaRPr lang="en-US" sz="1300" dirty="0"/>
-          </a:p>
-        </p:txBody>
-      </p:sp>
-      <p:sp>
-        <p:nvSpPr>
-          <p:cNvPr id="13" name="Text 10"/>
-          <p:cNvSpPr/>
-          <p:nvPr/>
-        </p:nvSpPr>
-        <p:spPr>
-          <a:xfrm>
-            <a:off x="647684" y="5638800"/>
-            <a:ext cx="2177896" cy="342900"/>
-          </a:xfrm>
-          <a:prstGeom prst="rect">
-            <a:avLst/>
-          </a:prstGeom>
-          <a:noFill/>
-          <a:ln/>
-        </p:spPr>
-        <p:txBody>
-          <a:bodyPr wrap="square" lIns="0" tIns="0" rIns="0" bIns="0" rtlCol="0" anchor="t"/>
-          <a:lstStyle/>
-          <a:p>
-            <a:pPr marL="0" indent="0" algn="l">
-              <a:buNone/>
-            </a:pPr>
-            <a:r>
-              <a:rPr lang="en-US" sz="1200" dirty="0">
-                <a:solidFill>
-                  <a:srgbClr val="536963"/>
-                </a:solidFill>
-                <a:latin typeface="Malgun Gothic" pitchFamily="34" charset="0"/>
-                <a:ea typeface="Malgun Gothic" pitchFamily="34" charset="-122"/>
-                <a:cs typeface="Malgun Gothic" pitchFamily="34" charset="-120"/>
-              </a:rPr>
-              <a:t>RMSE 0.866</a:t>
-            </a:r>
-            <a:endParaRPr lang="en-US" sz="1200" dirty="0"/>
-          </a:p>
-        </p:txBody>
-      </p:sp>
-      <p:sp>
-        <p:nvSpPr>
-          <p:cNvPr id="14" name="Text 11"/>
-          <p:cNvSpPr/>
-          <p:nvPr/>
-        </p:nvSpPr>
-        <p:spPr>
-          <a:xfrm>
-            <a:off x="2939877" y="5638800"/>
-            <a:ext cx="2178045" cy="342900"/>
-          </a:xfrm>
-          <a:prstGeom prst="rect">
-            <a:avLst/>
-          </a:prstGeom>
-          <a:noFill/>
-          <a:ln/>
-        </p:spPr>
-        <p:txBody>
-          <a:bodyPr wrap="square" lIns="0" tIns="0" rIns="0" bIns="0" rtlCol="0" anchor="t"/>
-          <a:lstStyle/>
-          <a:p>
-            <a:pPr marL="0" indent="0" algn="l">
-              <a:buNone/>
-            </a:pPr>
-            <a:r>
-              <a:rPr lang="en-US" sz="1200" dirty="0">
-                <a:solidFill>
-                  <a:srgbClr val="536963"/>
-                </a:solidFill>
-                <a:latin typeface="Malgun Gothic" pitchFamily="34" charset="0"/>
-                <a:ea typeface="Malgun Gothic" pitchFamily="34" charset="-122"/>
-                <a:cs typeface="Malgun Gothic" pitchFamily="34" charset="-120"/>
-              </a:rPr>
-              <a:t>MAE 0.693</a:t>
-            </a:r>
-            <a:endParaRPr lang="en-US" sz="1200" dirty="0"/>
-          </a:p>
-        </p:txBody>
-      </p:sp>
-      <p:sp>
-        <p:nvSpPr>
-          <p:cNvPr id="15" name="Text 12"/>
-          <p:cNvSpPr/>
-          <p:nvPr/>
-        </p:nvSpPr>
-        <p:spPr>
-          <a:xfrm>
-            <a:off x="5232220" y="5638800"/>
-            <a:ext cx="2178045" cy="342900"/>
-          </a:xfrm>
-          <a:prstGeom prst="rect">
-            <a:avLst/>
-          </a:prstGeom>
-          <a:noFill/>
-          <a:ln/>
-        </p:spPr>
-        <p:txBody>
-          <a:bodyPr wrap="square" lIns="0" tIns="0" rIns="0" bIns="0" rtlCol="0" anchor="t"/>
-          <a:lstStyle/>
-          <a:p>
-            <a:pPr marL="0" indent="0" algn="l">
-              <a:buNone/>
-            </a:pPr>
-            <a:r>
-              <a:rPr lang="en-US" sz="1200" dirty="0">
-                <a:solidFill>
-                  <a:srgbClr val="536963"/>
-                </a:solidFill>
-                <a:latin typeface="Malgun Gothic" pitchFamily="34" charset="0"/>
-                <a:ea typeface="Malgun Gothic" pitchFamily="34" charset="-122"/>
-                <a:cs typeface="Malgun Gothic" pitchFamily="34" charset="-120"/>
-              </a:rPr>
-              <a:t>R² 0.947</a:t>
-            </a:r>
-            <a:endParaRPr lang="en-US" sz="1200" dirty="0"/>
-          </a:p>
-        </p:txBody>
-      </p:sp>
-      <p:sp>
-        <p:nvSpPr>
-          <p:cNvPr id="16" name="Text 13"/>
-          <p:cNvSpPr/>
-          <p:nvPr/>
-        </p:nvSpPr>
-        <p:spPr>
-          <a:xfrm>
-            <a:off x="8569160" y="6381750"/>
-            <a:ext cx="2974851" cy="171450"/>
-          </a:xfrm>
-          <a:prstGeom prst="rect">
-            <a:avLst/>
-          </a:prstGeom>
-          <a:noFill/>
-          <a:ln/>
-        </p:spPr>
-        <p:txBody>
-          <a:bodyPr wrap="square" lIns="0" tIns="0" rIns="0" bIns="0" rtlCol="0" anchor="t"/>
-          <a:lstStyle/>
-          <a:p>
-            <a:pPr marL="0" indent="0" algn="l">
+            <a:pPr marL="0" indent="0" algn="r">
               <a:buNone/>
             </a:pPr>
             <a:r>
               <a:rPr lang="en-US" sz="1050" dirty="0">
                 <a:solidFill>
-                  <a:srgbClr val="7A8C87"/>
+                  <a:srgbClr val="748B93"/>
                 </a:solidFill>
-                <a:latin typeface="Malgun Gothic" pitchFamily="34" charset="0"/>
-                <a:ea typeface="Malgun Gothic" pitchFamily="34" charset="-122"/>
-                <a:cs typeface="Malgun Gothic" pitchFamily="34" charset="-120"/>
+                <a:latin typeface="Arial" pitchFamily="34" charset="0"/>
+                <a:ea typeface="Arial" pitchFamily="34" charset="-122"/>
+                <a:cs typeface="Arial" pitchFamily="34" charset="-120"/>
               </a:rPr>
-              <a:t>동일한 train/test split · 평가 지표: RMSE, MAE, R²</a:t>
+              <a:t>05</a:t>
             </a:r>
             <a:endParaRPr lang="en-US" sz="1050" dirty="0"/>
           </a:p>
@@ -9559,7 +9042,7 @@
     </p:spTree>
     <p:extLst>
       <p:ext uri="{BB962C8B-B14F-4D97-AF65-F5344CB8AC3E}">
-        <p14:creationId xmlns:p14="http://schemas.microsoft.com/office/powerpoint/2010/main" val="2517963943"/>
+        <p14:creationId xmlns:p14="http://schemas.microsoft.com/office/powerpoint/2010/main" val="2141890399"/>
       </p:ext>
     </p:extLst>
   </p:cSld>
@@ -9601,7 +9084,7 @@
             <a:avLst/>
           </a:prstGeom>
           <a:solidFill>
-            <a:srgbClr val="F7FAF9"/>
+            <a:srgbClr val="F7F9F9"/>
           </a:solidFill>
           <a:ln w="12700">
             <a:solidFill>
@@ -9629,7 +9112,7 @@
         <p:spPr>
           <a:xfrm>
             <a:off x="647684" y="419100"/>
-            <a:ext cx="2831384" cy="171450"/>
+            <a:ext cx="2441762" cy="200025"/>
           </a:xfrm>
           <a:prstGeom prst="rect">
             <a:avLst/>
@@ -9645,17 +9128,17 @@
               <a:buNone/>
             </a:pPr>
             <a:r>
-              <a:rPr lang="en-US" sz="1050" b="1" dirty="0">
+              <a:rPr lang="en-US" sz="1350" b="1" dirty="0">
                 <a:solidFill>
-                  <a:srgbClr val="0D9F76"/>
+                  <a:srgbClr val="00A982"/>
                 </a:solidFill>
-                <a:latin typeface="Malgun Gothic" pitchFamily="34" charset="0"/>
-                <a:ea typeface="Malgun Gothic" pitchFamily="34" charset="-122"/>
-                <a:cs typeface="Malgun Gothic" pitchFamily="34" charset="-120"/>
+                <a:latin typeface="Arial" pitchFamily="34" charset="0"/>
+                <a:ea typeface="Arial" pitchFamily="34" charset="-122"/>
+                <a:cs typeface="Arial" pitchFamily="34" charset="-120"/>
               </a:rPr>
-              <a:t>05 · RECOMMENDATION ALGORITHM</a:t>
+              <a:t>05 · SYSTEM ARCHITECTURE</a:t>
             </a:r>
-            <a:endParaRPr lang="en-US" sz="1050" dirty="0"/>
+            <a:endParaRPr lang="en-US" sz="1350" dirty="0"/>
           </a:p>
         </p:txBody>
       </p:sp>
@@ -9667,8 +9150,8 @@
         </p:nvSpPr>
         <p:spPr>
           <a:xfrm>
-            <a:off x="647684" y="704850"/>
-            <a:ext cx="10667733" cy="457200"/>
+            <a:off x="647684" y="723900"/>
+            <a:ext cx="10667733" cy="495300"/>
           </a:xfrm>
           <a:prstGeom prst="rect">
             <a:avLst/>
@@ -9684,17 +9167,17 @@
               <a:buNone/>
             </a:pPr>
             <a:r>
-              <a:rPr lang="en-US" sz="2700" b="1" dirty="0">
+              <a:rPr lang="en-US" sz="3000" b="1" dirty="0">
                 <a:solidFill>
-                  <a:srgbClr val="10232B"/>
+                  <a:srgbClr val="071B26"/>
                 </a:solidFill>
-                <a:latin typeface="Malgun Gothic" pitchFamily="34" charset="0"/>
-                <a:ea typeface="Malgun Gothic" pitchFamily="34" charset="-122"/>
-                <a:cs typeface="Malgun Gothic" pitchFamily="34" charset="-120"/>
+                <a:latin typeface="Arial" pitchFamily="34" charset="0"/>
+                <a:ea typeface="Arial" pitchFamily="34" charset="-122"/>
+                <a:cs typeface="Arial" pitchFamily="34" charset="-120"/>
               </a:rPr>
-              <a:t>예측값을 속도 전 구간에 적용해 추천 후보를 탐색한다</a:t>
+              <a:t>학습 구조 : 예측 모델과 추천 알고리즘 분리</a:t>
             </a:r>
-            <a:endParaRPr lang="en-US" sz="2700" dirty="0"/>
+            <a:endParaRPr lang="en-US" sz="3000" dirty="0"/>
           </a:p>
         </p:txBody>
       </p:sp>
@@ -9706,108 +9189,42 @@
         </p:nvSpPr>
         <p:spPr>
           <a:xfrm>
-            <a:off x="647684" y="2028825"/>
-            <a:ext cx="1809705" cy="1524000"/>
-          </a:xfrm>
-          <a:prstGeom prst="rect">
-            <a:avLst/>
-          </a:prstGeom>
-          <a:solidFill>
-            <a:srgbClr val="FFFFFF"/>
-          </a:solidFill>
-          <a:ln w="12700">
-            <a:solidFill>
-              <a:srgbClr val="FFFFFF">
-                <a:alpha val="0"/>
-              </a:srgbClr>
-            </a:solidFill>
-            <a:prstDash val="solid"/>
-          </a:ln>
-        </p:spPr>
-        <p:txBody>
-          <a:bodyPr/>
-          <a:lstStyle/>
-          <a:p>
-            <a:endParaRPr lang="ko-KR" altLang="en-US"/>
-          </a:p>
-        </p:txBody>
-      </p:sp>
-      <p:sp>
-        <p:nvSpPr>
-          <p:cNvPr id="6" name="Shape 4"/>
-          <p:cNvSpPr/>
-          <p:nvPr/>
-        </p:nvSpPr>
-        <p:spPr>
-          <a:xfrm>
-            <a:off x="647684" y="2057400"/>
-            <a:ext cx="1809705" cy="0"/>
-          </a:xfrm>
-          <a:prstGeom prst="line">
-            <a:avLst/>
-          </a:prstGeom>
-          <a:solidFill>
-            <a:srgbClr val="FFFFFF">
-              <a:alpha val="0"/>
-            </a:srgbClr>
-          </a:solidFill>
-          <a:ln w="57150">
-            <a:solidFill>
-              <a:srgbClr val="19AA7D"/>
-            </a:solidFill>
-            <a:prstDash val="solid"/>
-          </a:ln>
-        </p:spPr>
-      </p:sp>
-      <p:sp>
-        <p:nvSpPr>
-          <p:cNvPr id="7" name="Text 5"/>
-          <p:cNvSpPr/>
-          <p:nvPr/>
-        </p:nvSpPr>
-        <p:spPr>
-          <a:xfrm>
-            <a:off x="819130" y="2295525"/>
-            <a:ext cx="1466813" cy="186630"/>
-          </a:xfrm>
-          <a:prstGeom prst="rect">
-            <a:avLst/>
-          </a:prstGeom>
-          <a:noFill/>
-          <a:ln/>
-        </p:spPr>
-        <p:txBody>
-          <a:bodyPr wrap="square" lIns="0" tIns="0" rIns="0" bIns="0" rtlCol="0" anchor="t"/>
-          <a:lstStyle/>
-          <a:p>
-            <a:pPr marL="0" indent="0" algn="l">
-              <a:buNone/>
-            </a:pPr>
-            <a:r>
-              <a:rPr lang="en-US" sz="1050" b="1" dirty="0">
-                <a:solidFill>
-                  <a:srgbClr val="0A936D"/>
-                </a:solidFill>
-                <a:latin typeface="Malgun Gothic" pitchFamily="34" charset="0"/>
-                <a:ea typeface="Malgun Gothic" pitchFamily="34" charset="-122"/>
-                <a:cs typeface="Malgun Gothic" pitchFamily="34" charset="-120"/>
-              </a:rPr>
-              <a:t>STEP 1</a:t>
-            </a:r>
-            <a:endParaRPr lang="en-US" sz="1050" dirty="0"/>
-          </a:p>
-        </p:txBody>
-      </p:sp>
-      <p:sp>
-        <p:nvSpPr>
-          <p:cNvPr id="8" name="Text 6"/>
-          <p:cNvSpPr/>
-          <p:nvPr/>
-        </p:nvSpPr>
-        <p:spPr>
-          <a:xfrm>
-            <a:off x="819130" y="2482155"/>
-            <a:ext cx="1466813" cy="264021"/>
+            <a:off x="647684" y="1323975"/>
+            <a:ext cx="10896328" cy="19050"/>
+          </a:xfrm>
+          <a:prstGeom prst="rect">
+            <a:avLst/>
+          </a:prstGeom>
+          <a:solidFill>
+            <a:srgbClr val="DCE5E4"/>
+          </a:solidFill>
+          <a:ln w="12700">
+            <a:solidFill>
+              <a:srgbClr val="FFFFFF">
+                <a:alpha val="0"/>
+              </a:srgbClr>
+            </a:solidFill>
+            <a:prstDash val="solid"/>
+          </a:ln>
+        </p:spPr>
+        <p:txBody>
+          <a:bodyPr/>
+          <a:lstStyle/>
+          <a:p>
+            <a:endParaRPr lang="ko-KR" altLang="en-US"/>
+          </a:p>
+        </p:txBody>
+      </p:sp>
+      <p:sp>
+        <p:nvSpPr>
+          <p:cNvPr id="6" name="Text 4"/>
+          <p:cNvSpPr/>
+          <p:nvPr/>
+        </p:nvSpPr>
+        <p:spPr>
+          <a:xfrm>
+            <a:off x="781030" y="1504950"/>
+            <a:ext cx="10629634" cy="514350"/>
           </a:xfrm>
           <a:prstGeom prst="rect">
             <a:avLst/>
@@ -9825,13 +9242,13 @@
             <a:r>
               <a:rPr lang="en-US" sz="1600" b="1" dirty="0">
                 <a:solidFill>
-                  <a:srgbClr val="10232B"/>
+                  <a:srgbClr val="22313B"/>
                 </a:solidFill>
-                <a:latin typeface="Malgun Gothic" pitchFamily="34" charset="0"/>
-                <a:ea typeface="Malgun Gothic" pitchFamily="34" charset="-122"/>
-                <a:cs typeface="Malgun Gothic" pitchFamily="34" charset="-120"/>
+                <a:latin typeface="Arial" pitchFamily="34" charset="0"/>
+                <a:ea typeface="Arial" pitchFamily="34" charset="-122"/>
+                <a:cs typeface="Arial" pitchFamily="34" charset="-120"/>
               </a:rPr>
-              <a:t>주행 조건 입력</a:t>
+              <a:t>XGBoost는 최적 속도를 직접 학습하지 않는다. 에너지 소비량을 예측하고, 별도 알고리즘이 추천 속도를 결정한다.</a:t>
             </a:r>
             <a:endParaRPr lang="en-US" sz="1600" dirty="0"/>
           </a:p>
@@ -9839,87 +9256,48 @@
       </p:sp>
       <p:sp>
         <p:nvSpPr>
-          <p:cNvPr id="9" name="Text 7"/>
-          <p:cNvSpPr/>
-          <p:nvPr/>
-        </p:nvSpPr>
-        <p:spPr>
-          <a:xfrm>
-            <a:off x="819130" y="2746177"/>
-            <a:ext cx="1466813" cy="408682"/>
-          </a:xfrm>
-          <a:prstGeom prst="rect">
-            <a:avLst/>
-          </a:prstGeom>
-          <a:noFill/>
-          <a:ln/>
-        </p:spPr>
-        <p:txBody>
-          <a:bodyPr wrap="square" lIns="0" tIns="0" rIns="0" bIns="0" rtlCol="0" anchor="t"/>
-          <a:lstStyle/>
-          <a:p>
-            <a:pPr marL="0" indent="0" algn="l">
-              <a:buNone/>
-            </a:pPr>
-            <a:r>
-              <a:rPr lang="en-US" sz="1150" dirty="0">
-                <a:solidFill>
-                  <a:srgbClr val="637771"/>
-                </a:solidFill>
-                <a:latin typeface="Malgun Gothic" pitchFamily="34" charset="0"/>
-                <a:ea typeface="Malgun Gothic" pitchFamily="34" charset="-122"/>
-                <a:cs typeface="Malgun Gothic" pitchFamily="34" charset="-120"/>
-              </a:rPr>
-              <a:t>거리·경사·하중·HVAC 등</a:t>
-            </a:r>
-            <a:endParaRPr lang="en-US" sz="1150" dirty="0"/>
-          </a:p>
-        </p:txBody>
-      </p:sp>
-      <p:sp>
-        <p:nvSpPr>
-          <p:cNvPr id="10" name="Shape 8"/>
-          <p:cNvSpPr/>
-          <p:nvPr/>
-        </p:nvSpPr>
-        <p:spPr>
-          <a:xfrm>
-            <a:off x="3676558" y="2028825"/>
-            <a:ext cx="1809705" cy="1524000"/>
-          </a:xfrm>
-          <a:prstGeom prst="rect">
-            <a:avLst/>
-          </a:prstGeom>
-          <a:solidFill>
-            <a:srgbClr val="FFFFFF"/>
-          </a:solidFill>
-          <a:ln w="12700">
-            <a:solidFill>
-              <a:srgbClr val="FFFFFF">
-                <a:alpha val="0"/>
-              </a:srgbClr>
-            </a:solidFill>
-            <a:prstDash val="solid"/>
-          </a:ln>
-        </p:spPr>
-        <p:txBody>
-          <a:bodyPr/>
-          <a:lstStyle/>
-          <a:p>
-            <a:endParaRPr lang="ko-KR" altLang="en-US"/>
-          </a:p>
-        </p:txBody>
-      </p:sp>
-      <p:sp>
-        <p:nvSpPr>
-          <p:cNvPr id="11" name="Shape 9"/>
-          <p:cNvSpPr/>
-          <p:nvPr/>
-        </p:nvSpPr>
-        <p:spPr>
-          <a:xfrm>
-            <a:off x="3676558" y="2057400"/>
-            <a:ext cx="1809705" cy="0"/>
+          <p:cNvPr id="7" name="Shape 5"/>
+          <p:cNvSpPr/>
+          <p:nvPr/>
+        </p:nvSpPr>
+        <p:spPr>
+          <a:xfrm>
+            <a:off x="609585" y="2305050"/>
+            <a:ext cx="1714457" cy="1381125"/>
+          </a:xfrm>
+          <a:prstGeom prst="rect">
+            <a:avLst/>
+          </a:prstGeom>
+          <a:solidFill>
+            <a:srgbClr val="EEF2F1"/>
+          </a:solidFill>
+          <a:ln w="12700">
+            <a:solidFill>
+              <a:srgbClr val="FFFFFF">
+                <a:alpha val="0"/>
+              </a:srgbClr>
+            </a:solidFill>
+            <a:prstDash val="solid"/>
+          </a:ln>
+        </p:spPr>
+        <p:txBody>
+          <a:bodyPr/>
+          <a:lstStyle/>
+          <a:p>
+            <a:endParaRPr lang="ko-KR" altLang="en-US"/>
+          </a:p>
+        </p:txBody>
+      </p:sp>
+      <p:sp>
+        <p:nvSpPr>
+          <p:cNvPr id="8" name="Shape 6"/>
+          <p:cNvSpPr/>
+          <p:nvPr/>
+        </p:nvSpPr>
+        <p:spPr>
+          <a:xfrm>
+            <a:off x="609585" y="2338388"/>
+            <a:ext cx="1714457" cy="0"/>
           </a:xfrm>
           <a:prstGeom prst="line">
             <a:avLst/>
@@ -9929,24 +9307,24 @@
               <a:alpha val="0"/>
             </a:srgbClr>
           </a:solidFill>
-          <a:ln w="57150">
-            <a:solidFill>
-              <a:srgbClr val="19AA7D"/>
-            </a:solidFill>
-            <a:prstDash val="solid"/>
-          </a:ln>
-        </p:spPr>
-      </p:sp>
-      <p:sp>
-        <p:nvSpPr>
-          <p:cNvPr id="12" name="Text 10"/>
-          <p:cNvSpPr/>
-          <p:nvPr/>
-        </p:nvSpPr>
-        <p:spPr>
-          <a:xfrm>
-            <a:off x="3848004" y="2295525"/>
-            <a:ext cx="1466813" cy="186630"/>
+          <a:ln w="66675">
+            <a:solidFill>
+              <a:srgbClr val="2F6BE8"/>
+            </a:solidFill>
+            <a:prstDash val="solid"/>
+          </a:ln>
+        </p:spPr>
+      </p:sp>
+      <p:sp>
+        <p:nvSpPr>
+          <p:cNvPr id="9" name="Text 7"/>
+          <p:cNvSpPr/>
+          <p:nvPr/>
+        </p:nvSpPr>
+        <p:spPr>
+          <a:xfrm>
+            <a:off x="723882" y="2800350"/>
+            <a:ext cx="1485863" cy="628650"/>
           </a:xfrm>
           <a:prstGeom prst="rect">
             <a:avLst/>
@@ -9958,689 +9336,36 @@
           <a:bodyPr wrap="square" lIns="0" tIns="0" rIns="0" bIns="0" rtlCol="0" anchor="t"/>
           <a:lstStyle/>
           <a:p>
-            <a:pPr marL="0" indent="0" algn="l">
-              <a:buNone/>
-            </a:pPr>
-            <a:r>
-              <a:rPr lang="en-US" sz="1050" b="1" dirty="0">
-                <a:solidFill>
-                  <a:srgbClr val="0A936D"/>
-                </a:solidFill>
-                <a:latin typeface="Malgun Gothic" pitchFamily="34" charset="0"/>
-                <a:ea typeface="Malgun Gothic" pitchFamily="34" charset="-122"/>
-                <a:cs typeface="Malgun Gothic" pitchFamily="34" charset="-120"/>
-              </a:rPr>
-              <a:t>STEP 2</a:t>
-            </a:r>
-            <a:endParaRPr lang="en-US" sz="1050" dirty="0"/>
-          </a:p>
-        </p:txBody>
-      </p:sp>
-      <p:sp>
-        <p:nvSpPr>
-          <p:cNvPr id="13" name="Text 11"/>
-          <p:cNvSpPr/>
-          <p:nvPr/>
-        </p:nvSpPr>
-        <p:spPr>
-          <a:xfrm>
-            <a:off x="3848004" y="2482155"/>
-            <a:ext cx="1466813" cy="264021"/>
-          </a:xfrm>
-          <a:prstGeom prst="rect">
-            <a:avLst/>
-          </a:prstGeom>
-          <a:noFill/>
-          <a:ln/>
-        </p:spPr>
-        <p:txBody>
-          <a:bodyPr wrap="square" lIns="0" tIns="0" rIns="0" bIns="0" rtlCol="0" anchor="t"/>
-          <a:lstStyle/>
-          <a:p>
-            <a:pPr marL="0" indent="0" algn="l">
-              <a:buNone/>
-            </a:pPr>
-            <a:r>
-              <a:rPr lang="en-US" sz="1600" b="1" dirty="0">
-                <a:solidFill>
-                  <a:srgbClr val="10232B"/>
-                </a:solidFill>
-                <a:latin typeface="Malgun Gothic" pitchFamily="34" charset="0"/>
-                <a:ea typeface="Malgun Gothic" pitchFamily="34" charset="-122"/>
-                <a:cs typeface="Malgun Gothic" pitchFamily="34" charset="-120"/>
-              </a:rPr>
-              <a:t>속도 전수 탐색</a:t>
-            </a:r>
-            <a:endParaRPr lang="en-US" sz="1600" dirty="0"/>
-          </a:p>
-        </p:txBody>
-      </p:sp>
-      <p:sp>
-        <p:nvSpPr>
-          <p:cNvPr id="14" name="Text 12"/>
-          <p:cNvSpPr/>
-          <p:nvPr/>
-        </p:nvSpPr>
-        <p:spPr>
-          <a:xfrm>
-            <a:off x="3848004" y="2746177"/>
-            <a:ext cx="1466813" cy="408682"/>
-          </a:xfrm>
-          <a:prstGeom prst="rect">
-            <a:avLst/>
-          </a:prstGeom>
-          <a:noFill/>
-          <a:ln/>
-        </p:spPr>
-        <p:txBody>
-          <a:bodyPr wrap="square" lIns="0" tIns="0" rIns="0" bIns="0" rtlCol="0" anchor="t"/>
-          <a:lstStyle/>
-          <a:p>
-            <a:pPr marL="0" indent="0" algn="l">
-              <a:buNone/>
-            </a:pPr>
-            <a:r>
-              <a:rPr lang="en-US" sz="1150" dirty="0">
-                <a:solidFill>
-                  <a:srgbClr val="637771"/>
-                </a:solidFill>
-                <a:latin typeface="Malgun Gothic" pitchFamily="34" charset="0"/>
-                <a:ea typeface="Malgun Gothic" pitchFamily="34" charset="-122"/>
-                <a:cs typeface="Malgun Gothic" pitchFamily="34" charset="-120"/>
-              </a:rPr>
-              <a:t>20~130km/h</a:t>
-            </a:r>
-            <a:endParaRPr lang="en-US" sz="1150" dirty="0"/>
-          </a:p>
-          <a:p>
-            <a:pPr marL="0" indent="0" algn="l">
-              <a:buNone/>
-            </a:pPr>
-            <a:r>
-              <a:rPr lang="en-US" sz="1150" dirty="0">
-                <a:solidFill>
-                  <a:srgbClr val="637771"/>
-                </a:solidFill>
-                <a:latin typeface="Malgun Gothic" pitchFamily="34" charset="0"/>
-                <a:ea typeface="Malgun Gothic" pitchFamily="34" charset="-122"/>
-                <a:cs typeface="Malgun Gothic" pitchFamily="34" charset="-120"/>
-              </a:rPr>
-              <a:t>1km/h 단위</a:t>
-            </a:r>
-            <a:endParaRPr lang="en-US" sz="1150" dirty="0"/>
-          </a:p>
-        </p:txBody>
-      </p:sp>
-      <p:sp>
-        <p:nvSpPr>
-          <p:cNvPr id="15" name="Shape 13"/>
-          <p:cNvSpPr/>
-          <p:nvPr/>
-        </p:nvSpPr>
-        <p:spPr>
-          <a:xfrm>
-            <a:off x="6705432" y="2028825"/>
-            <a:ext cx="1809705" cy="1524000"/>
-          </a:xfrm>
-          <a:prstGeom prst="rect">
-            <a:avLst/>
-          </a:prstGeom>
-          <a:solidFill>
-            <a:srgbClr val="FFFFFF"/>
-          </a:solidFill>
-          <a:ln w="12700">
-            <a:solidFill>
-              <a:srgbClr val="FFFFFF">
-                <a:alpha val="0"/>
-              </a:srgbClr>
-            </a:solidFill>
-            <a:prstDash val="solid"/>
-          </a:ln>
-        </p:spPr>
-        <p:txBody>
-          <a:bodyPr/>
-          <a:lstStyle/>
-          <a:p>
-            <a:endParaRPr lang="ko-KR" altLang="en-US"/>
-          </a:p>
-        </p:txBody>
-      </p:sp>
-      <p:sp>
-        <p:nvSpPr>
-          <p:cNvPr id="16" name="Shape 14"/>
-          <p:cNvSpPr/>
-          <p:nvPr/>
-        </p:nvSpPr>
-        <p:spPr>
-          <a:xfrm>
-            <a:off x="6705432" y="2057400"/>
-            <a:ext cx="1809705" cy="0"/>
-          </a:xfrm>
-          <a:prstGeom prst="line">
-            <a:avLst/>
-          </a:prstGeom>
-          <a:solidFill>
-            <a:srgbClr val="FFFFFF">
-              <a:alpha val="0"/>
-            </a:srgbClr>
-          </a:solidFill>
-          <a:ln w="57150">
-            <a:solidFill>
-              <a:srgbClr val="19AA7D"/>
-            </a:solidFill>
-            <a:prstDash val="solid"/>
-          </a:ln>
-        </p:spPr>
-      </p:sp>
-      <p:sp>
-        <p:nvSpPr>
-          <p:cNvPr id="17" name="Text 15"/>
-          <p:cNvSpPr/>
-          <p:nvPr/>
-        </p:nvSpPr>
-        <p:spPr>
-          <a:xfrm>
-            <a:off x="6876878" y="2295525"/>
-            <a:ext cx="1466813" cy="186630"/>
-          </a:xfrm>
-          <a:prstGeom prst="rect">
-            <a:avLst/>
-          </a:prstGeom>
-          <a:noFill/>
-          <a:ln/>
-        </p:spPr>
-        <p:txBody>
-          <a:bodyPr wrap="square" lIns="0" tIns="0" rIns="0" bIns="0" rtlCol="0" anchor="t"/>
-          <a:lstStyle/>
-          <a:p>
-            <a:pPr marL="0" indent="0" algn="l">
-              <a:buNone/>
-            </a:pPr>
-            <a:r>
-              <a:rPr lang="en-US" sz="1050" b="1" dirty="0">
-                <a:solidFill>
-                  <a:srgbClr val="0A936D"/>
-                </a:solidFill>
-                <a:latin typeface="Malgun Gothic" pitchFamily="34" charset="0"/>
-                <a:ea typeface="Malgun Gothic" pitchFamily="34" charset="-122"/>
-                <a:cs typeface="Malgun Gothic" pitchFamily="34" charset="-120"/>
-              </a:rPr>
-              <a:t>STEP 3</a:t>
-            </a:r>
-            <a:endParaRPr lang="en-US" sz="1050" dirty="0"/>
-          </a:p>
-        </p:txBody>
-      </p:sp>
-      <p:sp>
-        <p:nvSpPr>
-          <p:cNvPr id="18" name="Text 16"/>
-          <p:cNvSpPr/>
-          <p:nvPr/>
-        </p:nvSpPr>
-        <p:spPr>
-          <a:xfrm>
-            <a:off x="6876878" y="2482155"/>
-            <a:ext cx="1466813" cy="264021"/>
-          </a:xfrm>
-          <a:prstGeom prst="rect">
-            <a:avLst/>
-          </a:prstGeom>
-          <a:noFill/>
-          <a:ln/>
-        </p:spPr>
-        <p:txBody>
-          <a:bodyPr wrap="square" lIns="0" tIns="0" rIns="0" bIns="0" rtlCol="0" anchor="t"/>
-          <a:lstStyle/>
-          <a:p>
-            <a:pPr marL="0" indent="0" algn="l">
-              <a:buNone/>
-            </a:pPr>
-            <a:r>
-              <a:rPr lang="en-US" sz="1600" b="1" dirty="0">
-                <a:solidFill>
-                  <a:srgbClr val="10232B"/>
-                </a:solidFill>
-                <a:latin typeface="Malgun Gothic" pitchFamily="34" charset="0"/>
-                <a:ea typeface="Malgun Gothic" pitchFamily="34" charset="-122"/>
-                <a:cs typeface="Malgun Gothic" pitchFamily="34" charset="-120"/>
-              </a:rPr>
-              <a:t>XGBoost 예측</a:t>
-            </a:r>
-            <a:endParaRPr lang="en-US" sz="1600" dirty="0"/>
-          </a:p>
-        </p:txBody>
-      </p:sp>
-      <p:sp>
-        <p:nvSpPr>
-          <p:cNvPr id="19" name="Text 17"/>
-          <p:cNvSpPr/>
-          <p:nvPr/>
-        </p:nvSpPr>
-        <p:spPr>
-          <a:xfrm>
-            <a:off x="6876878" y="2746177"/>
-            <a:ext cx="1466813" cy="408682"/>
-          </a:xfrm>
-          <a:prstGeom prst="rect">
-            <a:avLst/>
-          </a:prstGeom>
-          <a:noFill/>
-          <a:ln/>
-        </p:spPr>
-        <p:txBody>
-          <a:bodyPr wrap="square" lIns="0" tIns="0" rIns="0" bIns="0" rtlCol="0" anchor="t"/>
-          <a:lstStyle/>
-          <a:p>
-            <a:pPr marL="0" indent="0" algn="l">
-              <a:buNone/>
-            </a:pPr>
-            <a:r>
-              <a:rPr lang="en-US" sz="1150" dirty="0">
-                <a:solidFill>
-                  <a:srgbClr val="637771"/>
-                </a:solidFill>
-                <a:latin typeface="Malgun Gothic" pitchFamily="34" charset="0"/>
-                <a:ea typeface="Malgun Gothic" pitchFamily="34" charset="-122"/>
-                <a:cs typeface="Malgun Gothic" pitchFamily="34" charset="-120"/>
-              </a:rPr>
-              <a:t>각 속도의</a:t>
-            </a:r>
-            <a:endParaRPr lang="en-US" sz="1150" dirty="0"/>
-          </a:p>
-          <a:p>
-            <a:pPr marL="0" indent="0" algn="l">
-              <a:buNone/>
-            </a:pPr>
-            <a:r>
-              <a:rPr lang="en-US" sz="1150" dirty="0">
-                <a:solidFill>
-                  <a:srgbClr val="637771"/>
-                </a:solidFill>
-                <a:latin typeface="Malgun Gothic" pitchFamily="34" charset="0"/>
-                <a:ea typeface="Malgun Gothic" pitchFamily="34" charset="-122"/>
-                <a:cs typeface="Malgun Gothic" pitchFamily="34" charset="-120"/>
-              </a:rPr>
-              <a:t>kWh/100km 산출</a:t>
-            </a:r>
-            <a:endParaRPr lang="en-US" sz="1150" dirty="0"/>
-          </a:p>
-        </p:txBody>
-      </p:sp>
-      <p:sp>
-        <p:nvSpPr>
-          <p:cNvPr id="20" name="Shape 18"/>
-          <p:cNvSpPr/>
-          <p:nvPr/>
-        </p:nvSpPr>
-        <p:spPr>
-          <a:xfrm>
-            <a:off x="9734307" y="2028825"/>
-            <a:ext cx="1809705" cy="1524000"/>
-          </a:xfrm>
-          <a:prstGeom prst="rect">
-            <a:avLst/>
-          </a:prstGeom>
-          <a:solidFill>
-            <a:srgbClr val="FFFFFF"/>
-          </a:solidFill>
-          <a:ln w="12700">
-            <a:solidFill>
-              <a:srgbClr val="FFFFFF">
-                <a:alpha val="0"/>
-              </a:srgbClr>
-            </a:solidFill>
-            <a:prstDash val="solid"/>
-          </a:ln>
-        </p:spPr>
-        <p:txBody>
-          <a:bodyPr/>
-          <a:lstStyle/>
-          <a:p>
-            <a:endParaRPr lang="ko-KR" altLang="en-US"/>
-          </a:p>
-        </p:txBody>
-      </p:sp>
-      <p:sp>
-        <p:nvSpPr>
-          <p:cNvPr id="21" name="Shape 19"/>
-          <p:cNvSpPr/>
-          <p:nvPr/>
-        </p:nvSpPr>
-        <p:spPr>
-          <a:xfrm>
-            <a:off x="9734307" y="2057400"/>
-            <a:ext cx="1809705" cy="0"/>
-          </a:xfrm>
-          <a:prstGeom prst="line">
-            <a:avLst/>
-          </a:prstGeom>
-          <a:solidFill>
-            <a:srgbClr val="FFFFFF">
-              <a:alpha val="0"/>
-            </a:srgbClr>
-          </a:solidFill>
-          <a:ln w="57150">
-            <a:solidFill>
-              <a:srgbClr val="19AA7D"/>
-            </a:solidFill>
-            <a:prstDash val="solid"/>
-          </a:ln>
-        </p:spPr>
-      </p:sp>
-      <p:sp>
-        <p:nvSpPr>
-          <p:cNvPr id="22" name="Text 20"/>
-          <p:cNvSpPr/>
-          <p:nvPr/>
-        </p:nvSpPr>
-        <p:spPr>
-          <a:xfrm>
-            <a:off x="9905752" y="2295525"/>
-            <a:ext cx="1466813" cy="186630"/>
-          </a:xfrm>
-          <a:prstGeom prst="rect">
-            <a:avLst/>
-          </a:prstGeom>
-          <a:noFill/>
-          <a:ln/>
-        </p:spPr>
-        <p:txBody>
-          <a:bodyPr wrap="square" lIns="0" tIns="0" rIns="0" bIns="0" rtlCol="0" anchor="t"/>
-          <a:lstStyle/>
-          <a:p>
-            <a:pPr marL="0" indent="0" algn="l">
-              <a:buNone/>
-            </a:pPr>
-            <a:r>
-              <a:rPr lang="en-US" sz="1050" b="1" dirty="0">
-                <a:solidFill>
-                  <a:srgbClr val="0A936D"/>
-                </a:solidFill>
-                <a:latin typeface="Malgun Gothic" pitchFamily="34" charset="0"/>
-                <a:ea typeface="Malgun Gothic" pitchFamily="34" charset="-122"/>
-                <a:cs typeface="Malgun Gothic" pitchFamily="34" charset="-120"/>
-              </a:rPr>
-              <a:t>STEP 4</a:t>
-            </a:r>
-            <a:endParaRPr lang="en-US" sz="1050" dirty="0"/>
-          </a:p>
-        </p:txBody>
-      </p:sp>
-      <p:sp>
-        <p:nvSpPr>
-          <p:cNvPr id="23" name="Text 21"/>
-          <p:cNvSpPr/>
-          <p:nvPr/>
-        </p:nvSpPr>
-        <p:spPr>
-          <a:xfrm>
-            <a:off x="9905752" y="2482155"/>
-            <a:ext cx="1466813" cy="528042"/>
-          </a:xfrm>
-          <a:prstGeom prst="rect">
-            <a:avLst/>
-          </a:prstGeom>
-          <a:noFill/>
-          <a:ln/>
-        </p:spPr>
-        <p:txBody>
-          <a:bodyPr wrap="square" lIns="0" tIns="0" rIns="0" bIns="0" rtlCol="0" anchor="t"/>
-          <a:lstStyle/>
-          <a:p>
-            <a:pPr marL="0" indent="0" algn="l">
-              <a:buNone/>
-            </a:pPr>
-            <a:r>
-              <a:rPr lang="en-US" sz="1600" b="1" dirty="0">
-                <a:solidFill>
-                  <a:srgbClr val="10232B"/>
-                </a:solidFill>
-                <a:latin typeface="Malgun Gothic" pitchFamily="34" charset="0"/>
-                <a:ea typeface="Malgun Gothic" pitchFamily="34" charset="-122"/>
-                <a:cs typeface="Malgun Gothic" pitchFamily="34" charset="-120"/>
-              </a:rPr>
-              <a:t>에너지·시간 계산</a:t>
-            </a:r>
-            <a:endParaRPr lang="en-US" sz="1600" dirty="0"/>
-          </a:p>
-        </p:txBody>
-      </p:sp>
-      <p:sp>
-        <p:nvSpPr>
-          <p:cNvPr id="24" name="Text 22"/>
-          <p:cNvSpPr/>
-          <p:nvPr/>
-        </p:nvSpPr>
-        <p:spPr>
-          <a:xfrm>
-            <a:off x="9905752" y="3010198"/>
-            <a:ext cx="1466813" cy="408682"/>
-          </a:xfrm>
-          <a:prstGeom prst="rect">
-            <a:avLst/>
-          </a:prstGeom>
-          <a:noFill/>
-          <a:ln/>
-        </p:spPr>
-        <p:txBody>
-          <a:bodyPr wrap="square" lIns="0" tIns="0" rIns="0" bIns="0" rtlCol="0" anchor="t"/>
-          <a:lstStyle/>
-          <a:p>
-            <a:pPr marL="0" indent="0" algn="l">
-              <a:buNone/>
-            </a:pPr>
-            <a:r>
-              <a:rPr lang="en-US" sz="1150" dirty="0">
-                <a:solidFill>
-                  <a:srgbClr val="637771"/>
-                </a:solidFill>
-                <a:latin typeface="Malgun Gothic" pitchFamily="34" charset="0"/>
-                <a:ea typeface="Malgun Gothic" pitchFamily="34" charset="-122"/>
-                <a:cs typeface="Malgun Gothic" pitchFamily="34" charset="-120"/>
-              </a:rPr>
-              <a:t>거리 반영 후</a:t>
-            </a:r>
-            <a:endParaRPr lang="en-US" sz="1150" dirty="0"/>
-          </a:p>
-          <a:p>
-            <a:pPr marL="0" indent="0" algn="l">
-              <a:buNone/>
-            </a:pPr>
-            <a:r>
-              <a:rPr lang="en-US" sz="1150" dirty="0">
-                <a:solidFill>
-                  <a:srgbClr val="637771"/>
-                </a:solidFill>
-                <a:latin typeface="Malgun Gothic" pitchFamily="34" charset="0"/>
-                <a:ea typeface="Malgun Gothic" pitchFamily="34" charset="-122"/>
-                <a:cs typeface="Malgun Gothic" pitchFamily="34" charset="-120"/>
-              </a:rPr>
-              <a:t>모드별 후보 선택</a:t>
-            </a:r>
-            <a:endParaRPr lang="en-US" sz="1150" dirty="0"/>
-          </a:p>
-        </p:txBody>
-      </p:sp>
-      <p:sp>
-        <p:nvSpPr>
-          <p:cNvPr id="25" name="Shape 23"/>
-          <p:cNvSpPr/>
-          <p:nvPr/>
-        </p:nvSpPr>
-        <p:spPr>
-          <a:xfrm>
-            <a:off x="647684" y="4229100"/>
-            <a:ext cx="5143371" cy="1104900"/>
-          </a:xfrm>
-          <a:prstGeom prst="rect">
-            <a:avLst/>
-          </a:prstGeom>
-          <a:solidFill>
-            <a:srgbClr val="10232B"/>
-          </a:solidFill>
-          <a:ln w="12700">
-            <a:solidFill>
-              <a:srgbClr val="FFFFFF">
-                <a:alpha val="0"/>
-              </a:srgbClr>
-            </a:solidFill>
-            <a:prstDash val="solid"/>
-          </a:ln>
-        </p:spPr>
-        <p:txBody>
-          <a:bodyPr/>
-          <a:lstStyle/>
-          <a:p>
-            <a:endParaRPr lang="ko-KR" altLang="en-US"/>
-          </a:p>
-        </p:txBody>
-      </p:sp>
-      <p:sp>
-        <p:nvSpPr>
-          <p:cNvPr id="26" name="Text 24"/>
-          <p:cNvSpPr/>
-          <p:nvPr/>
-        </p:nvSpPr>
-        <p:spPr>
-          <a:xfrm>
-            <a:off x="933427" y="4457700"/>
-            <a:ext cx="4571886" cy="228600"/>
-          </a:xfrm>
-          <a:prstGeom prst="rect">
-            <a:avLst/>
-          </a:prstGeom>
-          <a:noFill/>
-          <a:ln/>
-        </p:spPr>
-        <p:txBody>
-          <a:bodyPr wrap="square" lIns="0" tIns="0" rIns="0" bIns="0" rtlCol="0" anchor="t"/>
-          <a:lstStyle/>
-          <a:p>
-            <a:pPr marL="0" indent="0" algn="l">
+            <a:pPr marL="0" indent="0" algn="ctr">
               <a:buNone/>
             </a:pPr>
             <a:r>
               <a:rPr lang="en-US" sz="1350" b="1" dirty="0">
                 <a:solidFill>
-                  <a:srgbClr val="61E1B9"/>
+                  <a:srgbClr val="071B26"/>
                 </a:solidFill>
-                <a:latin typeface="Malgun Gothic" pitchFamily="34" charset="0"/>
-                <a:ea typeface="Malgun Gothic" pitchFamily="34" charset="-122"/>
-                <a:cs typeface="Malgun Gothic" pitchFamily="34" charset="-120"/>
+                <a:latin typeface="Arial" pitchFamily="34" charset="0"/>
+                <a:ea typeface="Arial" pitchFamily="34" charset="-122"/>
+                <a:cs typeface="Arial" pitchFamily="34" charset="-120"/>
               </a:rPr>
-              <a:t>TOTAL ENERGY</a:t>
+              <a:t>입력 Feature</a:t>
             </a:r>
             <a:endParaRPr lang="en-US" sz="1350" dirty="0"/>
           </a:p>
-        </p:txBody>
-      </p:sp>
-      <p:sp>
-        <p:nvSpPr>
-          <p:cNvPr id="27" name="Text 25"/>
-          <p:cNvSpPr/>
-          <p:nvPr/>
-        </p:nvSpPr>
-        <p:spPr>
-          <a:xfrm>
-            <a:off x="933427" y="4686300"/>
-            <a:ext cx="4571886" cy="590550"/>
-          </a:xfrm>
-          <a:prstGeom prst="rect">
-            <a:avLst/>
-          </a:prstGeom>
-          <a:noFill/>
-          <a:ln/>
-        </p:spPr>
-        <p:txBody>
-          <a:bodyPr wrap="square" lIns="0" tIns="0" rIns="0" bIns="0" rtlCol="0" anchor="t"/>
-          <a:lstStyle/>
-          <a:p>
-            <a:pPr marL="0" indent="0" algn="l">
-              <a:buNone/>
-            </a:pPr>
-            <a:r>
-              <a:rPr lang="en-US" sz="1600" b="1" dirty="0">
-                <a:solidFill>
-                  <a:srgbClr val="FFFFFF"/>
-                </a:solidFill>
-                <a:latin typeface="Malgun Gothic" pitchFamily="34" charset="0"/>
-                <a:ea typeface="Malgun Gothic" pitchFamily="34" charset="-122"/>
-                <a:cs typeface="Malgun Gothic" pitchFamily="34" charset="-120"/>
-              </a:rPr>
-              <a:t>Total Energy = Consumption × Distance / 100</a:t>
-            </a:r>
-            <a:endParaRPr lang="en-US" sz="1600" dirty="0"/>
-          </a:p>
-        </p:txBody>
-      </p:sp>
-      <p:sp>
-        <p:nvSpPr>
-          <p:cNvPr id="28" name="Shape 26"/>
-          <p:cNvSpPr/>
-          <p:nvPr/>
-        </p:nvSpPr>
-        <p:spPr>
-          <a:xfrm>
-            <a:off x="6400640" y="4229100"/>
-            <a:ext cx="5143371" cy="1104900"/>
-          </a:xfrm>
-          <a:prstGeom prst="rect">
-            <a:avLst/>
-          </a:prstGeom>
-          <a:solidFill>
-            <a:srgbClr val="10232B"/>
-          </a:solidFill>
-          <a:ln w="12700">
-            <a:solidFill>
-              <a:srgbClr val="FFFFFF">
-                <a:alpha val="0"/>
-              </a:srgbClr>
-            </a:solidFill>
-            <a:prstDash val="solid"/>
-          </a:ln>
-        </p:spPr>
-        <p:txBody>
-          <a:bodyPr/>
-          <a:lstStyle/>
-          <a:p>
-            <a:endParaRPr lang="ko-KR" altLang="en-US"/>
-          </a:p>
-        </p:txBody>
-      </p:sp>
-      <p:sp>
-        <p:nvSpPr>
-          <p:cNvPr id="29" name="Text 27"/>
-          <p:cNvSpPr/>
-          <p:nvPr/>
-        </p:nvSpPr>
-        <p:spPr>
-          <a:xfrm>
-            <a:off x="6686383" y="4457700"/>
-            <a:ext cx="4571886" cy="228600"/>
-          </a:xfrm>
-          <a:prstGeom prst="rect">
-            <a:avLst/>
-          </a:prstGeom>
-          <a:noFill/>
-          <a:ln/>
-        </p:spPr>
-        <p:txBody>
-          <a:bodyPr wrap="square" lIns="0" tIns="0" rIns="0" bIns="0" rtlCol="0" anchor="t"/>
-          <a:lstStyle/>
-          <a:p>
-            <a:pPr marL="0" indent="0" algn="l">
+          <a:p>
+            <a:pPr marL="0" indent="0" algn="ctr">
               <a:buNone/>
             </a:pPr>
             <a:r>
               <a:rPr lang="en-US" sz="1350" b="1" dirty="0">
                 <a:solidFill>
-                  <a:srgbClr val="61E1B9"/>
+                  <a:srgbClr val="071B26"/>
                 </a:solidFill>
-                <a:latin typeface="Malgun Gothic" pitchFamily="34" charset="0"/>
-                <a:ea typeface="Malgun Gothic" pitchFamily="34" charset="-122"/>
-                <a:cs typeface="Malgun Gothic" pitchFamily="34" charset="-120"/>
+                <a:latin typeface="Arial" pitchFamily="34" charset="0"/>
+                <a:ea typeface="Arial" pitchFamily="34" charset="-122"/>
+                <a:cs typeface="Arial" pitchFamily="34" charset="-120"/>
               </a:rPr>
-              <a:t>TRAVEL TIME</a:t>
+              <a:t>9개 수치형 변수</a:t>
             </a:r>
             <a:endParaRPr lang="en-US" sz="1350" dirty="0"/>
           </a:p>
@@ -10648,14 +9373,109 @@
       </p:sp>
       <p:sp>
         <p:nvSpPr>
-          <p:cNvPr id="30" name="Text 28"/>
-          <p:cNvSpPr/>
-          <p:nvPr/>
-        </p:nvSpPr>
-        <p:spPr>
-          <a:xfrm>
-            <a:off x="6686383" y="4686300"/>
-            <a:ext cx="4571886" cy="295275"/>
+          <p:cNvPr id="10" name="Shape 8"/>
+          <p:cNvSpPr/>
+          <p:nvPr/>
+        </p:nvSpPr>
+        <p:spPr>
+          <a:xfrm>
+            <a:off x="2362141" y="2952750"/>
+            <a:ext cx="523862" cy="19050"/>
+          </a:xfrm>
+          <a:prstGeom prst="rect">
+            <a:avLst/>
+          </a:prstGeom>
+          <a:solidFill>
+            <a:srgbClr val="87989F"/>
+          </a:solidFill>
+          <a:ln w="12700">
+            <a:solidFill>
+              <a:srgbClr val="FFFFFF">
+                <a:alpha val="0"/>
+              </a:srgbClr>
+            </a:solidFill>
+            <a:prstDash val="solid"/>
+          </a:ln>
+        </p:spPr>
+        <p:txBody>
+          <a:bodyPr/>
+          <a:lstStyle/>
+          <a:p>
+            <a:endParaRPr lang="ko-KR" altLang="en-US"/>
+          </a:p>
+        </p:txBody>
+      </p:sp>
+      <p:sp>
+        <p:nvSpPr>
+          <p:cNvPr id="11" name="Shape 9"/>
+          <p:cNvSpPr/>
+          <p:nvPr/>
+        </p:nvSpPr>
+        <p:spPr>
+          <a:xfrm>
+            <a:off x="2924102" y="2305050"/>
+            <a:ext cx="1714457" cy="1381125"/>
+          </a:xfrm>
+          <a:prstGeom prst="rect">
+            <a:avLst/>
+          </a:prstGeom>
+          <a:solidFill>
+            <a:srgbClr val="EEF2F1"/>
+          </a:solidFill>
+          <a:ln w="12700">
+            <a:solidFill>
+              <a:srgbClr val="FFFFFF">
+                <a:alpha val="0"/>
+              </a:srgbClr>
+            </a:solidFill>
+            <a:prstDash val="solid"/>
+          </a:ln>
+        </p:spPr>
+        <p:txBody>
+          <a:bodyPr/>
+          <a:lstStyle/>
+          <a:p>
+            <a:endParaRPr lang="ko-KR" altLang="en-US"/>
+          </a:p>
+        </p:txBody>
+      </p:sp>
+      <p:sp>
+        <p:nvSpPr>
+          <p:cNvPr id="12" name="Shape 10"/>
+          <p:cNvSpPr/>
+          <p:nvPr/>
+        </p:nvSpPr>
+        <p:spPr>
+          <a:xfrm>
+            <a:off x="2924102" y="2338388"/>
+            <a:ext cx="1714457" cy="0"/>
+          </a:xfrm>
+          <a:prstGeom prst="line">
+            <a:avLst/>
+          </a:prstGeom>
+          <a:solidFill>
+            <a:srgbClr val="FFFFFF">
+              <a:alpha val="0"/>
+            </a:srgbClr>
+          </a:solidFill>
+          <a:ln w="66675">
+            <a:solidFill>
+              <a:srgbClr val="20BF8D"/>
+            </a:solidFill>
+            <a:prstDash val="solid"/>
+          </a:ln>
+        </p:spPr>
+      </p:sp>
+      <p:sp>
+        <p:nvSpPr>
+          <p:cNvPr id="13" name="Text 11"/>
+          <p:cNvSpPr/>
+          <p:nvPr/>
+        </p:nvSpPr>
+        <p:spPr>
+          <a:xfrm>
+            <a:off x="3038399" y="2800350"/>
+            <a:ext cx="1485863" cy="628650"/>
           </a:xfrm>
           <a:prstGeom prst="rect">
             <a:avLst/>
@@ -10667,34 +9487,646 @@
           <a:bodyPr wrap="square" lIns="0" tIns="0" rIns="0" bIns="0" rtlCol="0" anchor="t"/>
           <a:lstStyle/>
           <a:p>
-            <a:pPr marL="0" indent="0" algn="l">
+            <a:pPr marL="0" indent="0" algn="ctr">
               <a:buNone/>
             </a:pPr>
             <a:r>
-              <a:rPr lang="en-US" sz="1750" b="1" dirty="0">
+              <a:rPr lang="en-US" sz="1350" b="1" dirty="0">
+                <a:solidFill>
+                  <a:srgbClr val="071B26"/>
+                </a:solidFill>
+                <a:latin typeface="Arial" pitchFamily="34" charset="0"/>
+                <a:ea typeface="Arial" pitchFamily="34" charset="-122"/>
+                <a:cs typeface="Arial" pitchFamily="34" charset="-120"/>
+              </a:rPr>
+              <a:t>XGBoost</a:t>
+            </a:r>
+            <a:endParaRPr lang="en-US" sz="1350" dirty="0"/>
+          </a:p>
+          <a:p>
+            <a:pPr marL="0" indent="0" algn="ctr">
+              <a:buNone/>
+            </a:pPr>
+            <a:r>
+              <a:rPr lang="en-US" sz="1350" b="1" dirty="0">
+                <a:solidFill>
+                  <a:srgbClr val="071B26"/>
+                </a:solidFill>
+                <a:latin typeface="Arial" pitchFamily="34" charset="0"/>
+                <a:ea typeface="Arial" pitchFamily="34" charset="-122"/>
+                <a:cs typeface="Arial" pitchFamily="34" charset="-120"/>
+              </a:rPr>
+              <a:t>Regression</a:t>
+            </a:r>
+            <a:endParaRPr lang="en-US" sz="1350" dirty="0"/>
+          </a:p>
+        </p:txBody>
+      </p:sp>
+      <p:sp>
+        <p:nvSpPr>
+          <p:cNvPr id="14" name="Shape 12"/>
+          <p:cNvSpPr/>
+          <p:nvPr/>
+        </p:nvSpPr>
+        <p:spPr>
+          <a:xfrm>
+            <a:off x="4676658" y="2952750"/>
+            <a:ext cx="523862" cy="19050"/>
+          </a:xfrm>
+          <a:prstGeom prst="rect">
+            <a:avLst/>
+          </a:prstGeom>
+          <a:solidFill>
+            <a:srgbClr val="87989F"/>
+          </a:solidFill>
+          <a:ln w="12700">
+            <a:solidFill>
+              <a:srgbClr val="FFFFFF">
+                <a:alpha val="0"/>
+              </a:srgbClr>
+            </a:solidFill>
+            <a:prstDash val="solid"/>
+          </a:ln>
+        </p:spPr>
+        <p:txBody>
+          <a:bodyPr/>
+          <a:lstStyle/>
+          <a:p>
+            <a:endParaRPr lang="ko-KR" altLang="en-US"/>
+          </a:p>
+        </p:txBody>
+      </p:sp>
+      <p:sp>
+        <p:nvSpPr>
+          <p:cNvPr id="15" name="Shape 13"/>
+          <p:cNvSpPr/>
+          <p:nvPr/>
+        </p:nvSpPr>
+        <p:spPr>
+          <a:xfrm>
+            <a:off x="5238619" y="2305050"/>
+            <a:ext cx="1714457" cy="1381125"/>
+          </a:xfrm>
+          <a:prstGeom prst="rect">
+            <a:avLst/>
+          </a:prstGeom>
+          <a:solidFill>
+            <a:srgbClr val="EEF2F1"/>
+          </a:solidFill>
+          <a:ln w="12700">
+            <a:solidFill>
+              <a:srgbClr val="FFFFFF">
+                <a:alpha val="0"/>
+              </a:srgbClr>
+            </a:solidFill>
+            <a:prstDash val="solid"/>
+          </a:ln>
+        </p:spPr>
+        <p:txBody>
+          <a:bodyPr/>
+          <a:lstStyle/>
+          <a:p>
+            <a:endParaRPr lang="ko-KR" altLang="en-US"/>
+          </a:p>
+        </p:txBody>
+      </p:sp>
+      <p:sp>
+        <p:nvSpPr>
+          <p:cNvPr id="16" name="Shape 14"/>
+          <p:cNvSpPr/>
+          <p:nvPr/>
+        </p:nvSpPr>
+        <p:spPr>
+          <a:xfrm>
+            <a:off x="5238619" y="2338388"/>
+            <a:ext cx="1714457" cy="0"/>
+          </a:xfrm>
+          <a:prstGeom prst="line">
+            <a:avLst/>
+          </a:prstGeom>
+          <a:solidFill>
+            <a:srgbClr val="FFFFFF">
+              <a:alpha val="0"/>
+            </a:srgbClr>
+          </a:solidFill>
+          <a:ln w="66675">
+            <a:solidFill>
+              <a:srgbClr val="F5A33B"/>
+            </a:solidFill>
+            <a:prstDash val="solid"/>
+          </a:ln>
+        </p:spPr>
+      </p:sp>
+      <p:sp>
+        <p:nvSpPr>
+          <p:cNvPr id="17" name="Text 15"/>
+          <p:cNvSpPr/>
+          <p:nvPr/>
+        </p:nvSpPr>
+        <p:spPr>
+          <a:xfrm>
+            <a:off x="5352916" y="2800350"/>
+            <a:ext cx="1485863" cy="628650"/>
+          </a:xfrm>
+          <a:prstGeom prst="rect">
+            <a:avLst/>
+          </a:prstGeom>
+          <a:noFill/>
+          <a:ln/>
+        </p:spPr>
+        <p:txBody>
+          <a:bodyPr wrap="square" lIns="0" tIns="0" rIns="0" bIns="0" rtlCol="0" anchor="t"/>
+          <a:lstStyle/>
+          <a:p>
+            <a:pPr marL="0" indent="0" algn="ctr">
+              <a:buNone/>
+            </a:pPr>
+            <a:r>
+              <a:rPr lang="en-US" sz="1350" b="1" dirty="0">
+                <a:solidFill>
+                  <a:srgbClr val="071B26"/>
+                </a:solidFill>
+                <a:latin typeface="Arial" pitchFamily="34" charset="0"/>
+                <a:ea typeface="Arial" pitchFamily="34" charset="-122"/>
+                <a:cs typeface="Arial" pitchFamily="34" charset="-120"/>
+              </a:rPr>
+              <a:t>예측 Target</a:t>
+            </a:r>
+            <a:endParaRPr lang="en-US" sz="1350" dirty="0"/>
+          </a:p>
+          <a:p>
+            <a:pPr marL="0" indent="0" algn="ctr">
+              <a:buNone/>
+            </a:pPr>
+            <a:r>
+              <a:rPr lang="en-US" sz="1350" b="1" dirty="0">
+                <a:solidFill>
+                  <a:srgbClr val="071B26"/>
+                </a:solidFill>
+                <a:latin typeface="Arial" pitchFamily="34" charset="0"/>
+                <a:ea typeface="Arial" pitchFamily="34" charset="-122"/>
+                <a:cs typeface="Arial" pitchFamily="34" charset="-120"/>
+              </a:rPr>
+              <a:t>kWh/100km</a:t>
+            </a:r>
+            <a:endParaRPr lang="en-US" sz="1350" dirty="0"/>
+          </a:p>
+        </p:txBody>
+      </p:sp>
+      <p:sp>
+        <p:nvSpPr>
+          <p:cNvPr id="18" name="Shape 16"/>
+          <p:cNvSpPr/>
+          <p:nvPr/>
+        </p:nvSpPr>
+        <p:spPr>
+          <a:xfrm>
+            <a:off x="6991175" y="2952750"/>
+            <a:ext cx="523862" cy="19050"/>
+          </a:xfrm>
+          <a:prstGeom prst="rect">
+            <a:avLst/>
+          </a:prstGeom>
+          <a:solidFill>
+            <a:srgbClr val="87989F"/>
+          </a:solidFill>
+          <a:ln w="12700">
+            <a:solidFill>
+              <a:srgbClr val="FFFFFF">
+                <a:alpha val="0"/>
+              </a:srgbClr>
+            </a:solidFill>
+            <a:prstDash val="solid"/>
+          </a:ln>
+        </p:spPr>
+        <p:txBody>
+          <a:bodyPr/>
+          <a:lstStyle/>
+          <a:p>
+            <a:endParaRPr lang="ko-KR" altLang="en-US"/>
+          </a:p>
+        </p:txBody>
+      </p:sp>
+      <p:sp>
+        <p:nvSpPr>
+          <p:cNvPr id="19" name="Shape 17"/>
+          <p:cNvSpPr/>
+          <p:nvPr/>
+        </p:nvSpPr>
+        <p:spPr>
+          <a:xfrm>
+            <a:off x="7553136" y="2305050"/>
+            <a:ext cx="1714457" cy="1381125"/>
+          </a:xfrm>
+          <a:prstGeom prst="rect">
+            <a:avLst/>
+          </a:prstGeom>
+          <a:solidFill>
+            <a:srgbClr val="EEF2F1"/>
+          </a:solidFill>
+          <a:ln w="12700">
+            <a:solidFill>
+              <a:srgbClr val="FFFFFF">
+                <a:alpha val="0"/>
+              </a:srgbClr>
+            </a:solidFill>
+            <a:prstDash val="solid"/>
+          </a:ln>
+        </p:spPr>
+        <p:txBody>
+          <a:bodyPr/>
+          <a:lstStyle/>
+          <a:p>
+            <a:endParaRPr lang="ko-KR" altLang="en-US"/>
+          </a:p>
+        </p:txBody>
+      </p:sp>
+      <p:sp>
+        <p:nvSpPr>
+          <p:cNvPr id="20" name="Shape 18"/>
+          <p:cNvSpPr/>
+          <p:nvPr/>
+        </p:nvSpPr>
+        <p:spPr>
+          <a:xfrm>
+            <a:off x="7553136" y="2338388"/>
+            <a:ext cx="1714457" cy="0"/>
+          </a:xfrm>
+          <a:prstGeom prst="line">
+            <a:avLst/>
+          </a:prstGeom>
+          <a:solidFill>
+            <a:srgbClr val="FFFFFF">
+              <a:alpha val="0"/>
+            </a:srgbClr>
+          </a:solidFill>
+          <a:ln w="66675">
+            <a:solidFill>
+              <a:srgbClr val="2F6BE8"/>
+            </a:solidFill>
+            <a:prstDash val="solid"/>
+          </a:ln>
+        </p:spPr>
+      </p:sp>
+      <p:sp>
+        <p:nvSpPr>
+          <p:cNvPr id="21" name="Text 19"/>
+          <p:cNvSpPr/>
+          <p:nvPr/>
+        </p:nvSpPr>
+        <p:spPr>
+          <a:xfrm>
+            <a:off x="7667433" y="2800350"/>
+            <a:ext cx="1485863" cy="628650"/>
+          </a:xfrm>
+          <a:prstGeom prst="rect">
+            <a:avLst/>
+          </a:prstGeom>
+          <a:noFill/>
+          <a:ln/>
+        </p:spPr>
+        <p:txBody>
+          <a:bodyPr wrap="square" lIns="0" tIns="0" rIns="0" bIns="0" rtlCol="0" anchor="t"/>
+          <a:lstStyle/>
+          <a:p>
+            <a:pPr marL="0" indent="0" algn="ctr">
+              <a:buNone/>
+            </a:pPr>
+            <a:r>
+              <a:rPr lang="en-US" sz="1350" b="1" dirty="0">
+                <a:solidFill>
+                  <a:srgbClr val="071B26"/>
+                </a:solidFill>
+                <a:latin typeface="Arial" pitchFamily="34" charset="0"/>
+                <a:ea typeface="Arial" pitchFamily="34" charset="-122"/>
+                <a:cs typeface="Arial" pitchFamily="34" charset="-120"/>
+              </a:rPr>
+              <a:t>속도 탐색</a:t>
+            </a:r>
+            <a:endParaRPr lang="en-US" sz="1350" dirty="0"/>
+          </a:p>
+          <a:p>
+            <a:pPr marL="0" indent="0" algn="ctr">
+              <a:buNone/>
+            </a:pPr>
+            <a:r>
+              <a:rPr lang="en-US" sz="1350" b="1" dirty="0">
+                <a:solidFill>
+                  <a:srgbClr val="071B26"/>
+                </a:solidFill>
+                <a:latin typeface="Arial" pitchFamily="34" charset="0"/>
+                <a:ea typeface="Arial" pitchFamily="34" charset="-122"/>
+                <a:cs typeface="Arial" pitchFamily="34" charset="-120"/>
+              </a:rPr>
+              <a:t>20~130 km/h</a:t>
+            </a:r>
+            <a:endParaRPr lang="en-US" sz="1350" dirty="0"/>
+          </a:p>
+        </p:txBody>
+      </p:sp>
+      <p:sp>
+        <p:nvSpPr>
+          <p:cNvPr id="22" name="Shape 20"/>
+          <p:cNvSpPr/>
+          <p:nvPr/>
+        </p:nvSpPr>
+        <p:spPr>
+          <a:xfrm>
+            <a:off x="9305692" y="2952750"/>
+            <a:ext cx="523862" cy="19050"/>
+          </a:xfrm>
+          <a:prstGeom prst="rect">
+            <a:avLst/>
+          </a:prstGeom>
+          <a:solidFill>
+            <a:srgbClr val="87989F"/>
+          </a:solidFill>
+          <a:ln w="12700">
+            <a:solidFill>
+              <a:srgbClr val="FFFFFF">
+                <a:alpha val="0"/>
+              </a:srgbClr>
+            </a:solidFill>
+            <a:prstDash val="solid"/>
+          </a:ln>
+        </p:spPr>
+        <p:txBody>
+          <a:bodyPr/>
+          <a:lstStyle/>
+          <a:p>
+            <a:endParaRPr lang="ko-KR" altLang="en-US"/>
+          </a:p>
+        </p:txBody>
+      </p:sp>
+      <p:sp>
+        <p:nvSpPr>
+          <p:cNvPr id="23" name="Shape 21"/>
+          <p:cNvSpPr/>
+          <p:nvPr/>
+        </p:nvSpPr>
+        <p:spPr>
+          <a:xfrm>
+            <a:off x="9867653" y="2305050"/>
+            <a:ext cx="1714457" cy="1381125"/>
+          </a:xfrm>
+          <a:prstGeom prst="rect">
+            <a:avLst/>
+          </a:prstGeom>
+          <a:solidFill>
+            <a:srgbClr val="102832"/>
+          </a:solidFill>
+          <a:ln w="12700">
+            <a:solidFill>
+              <a:srgbClr val="FFFFFF">
+                <a:alpha val="0"/>
+              </a:srgbClr>
+            </a:solidFill>
+            <a:prstDash val="solid"/>
+          </a:ln>
+        </p:spPr>
+        <p:txBody>
+          <a:bodyPr/>
+          <a:lstStyle/>
+          <a:p>
+            <a:endParaRPr lang="ko-KR" altLang="en-US"/>
+          </a:p>
+        </p:txBody>
+      </p:sp>
+      <p:sp>
+        <p:nvSpPr>
+          <p:cNvPr id="24" name="Shape 22"/>
+          <p:cNvSpPr/>
+          <p:nvPr/>
+        </p:nvSpPr>
+        <p:spPr>
+          <a:xfrm>
+            <a:off x="9867653" y="2338388"/>
+            <a:ext cx="1714457" cy="0"/>
+          </a:xfrm>
+          <a:prstGeom prst="line">
+            <a:avLst/>
+          </a:prstGeom>
+          <a:solidFill>
+            <a:srgbClr val="FFFFFF">
+              <a:alpha val="0"/>
+            </a:srgbClr>
+          </a:solidFill>
+          <a:ln w="66675">
+            <a:solidFill>
+              <a:srgbClr val="21D6B0"/>
+            </a:solidFill>
+            <a:prstDash val="solid"/>
+          </a:ln>
+        </p:spPr>
+      </p:sp>
+      <p:sp>
+        <p:nvSpPr>
+          <p:cNvPr id="25" name="Text 23"/>
+          <p:cNvSpPr/>
+          <p:nvPr/>
+        </p:nvSpPr>
+        <p:spPr>
+          <a:xfrm>
+            <a:off x="9981950" y="2800350"/>
+            <a:ext cx="1485863" cy="628650"/>
+          </a:xfrm>
+          <a:prstGeom prst="rect">
+            <a:avLst/>
+          </a:prstGeom>
+          <a:noFill/>
+          <a:ln/>
+        </p:spPr>
+        <p:txBody>
+          <a:bodyPr wrap="square" lIns="0" tIns="0" rIns="0" bIns="0" rtlCol="0" anchor="t"/>
+          <a:lstStyle/>
+          <a:p>
+            <a:pPr marL="0" indent="0" algn="ctr">
+              <a:buNone/>
+            </a:pPr>
+            <a:r>
+              <a:rPr lang="en-US" sz="1350" b="1" dirty="0">
                 <a:solidFill>
                   <a:srgbClr val="FFFFFF"/>
                 </a:solidFill>
-                <a:latin typeface="Malgun Gothic" pitchFamily="34" charset="0"/>
-                <a:ea typeface="Malgun Gothic" pitchFamily="34" charset="-122"/>
-                <a:cs typeface="Malgun Gothic" pitchFamily="34" charset="-120"/>
+                <a:latin typeface="Arial" pitchFamily="34" charset="0"/>
+                <a:ea typeface="Arial" pitchFamily="34" charset="-122"/>
+                <a:cs typeface="Arial" pitchFamily="34" charset="-120"/>
+              </a:rPr>
+              <a:t>모드별</a:t>
+            </a:r>
+            <a:endParaRPr lang="en-US" sz="1350" dirty="0"/>
+          </a:p>
+          <a:p>
+            <a:pPr marL="0" indent="0" algn="ctr">
+              <a:buNone/>
+            </a:pPr>
+            <a:r>
+              <a:rPr lang="en-US" sz="1350" b="1" dirty="0">
+                <a:solidFill>
+                  <a:srgbClr val="FFFFFF"/>
+                </a:solidFill>
+                <a:latin typeface="Arial" pitchFamily="34" charset="0"/>
+                <a:ea typeface="Arial" pitchFamily="34" charset="-122"/>
+                <a:cs typeface="Arial" pitchFamily="34" charset="-120"/>
+              </a:rPr>
+              <a:t>추천 속도</a:t>
+            </a:r>
+            <a:endParaRPr lang="en-US" sz="1350" dirty="0"/>
+          </a:p>
+        </p:txBody>
+      </p:sp>
+      <p:sp>
+        <p:nvSpPr>
+          <p:cNvPr id="26" name="Shape 24"/>
+          <p:cNvSpPr/>
+          <p:nvPr/>
+        </p:nvSpPr>
+        <p:spPr>
+          <a:xfrm>
+            <a:off x="952476" y="4533900"/>
+            <a:ext cx="4762381" cy="781050"/>
+          </a:xfrm>
+          <a:prstGeom prst="rect">
+            <a:avLst/>
+          </a:prstGeom>
+          <a:solidFill>
+            <a:srgbClr val="FFFFFF"/>
+          </a:solidFill>
+          <a:ln w="19050">
+            <a:solidFill>
+              <a:srgbClr val="D4DFDF"/>
+            </a:solidFill>
+            <a:prstDash val="solid"/>
+          </a:ln>
+        </p:spPr>
+        <p:txBody>
+          <a:bodyPr/>
+          <a:lstStyle/>
+          <a:p>
+            <a:endParaRPr lang="ko-KR" altLang="en-US"/>
+          </a:p>
+        </p:txBody>
+      </p:sp>
+      <p:sp>
+        <p:nvSpPr>
+          <p:cNvPr id="27" name="Text 25"/>
+          <p:cNvSpPr/>
+          <p:nvPr/>
+        </p:nvSpPr>
+        <p:spPr>
+          <a:xfrm>
+            <a:off x="1142971" y="4705350"/>
+            <a:ext cx="4419490" cy="495300"/>
+          </a:xfrm>
+          <a:prstGeom prst="rect">
+            <a:avLst/>
+          </a:prstGeom>
+          <a:noFill/>
+          <a:ln/>
+        </p:spPr>
+        <p:txBody>
+          <a:bodyPr wrap="square" lIns="0" tIns="0" rIns="0" bIns="0" rtlCol="0" anchor="t"/>
+          <a:lstStyle/>
+          <a:p>
+            <a:pPr marL="0" indent="0" algn="ctr">
+              <a:buNone/>
+            </a:pPr>
+            <a:r>
+              <a:rPr lang="en-US" sz="1300" b="1" dirty="0">
+                <a:solidFill>
+                  <a:srgbClr val="071B26"/>
+                </a:solidFill>
+                <a:latin typeface="Arial" pitchFamily="34" charset="0"/>
+                <a:ea typeface="Arial" pitchFamily="34" charset="-122"/>
+                <a:cs typeface="Arial" pitchFamily="34" charset="-120"/>
+              </a:rPr>
+              <a:t>Total Energy = Predicted Consumption × Distance / 100</a:t>
+            </a:r>
+            <a:endParaRPr lang="en-US" sz="1300" dirty="0"/>
+          </a:p>
+        </p:txBody>
+      </p:sp>
+      <p:sp>
+        <p:nvSpPr>
+          <p:cNvPr id="28" name="Shape 26"/>
+          <p:cNvSpPr/>
+          <p:nvPr/>
+        </p:nvSpPr>
+        <p:spPr>
+          <a:xfrm>
+            <a:off x="6476838" y="4533900"/>
+            <a:ext cx="4762381" cy="781050"/>
+          </a:xfrm>
+          <a:prstGeom prst="rect">
+            <a:avLst/>
+          </a:prstGeom>
+          <a:solidFill>
+            <a:srgbClr val="FFFFFF"/>
+          </a:solidFill>
+          <a:ln w="19050">
+            <a:solidFill>
+              <a:srgbClr val="D4DFDF"/>
+            </a:solidFill>
+            <a:prstDash val="solid"/>
+          </a:ln>
+        </p:spPr>
+        <p:txBody>
+          <a:bodyPr/>
+          <a:lstStyle/>
+          <a:p>
+            <a:endParaRPr lang="ko-KR" altLang="en-US"/>
+          </a:p>
+        </p:txBody>
+      </p:sp>
+      <p:sp>
+        <p:nvSpPr>
+          <p:cNvPr id="29" name="Text 27"/>
+          <p:cNvSpPr/>
+          <p:nvPr/>
+        </p:nvSpPr>
+        <p:spPr>
+          <a:xfrm>
+            <a:off x="6667333" y="4705350"/>
+            <a:ext cx="4419490" cy="495300"/>
+          </a:xfrm>
+          <a:prstGeom prst="rect">
+            <a:avLst/>
+          </a:prstGeom>
+          <a:noFill/>
+          <a:ln/>
+        </p:spPr>
+        <p:txBody>
+          <a:bodyPr wrap="square" lIns="0" tIns="0" rIns="0" bIns="0" rtlCol="0" anchor="t"/>
+          <a:lstStyle/>
+          <a:p>
+            <a:pPr marL="0" indent="0" algn="ctr">
+              <a:buNone/>
+            </a:pPr>
+            <a:r>
+              <a:rPr lang="en-US" sz="1300" b="1" dirty="0">
+                <a:solidFill>
+                  <a:srgbClr val="071B26"/>
+                </a:solidFill>
+                <a:latin typeface="Arial" pitchFamily="34" charset="0"/>
+                <a:ea typeface="Arial" pitchFamily="34" charset="-122"/>
+                <a:cs typeface="Arial" pitchFamily="34" charset="-120"/>
               </a:rPr>
               <a:t>Travel Time = Distance / Speed</a:t>
             </a:r>
-            <a:endParaRPr lang="en-US" sz="1750" dirty="0"/>
-          </a:p>
-        </p:txBody>
-      </p:sp>
-      <p:sp>
-        <p:nvSpPr>
-          <p:cNvPr id="31" name="Text 29"/>
-          <p:cNvSpPr/>
-          <p:nvPr/>
-        </p:nvSpPr>
-        <p:spPr>
-          <a:xfrm>
-            <a:off x="647684" y="6153150"/>
-            <a:ext cx="10896328" cy="228600"/>
+            <a:endParaRPr lang="en-US" sz="1300" dirty="0"/>
+          </a:p>
+        </p:txBody>
+      </p:sp>
+      <p:sp>
+        <p:nvSpPr>
+          <p:cNvPr id="30" name="Text 28"/>
+          <p:cNvSpPr/>
+          <p:nvPr/>
+        </p:nvSpPr>
+        <p:spPr>
+          <a:xfrm>
+            <a:off x="11258269" y="6496050"/>
+            <a:ext cx="285743" cy="171450"/>
           </a:xfrm>
           <a:prstGeom prst="rect">
             <a:avLst/>
@@ -10706,56 +10138,17 @@
           <a:bodyPr wrap="square" lIns="0" tIns="0" rIns="0" bIns="0" rtlCol="0" anchor="t"/>
           <a:lstStyle/>
           <a:p>
-            <a:pPr marL="0" indent="0" algn="l">
-              <a:buNone/>
-            </a:pPr>
-            <a:r>
-              <a:rPr lang="en-US" sz="1350" dirty="0">
-                <a:solidFill>
-                  <a:srgbClr val="4D625C"/>
-                </a:solidFill>
-                <a:latin typeface="Malgun Gothic" pitchFamily="34" charset="0"/>
-                <a:ea typeface="Malgun Gothic" pitchFamily="34" charset="-122"/>
-                <a:cs typeface="Malgun Gothic" pitchFamily="34" charset="-120"/>
-              </a:rPr>
-              <a:t>모델은 ‘최적 속도’를 직접 예측하지 않고, 속도별 소비량을 제공하는 평가 함수 역할을 한다.</a:t>
-            </a:r>
-            <a:endParaRPr lang="en-US" sz="1350" dirty="0"/>
-          </a:p>
-        </p:txBody>
-      </p:sp>
-      <p:sp>
-        <p:nvSpPr>
-          <p:cNvPr id="32" name="Text 30"/>
-          <p:cNvSpPr/>
-          <p:nvPr/>
-        </p:nvSpPr>
-        <p:spPr>
-          <a:xfrm>
-            <a:off x="11397122" y="6457950"/>
-            <a:ext cx="146890" cy="171450"/>
-          </a:xfrm>
-          <a:prstGeom prst="rect">
-            <a:avLst/>
-          </a:prstGeom>
-          <a:noFill/>
-          <a:ln/>
-        </p:spPr>
-        <p:txBody>
-          <a:bodyPr wrap="square" lIns="0" tIns="0" rIns="0" bIns="0" rtlCol="0" anchor="t"/>
-          <a:lstStyle/>
-          <a:p>
-            <a:pPr marL="0" indent="0" algn="l">
+            <a:pPr marL="0" indent="0" algn="r">
               <a:buNone/>
             </a:pPr>
             <a:r>
               <a:rPr lang="en-US" sz="1050" dirty="0">
                 <a:solidFill>
-                  <a:srgbClr val="8B9A96"/>
+                  <a:srgbClr val="748B93"/>
                 </a:solidFill>
-                <a:latin typeface="Malgun Gothic" pitchFamily="34" charset="0"/>
-                <a:ea typeface="Malgun Gothic" pitchFamily="34" charset="-122"/>
-                <a:cs typeface="Malgun Gothic" pitchFamily="34" charset="-120"/>
+                <a:latin typeface="Arial" pitchFamily="34" charset="0"/>
+                <a:ea typeface="Arial" pitchFamily="34" charset="-122"/>
+                <a:cs typeface="Arial" pitchFamily="34" charset="-120"/>
               </a:rPr>
               <a:t>06</a:t>
             </a:r>
@@ -10766,7 +10159,7 @@
     </p:spTree>
     <p:extLst>
       <p:ext uri="{BB962C8B-B14F-4D97-AF65-F5344CB8AC3E}">
-        <p14:creationId xmlns:p14="http://schemas.microsoft.com/office/powerpoint/2010/main" val="757387402"/>
+        <p14:creationId xmlns:p14="http://schemas.microsoft.com/office/powerpoint/2010/main" val="2910039948"/>
       </p:ext>
     </p:extLst>
   </p:cSld>
@@ -10939,8 +10332,8 @@
           </a:p>
         </p:txBody>
       </p:sp>
-      <mc:AlternateContent xmlns:mc="http://schemas.openxmlformats.org/markup-compatibility/2006">
-        <mc:Choice xmlns:a14="http://schemas.microsoft.com/office/drawing/2010/main" Requires="a14">
+      <mc:AlternateContent xmlns:mc="http://schemas.openxmlformats.org/markup-compatibility/2006" xmlns:a14="http://schemas.microsoft.com/office/drawing/2010/main">
+        <mc:Choice Requires="a14">
           <p:sp>
             <p:nvSpPr>
               <p:cNvPr id="6" name="Text 4"/>
@@ -11083,7 +10476,7 @@
             </p:txBody>
           </p:sp>
         </mc:Choice>
-        <mc:Fallback>
+        <mc:Fallback xmlns="">
           <p:sp>
             <p:nvSpPr>
               <p:cNvPr id="6" name="Text 4"/>
@@ -12488,7 +11881,7 @@
         <p:spPr>
           <a:xfrm>
             <a:off x="939800" y="5105400"/>
-            <a:ext cx="4800600" cy="1117600"/>
+            <a:ext cx="4800600" cy="738664"/>
           </a:xfrm>
           <a:prstGeom prst="rect">
             <a:avLst/>
@@ -12501,31 +11894,24 @@
           </a:bodyPr>
           <a:lstStyle/>
           <a:p>
-            <a:pPr algn="l"/>
+            <a:pPr marL="285750" indent="-285750" algn="l">
+              <a:buFont typeface="Arial" panose="020B0604020202020204" pitchFamily="34" charset="0"/>
+              <a:buChar char="•"/>
+            </a:pPr>
             <a:r>
-              <a:rPr lang="en-US" altLang="ko-KR" sz="1400">
+              <a:rPr lang="ko-KR" altLang="en-US" sz="1400" dirty="0">
                 <a:solidFill>
                   <a:srgbClr val="C8D8D3"/>
                 </a:solidFill>
                 <a:latin typeface="Malgun Gothic"/>
                 <a:ea typeface="Malgun Gothic"/>
               </a:rPr>
-              <a:t>Slider </a:t>
-            </a:r>
-            <a:r>
-              <a:rPr lang="ko-KR" altLang="en-US" sz="1400">
-                <a:solidFill>
-                  <a:srgbClr val="C8D8D3"/>
-                </a:solidFill>
-                <a:latin typeface="Malgun Gothic"/>
-                <a:ea typeface="Malgun Gothic"/>
-              </a:rPr>
-              <a:t>기반 주요 조건 설정
+              <a:t>주요 조건 설정
 학습 데이터 중앙값을 기본값으로 적용
 </a:t>
             </a:r>
             <a:r>
-              <a:rPr lang="en-US" altLang="ko-KR" sz="1400">
+              <a:rPr lang="en-US" altLang="ko-KR" sz="1400" dirty="0">
                 <a:solidFill>
                   <a:srgbClr val="C8D8D3"/>
                 </a:solidFill>
@@ -12535,7 +11921,7 @@
               <a:t>Advanced Settings</a:t>
             </a:r>
             <a:r>
-              <a:rPr lang="ko-KR" altLang="en-US" sz="1400">
+              <a:rPr lang="ko-KR" altLang="en-US" sz="1400" dirty="0">
                 <a:solidFill>
                   <a:srgbClr val="C8D8D3"/>
                 </a:solidFill>
@@ -12592,24 +11978,17 @@
             <a:avLst/>
           </a:prstGeom>
           <a:solidFill>
-            <a:srgbClr val="07151D"/>
-          </a:solidFill>
-          <a:ln w="12700">
-            <a:solidFill>
-              <a:srgbClr val="FFFFFF">
-                <a:alpha val="0"/>
-              </a:srgbClr>
-            </a:solidFill>
-            <a:prstDash val="solid"/>
-          </a:ln>
-        </p:spPr>
-        <p:txBody>
-          <a:bodyPr/>
-          <a:lstStyle/>
-          <a:p>
-            <a:endParaRPr lang="ko-KR" altLang="en-US"/>
-          </a:p>
-        </p:txBody>
+            <a:srgbClr val="F7F9F9"/>
+          </a:solidFill>
+          <a:ln w="12700">
+            <a:solidFill>
+              <a:srgbClr val="FFFFFF">
+                <a:alpha val="0"/>
+              </a:srgbClr>
+            </a:solidFill>
+            <a:prstDash val="solid"/>
+          </a:ln>
+        </p:spPr>
       </p:sp>
       <p:sp>
         <p:nvSpPr>
@@ -12620,7 +11999,7 @@
         <p:spPr>
           <a:xfrm>
             <a:off x="647684" y="419100"/>
-            <a:ext cx="2315261" cy="171450"/>
+            <a:ext cx="2567221" cy="200025"/>
           </a:xfrm>
           <a:prstGeom prst="rect">
             <a:avLst/>
@@ -12636,17 +12015,17 @@
               <a:buNone/>
             </a:pPr>
             <a:r>
-              <a:rPr lang="en-US" sz="1050" b="1">
+              <a:rPr lang="en-US" sz="1350" b="1" dirty="0">
                 <a:solidFill>
-                  <a:srgbClr val="54E1B5"/>
+                  <a:srgbClr val="00A982"/>
                 </a:solidFill>
-                <a:latin typeface="Malgun Gothic" pitchFamily="34" charset="0"/>
-                <a:ea typeface="Malgun Gothic" pitchFamily="34" charset="-122"/>
-                <a:cs typeface="Malgun Gothic" pitchFamily="34" charset="-120"/>
+                <a:latin typeface="Arial" pitchFamily="34" charset="0"/>
+                <a:ea typeface="Arial" pitchFamily="34" charset="-122"/>
+                <a:cs typeface="Arial" pitchFamily="34" charset="-120"/>
               </a:rPr>
               <a:t>08 · LIMITATIONS &amp; ROADMAP</a:t>
             </a:r>
-            <a:endParaRPr lang="en-US" sz="1050" dirty="0"/>
+            <a:endParaRPr lang="en-US" sz="1350" dirty="0"/>
           </a:p>
         </p:txBody>
       </p:sp>
@@ -12658,8 +12037,8 @@
         </p:nvSpPr>
         <p:spPr>
           <a:xfrm>
-            <a:off x="647684" y="704850"/>
-            <a:ext cx="10667733" cy="457200"/>
+            <a:off x="647684" y="723900"/>
+            <a:ext cx="10715357" cy="476250"/>
           </a:xfrm>
           <a:prstGeom prst="rect">
             <a:avLst/>
@@ -12675,64 +12054,84 @@
               <a:buNone/>
             </a:pPr>
             <a:r>
-              <a:rPr lang="ko-KR" altLang="en-US" sz="2700" b="1">
+              <a:rPr lang="en-US" sz="3000" b="1" dirty="0">
                 <a:solidFill>
-                  <a:srgbClr val="F3FBF8"/>
+                  <a:srgbClr val="071B26"/>
                 </a:solidFill>
-                <a:latin typeface="Malgun Gothic" pitchFamily="34" charset="0"/>
-                <a:ea typeface="Malgun Gothic" pitchFamily="34" charset="-122"/>
-                <a:cs typeface="Malgun Gothic" pitchFamily="34" charset="-120"/>
+                <a:latin typeface="Arial" pitchFamily="34" charset="0"/>
+                <a:ea typeface="Arial" pitchFamily="34" charset="-122"/>
+                <a:cs typeface="Arial" pitchFamily="34" charset="-120"/>
               </a:rPr>
-              <a:t>실제 데이터와 경로 정보를 결합해 서비스로 확장한다</a:t>
+              <a:t>현재 한계를 보완하면 구간별 속도 추천으로 확장할 수 있다</a:t>
             </a:r>
-            <a:endParaRPr lang="en-US" sz="2700" dirty="0"/>
-          </a:p>
-        </p:txBody>
-      </p:sp>
-      <p:sp>
-        <p:nvSpPr>
-          <p:cNvPr id="19" name="Shape 17"/>
-          <p:cNvSpPr/>
-          <p:nvPr/>
-        </p:nvSpPr>
-        <p:spPr>
-          <a:xfrm>
-            <a:off x="1041400" y="1600200"/>
-            <a:ext cx="38099" cy="4127500"/>
-          </a:xfrm>
-          <a:prstGeom prst="rect">
-            <a:avLst/>
-          </a:prstGeom>
-          <a:solidFill>
-            <a:srgbClr val="2D5A51"/>
-          </a:solidFill>
-          <a:ln w="12700">
-            <a:solidFill>
-              <a:srgbClr val="FFFFFF">
-                <a:alpha val="0"/>
-              </a:srgbClr>
-            </a:solidFill>
-            <a:prstDash val="solid"/>
-          </a:ln>
-        </p:spPr>
-        <p:txBody>
-          <a:bodyPr/>
-          <a:lstStyle/>
-          <a:p>
-            <a:endParaRPr lang="ko-KR" altLang="en-US"/>
-          </a:p>
-        </p:txBody>
-      </p:sp>
-      <p:sp>
-        <p:nvSpPr>
-          <p:cNvPr id="20" name="Text 18"/>
-          <p:cNvSpPr/>
-          <p:nvPr/>
-        </p:nvSpPr>
-        <p:spPr>
-          <a:xfrm>
-            <a:off x="1498600" y="1600200"/>
-            <a:ext cx="5461000" cy="257175"/>
+            <a:endParaRPr lang="en-US" sz="3000" dirty="0"/>
+          </a:p>
+        </p:txBody>
+      </p:sp>
+      <p:sp>
+        <p:nvSpPr>
+          <p:cNvPr id="5" name="Shape 3"/>
+          <p:cNvSpPr/>
+          <p:nvPr/>
+        </p:nvSpPr>
+        <p:spPr>
+          <a:xfrm>
+            <a:off x="647684" y="1323975"/>
+            <a:ext cx="10896328" cy="19050"/>
+          </a:xfrm>
+          <a:prstGeom prst="rect">
+            <a:avLst/>
+          </a:prstGeom>
+          <a:solidFill>
+            <a:srgbClr val="DCE5E4"/>
+          </a:solidFill>
+          <a:ln w="12700">
+            <a:solidFill>
+              <a:srgbClr val="FFFFFF">
+                <a:alpha val="0"/>
+              </a:srgbClr>
+            </a:solidFill>
+            <a:prstDash val="solid"/>
+          </a:ln>
+        </p:spPr>
+      </p:sp>
+      <p:sp>
+        <p:nvSpPr>
+          <p:cNvPr id="6" name="Shape 4"/>
+          <p:cNvSpPr/>
+          <p:nvPr/>
+        </p:nvSpPr>
+        <p:spPr>
+          <a:xfrm>
+            <a:off x="647684" y="1619250"/>
+            <a:ext cx="5219570" cy="4000500"/>
+          </a:xfrm>
+          <a:prstGeom prst="rect">
+            <a:avLst/>
+          </a:prstGeom>
+          <a:solidFill>
+            <a:srgbClr val="EEF2F1"/>
+          </a:solidFill>
+          <a:ln w="12700">
+            <a:solidFill>
+              <a:srgbClr val="FFFFFF">
+                <a:alpha val="0"/>
+              </a:srgbClr>
+            </a:solidFill>
+            <a:prstDash val="solid"/>
+          </a:ln>
+        </p:spPr>
+      </p:sp>
+      <p:sp>
+        <p:nvSpPr>
+          <p:cNvPr id="7" name="Text 5"/>
+          <p:cNvSpPr/>
+          <p:nvPr/>
+        </p:nvSpPr>
+        <p:spPr>
+          <a:xfrm>
+            <a:off x="971526" y="1905000"/>
+            <a:ext cx="1155770" cy="381000"/>
           </a:xfrm>
           <a:prstGeom prst="rect">
             <a:avLst/>
@@ -12748,30 +12147,30 @@
               <a:buNone/>
             </a:pPr>
             <a:r>
-              <a:rPr lang="en-US" sz="1500" b="1" dirty="0">
+              <a:rPr lang="en-US" sz="2100" b="1" dirty="0">
                 <a:solidFill>
-                  <a:srgbClr val="FFFFFF"/>
+                  <a:srgbClr val="FF5148"/>
                 </a:solidFill>
-                <a:latin typeface="Malgun Gothic" pitchFamily="34" charset="0"/>
-                <a:ea typeface="Malgun Gothic" pitchFamily="34" charset="-122"/>
-                <a:cs typeface="Malgun Gothic" pitchFamily="34" charset="-120"/>
+                <a:latin typeface="Arial" pitchFamily="34" charset="0"/>
+                <a:ea typeface="Arial" pitchFamily="34" charset="-122"/>
+                <a:cs typeface="Arial" pitchFamily="34" charset="-120"/>
               </a:rPr>
-              <a:t>1 · 실제 EV 데이터 검증</a:t>
+              <a:t>현재 한계</a:t>
             </a:r>
-            <a:endParaRPr lang="en-US" sz="1500" dirty="0"/>
-          </a:p>
-        </p:txBody>
-      </p:sp>
-      <p:sp>
-        <p:nvSpPr>
-          <p:cNvPr id="21" name="Text 19"/>
-          <p:cNvSpPr/>
-          <p:nvPr/>
-        </p:nvSpPr>
-        <p:spPr>
-          <a:xfrm>
-            <a:off x="1498600" y="1905000"/>
-            <a:ext cx="5461000" cy="200025"/>
+            <a:endParaRPr lang="en-US" sz="2100" dirty="0"/>
+          </a:p>
+        </p:txBody>
+      </p:sp>
+      <p:sp>
+        <p:nvSpPr>
+          <p:cNvPr id="8" name="Text 6"/>
+          <p:cNvSpPr/>
+          <p:nvPr/>
+        </p:nvSpPr>
+        <p:spPr>
+          <a:xfrm>
+            <a:off x="971526" y="2647950"/>
+            <a:ext cx="4514737" cy="253901"/>
           </a:xfrm>
           <a:prstGeom prst="rect">
             <a:avLst/>
@@ -12787,342 +12186,30 @@
               <a:buNone/>
             </a:pPr>
             <a:r>
-              <a:rPr lang="en-US" sz="1150" dirty="0">
+              <a:rPr lang="en-US" sz="1600" b="1" dirty="0">
                 <a:solidFill>
-                  <a:srgbClr val="AAC4BD"/>
+                  <a:srgbClr val="071B26"/>
                 </a:solidFill>
-                <a:latin typeface="Malgun Gothic" pitchFamily="34" charset="0"/>
-                <a:ea typeface="Malgun Gothic" pitchFamily="34" charset="-122"/>
-                <a:cs typeface="Malgun Gothic" pitchFamily="34" charset="-120"/>
+                <a:latin typeface="Arial" pitchFamily="34" charset="0"/>
+                <a:ea typeface="Arial" pitchFamily="34" charset="-122"/>
+                <a:cs typeface="Arial" pitchFamily="34" charset="-120"/>
               </a:rPr>
-              <a:t>차량 센서 기반 일반화 성능 확인</a:t>
+              <a:t>데이터 한계</a:t>
             </a:r>
-            <a:endParaRPr lang="en-US" sz="1150" dirty="0"/>
-          </a:p>
-        </p:txBody>
-      </p:sp>
-      <p:sp>
-        <p:nvSpPr>
-          <p:cNvPr id="22" name="Text 20"/>
-          <p:cNvSpPr/>
-          <p:nvPr/>
-        </p:nvSpPr>
-        <p:spPr>
-          <a:xfrm>
-            <a:off x="1498600" y="2413000"/>
-            <a:ext cx="5461000" cy="257175"/>
-          </a:xfrm>
-          <a:prstGeom prst="rect">
-            <a:avLst/>
-          </a:prstGeom>
-          <a:noFill/>
-          <a:ln/>
-        </p:spPr>
-        <p:txBody>
-          <a:bodyPr wrap="square" lIns="0" tIns="0" rIns="0" bIns="0" rtlCol="0" anchor="t"/>
-          <a:lstStyle/>
-          <a:p>
-            <a:pPr marL="0" indent="0" algn="l">
-              <a:buNone/>
-            </a:pPr>
-            <a:r>
-              <a:rPr lang="en-US" sz="1500" b="1" dirty="0">
-                <a:solidFill>
-                  <a:srgbClr val="FFFFFF"/>
-                </a:solidFill>
-                <a:latin typeface="Malgun Gothic" pitchFamily="34" charset="0"/>
-                <a:ea typeface="Malgun Gothic" pitchFamily="34" charset="-122"/>
-                <a:cs typeface="Malgun Gothic" pitchFamily="34" charset="-120"/>
-              </a:rPr>
-              <a:t>2 · 지도·고도·날씨 API 결합</a:t>
-            </a:r>
-            <a:endParaRPr lang="en-US" sz="1500" dirty="0"/>
-          </a:p>
-        </p:txBody>
-      </p:sp>
-      <p:sp>
-        <p:nvSpPr>
-          <p:cNvPr id="23" name="Text 21"/>
-          <p:cNvSpPr/>
-          <p:nvPr/>
-        </p:nvSpPr>
-        <p:spPr>
-          <a:xfrm>
-            <a:off x="1498600" y="2717800"/>
-            <a:ext cx="5461000" cy="200025"/>
-          </a:xfrm>
-          <a:prstGeom prst="rect">
-            <a:avLst/>
-          </a:prstGeom>
-          <a:noFill/>
-          <a:ln/>
-        </p:spPr>
-        <p:txBody>
-          <a:bodyPr wrap="square" lIns="0" tIns="0" rIns="0" bIns="0" rtlCol="0" anchor="t"/>
-          <a:lstStyle/>
-          <a:p>
-            <a:pPr marL="0" indent="0" algn="l">
-              <a:buNone/>
-            </a:pPr>
-            <a:r>
-              <a:rPr lang="en-US" sz="1150" dirty="0">
-                <a:solidFill>
-                  <a:srgbClr val="AAC4BD"/>
-                </a:solidFill>
-                <a:latin typeface="Malgun Gothic" pitchFamily="34" charset="0"/>
-                <a:ea typeface="Malgun Gothic" pitchFamily="34" charset="-122"/>
-                <a:cs typeface="Malgun Gothic" pitchFamily="34" charset="-120"/>
-              </a:rPr>
-              <a:t>구간별 경사와 외기 온도 자동 반영</a:t>
-            </a:r>
-            <a:endParaRPr lang="en-US" sz="1150" dirty="0"/>
-          </a:p>
-        </p:txBody>
-      </p:sp>
-      <p:sp>
-        <p:nvSpPr>
-          <p:cNvPr id="24" name="Text 22"/>
-          <p:cNvSpPr/>
-          <p:nvPr/>
-        </p:nvSpPr>
-        <p:spPr>
-          <a:xfrm>
-            <a:off x="1498600" y="3225800"/>
-            <a:ext cx="5461000" cy="257175"/>
-          </a:xfrm>
-          <a:prstGeom prst="rect">
-            <a:avLst/>
-          </a:prstGeom>
-          <a:noFill/>
-          <a:ln/>
-        </p:spPr>
-        <p:txBody>
-          <a:bodyPr wrap="square" lIns="0" tIns="0" rIns="0" bIns="0" rtlCol="0" anchor="t"/>
-          <a:lstStyle/>
-          <a:p>
-            <a:pPr marL="0" indent="0" algn="l">
-              <a:buNone/>
-            </a:pPr>
-            <a:r>
-              <a:rPr lang="en-US" sz="1500" b="1" dirty="0">
-                <a:solidFill>
-                  <a:srgbClr val="FFFFFF"/>
-                </a:solidFill>
-                <a:latin typeface="Malgun Gothic" pitchFamily="34" charset="0"/>
-                <a:ea typeface="Malgun Gothic" pitchFamily="34" charset="-122"/>
-                <a:cs typeface="Malgun Gothic" pitchFamily="34" charset="-120"/>
-              </a:rPr>
-              <a:t>3 · 차량별 물리 특성 반영</a:t>
-            </a:r>
-            <a:endParaRPr lang="en-US" sz="1500" dirty="0"/>
-          </a:p>
-        </p:txBody>
-      </p:sp>
-      <p:sp>
-        <p:nvSpPr>
-          <p:cNvPr id="25" name="Text 23"/>
-          <p:cNvSpPr/>
-          <p:nvPr/>
-        </p:nvSpPr>
-        <p:spPr>
-          <a:xfrm>
-            <a:off x="1498600" y="3530600"/>
-            <a:ext cx="5461000" cy="200025"/>
-          </a:xfrm>
-          <a:prstGeom prst="rect">
-            <a:avLst/>
-          </a:prstGeom>
-          <a:noFill/>
-          <a:ln/>
-        </p:spPr>
-        <p:txBody>
-          <a:bodyPr wrap="square" lIns="0" tIns="0" rIns="0" bIns="0" rtlCol="0" anchor="t"/>
-          <a:lstStyle/>
-          <a:p>
-            <a:pPr marL="0" indent="0" algn="l">
-              <a:buNone/>
-            </a:pPr>
-            <a:r>
-              <a:rPr lang="en-US" sz="1150" dirty="0">
-                <a:solidFill>
-                  <a:srgbClr val="AAC4BD"/>
-                </a:solidFill>
-                <a:latin typeface="Malgun Gothic" pitchFamily="34" charset="0"/>
-                <a:ea typeface="Malgun Gothic" pitchFamily="34" charset="-122"/>
-                <a:cs typeface="Malgun Gothic" pitchFamily="34" charset="-120"/>
-              </a:rPr>
-              <a:t>배터리·공기저항·타이어 특성 개인화</a:t>
-            </a:r>
-            <a:endParaRPr lang="en-US" sz="1150" dirty="0"/>
-          </a:p>
-        </p:txBody>
-      </p:sp>
-      <p:sp>
-        <p:nvSpPr>
-          <p:cNvPr id="26" name="Text 24"/>
-          <p:cNvSpPr/>
-          <p:nvPr/>
-        </p:nvSpPr>
-        <p:spPr>
-          <a:xfrm>
-            <a:off x="1498600" y="4038600"/>
-            <a:ext cx="5461000" cy="257175"/>
-          </a:xfrm>
-          <a:prstGeom prst="rect">
-            <a:avLst/>
-          </a:prstGeom>
-          <a:noFill/>
-          <a:ln/>
-        </p:spPr>
-        <p:txBody>
-          <a:bodyPr wrap="square" lIns="0" tIns="0" rIns="0" bIns="0" rtlCol="0" anchor="t"/>
-          <a:lstStyle/>
-          <a:p>
-            <a:pPr marL="0" indent="0" algn="l">
-              <a:buNone/>
-            </a:pPr>
-            <a:r>
-              <a:rPr lang="en-US" sz="1500" b="1" dirty="0">
-                <a:solidFill>
-                  <a:srgbClr val="FFFFFF"/>
-                </a:solidFill>
-                <a:latin typeface="Malgun Gothic" pitchFamily="34" charset="0"/>
-                <a:ea typeface="Malgun Gothic" pitchFamily="34" charset="-122"/>
-                <a:cs typeface="Malgun Gothic" pitchFamily="34" charset="-120"/>
-              </a:rPr>
-              <a:t>4 · FastAPI + Web/Mobile 확장</a:t>
-            </a:r>
-            <a:endParaRPr lang="en-US" sz="1500" dirty="0"/>
-          </a:p>
-        </p:txBody>
-      </p:sp>
-      <p:sp>
-        <p:nvSpPr>
-          <p:cNvPr id="27" name="Text 25"/>
-          <p:cNvSpPr/>
-          <p:nvPr/>
-        </p:nvSpPr>
-        <p:spPr>
-          <a:xfrm>
-            <a:off x="1498600" y="4343400"/>
-            <a:ext cx="5461000" cy="200025"/>
-          </a:xfrm>
-          <a:prstGeom prst="rect">
-            <a:avLst/>
-          </a:prstGeom>
-          <a:noFill/>
-          <a:ln/>
-        </p:spPr>
-        <p:txBody>
-          <a:bodyPr wrap="square" lIns="0" tIns="0" rIns="0" bIns="0" rtlCol="0" anchor="t"/>
-          <a:lstStyle/>
-          <a:p>
-            <a:pPr marL="0" indent="0" algn="l">
-              <a:buNone/>
-            </a:pPr>
-            <a:r>
-              <a:rPr lang="en-US" sz="1150" dirty="0">
-                <a:solidFill>
-                  <a:srgbClr val="AAC4BD"/>
-                </a:solidFill>
-                <a:latin typeface="Malgun Gothic" pitchFamily="34" charset="0"/>
-                <a:ea typeface="Malgun Gothic" pitchFamily="34" charset="-122"/>
-                <a:cs typeface="Malgun Gothic" pitchFamily="34" charset="-120"/>
-              </a:rPr>
-              <a:t>실시간 경로 기반 추천 서비스로 제품화</a:t>
-            </a:r>
-            <a:endParaRPr lang="en-US" sz="1150" dirty="0"/>
-          </a:p>
-        </p:txBody>
-      </p:sp>
-      <p:sp>
-        <p:nvSpPr>
-          <p:cNvPr id="28" name="Text 26"/>
-          <p:cNvSpPr/>
-          <p:nvPr/>
-        </p:nvSpPr>
-        <p:spPr>
-          <a:xfrm>
-            <a:off x="1498600" y="4851400"/>
-            <a:ext cx="5461000" cy="257175"/>
-          </a:xfrm>
-          <a:prstGeom prst="rect">
-            <a:avLst/>
-          </a:prstGeom>
-          <a:noFill/>
-          <a:ln/>
-        </p:spPr>
-        <p:txBody>
-          <a:bodyPr wrap="square" lIns="0" tIns="0" rIns="0" bIns="0" rtlCol="0" anchor="t"/>
-          <a:lstStyle/>
-          <a:p>
-            <a:pPr marL="0" indent="0" algn="l">
-              <a:buNone/>
-            </a:pPr>
-            <a:r>
-              <a:rPr lang="en-US" sz="1500" b="1" dirty="0">
-                <a:solidFill>
-                  <a:srgbClr val="FFFFFF"/>
-                </a:solidFill>
-                <a:latin typeface="Malgun Gothic" pitchFamily="34" charset="0"/>
-                <a:ea typeface="Malgun Gothic" pitchFamily="34" charset="-122"/>
-                <a:cs typeface="Malgun Gothic" pitchFamily="34" charset="-120"/>
-              </a:rPr>
-              <a:t>5 · 구간별 최적 속도 프로파일</a:t>
-            </a:r>
-            <a:endParaRPr lang="en-US" sz="1500" dirty="0"/>
-          </a:p>
-        </p:txBody>
-      </p:sp>
-      <p:sp>
-        <p:nvSpPr>
-          <p:cNvPr id="29" name="Text 27"/>
-          <p:cNvSpPr/>
-          <p:nvPr/>
-        </p:nvSpPr>
-        <p:spPr>
-          <a:xfrm>
-            <a:off x="1498600" y="5156200"/>
-            <a:ext cx="5461000" cy="200025"/>
-          </a:xfrm>
-          <a:prstGeom prst="rect">
-            <a:avLst/>
-          </a:prstGeom>
-          <a:noFill/>
-          <a:ln/>
-        </p:spPr>
-        <p:txBody>
-          <a:bodyPr wrap="square" lIns="0" tIns="0" rIns="0" bIns="0" rtlCol="0" anchor="t"/>
-          <a:lstStyle/>
-          <a:p>
-            <a:pPr marL="0" indent="0" algn="l">
-              <a:buNone/>
-            </a:pPr>
-            <a:r>
-              <a:rPr lang="en-US" sz="1150" dirty="0">
-                <a:solidFill>
-                  <a:srgbClr val="AAC4BD"/>
-                </a:solidFill>
-                <a:latin typeface="Malgun Gothic" pitchFamily="34" charset="0"/>
-                <a:ea typeface="Malgun Gothic" pitchFamily="34" charset="-122"/>
-                <a:cs typeface="Malgun Gothic" pitchFamily="34" charset="-120"/>
-              </a:rPr>
-              <a:t>단일 속도를 넘어 경로 전체의 주행 전략 제안</a:t>
-            </a:r>
-            <a:endParaRPr lang="en-US" sz="1150" dirty="0"/>
-          </a:p>
-        </p:txBody>
-      </p:sp>
-      <p:sp>
-        <p:nvSpPr>
-          <p:cNvPr id="30" name="Text 28"/>
-          <p:cNvSpPr/>
-          <p:nvPr/>
-        </p:nvSpPr>
-        <p:spPr>
-          <a:xfrm>
-            <a:off x="660400" y="6045200"/>
-            <a:ext cx="10871200" cy="431800"/>
+            <a:endParaRPr lang="en-US" sz="1600" dirty="0"/>
+          </a:p>
+        </p:txBody>
+      </p:sp>
+      <p:sp>
+        <p:nvSpPr>
+          <p:cNvPr id="9" name="Text 7"/>
+          <p:cNvSpPr/>
+          <p:nvPr/>
+        </p:nvSpPr>
+        <p:spPr>
+          <a:xfrm>
+            <a:off x="971526" y="2901851"/>
+            <a:ext cx="4514737" cy="490240"/>
           </a:xfrm>
           <a:prstGeom prst="rect">
             <a:avLst/>
@@ -13140,13 +12227,13 @@
             <a:r>
               <a:rPr lang="en-US" sz="1350" dirty="0">
                 <a:solidFill>
-                  <a:srgbClr val="C2D8D1"/>
+                  <a:srgbClr val="536C76"/>
                 </a:solidFill>
-                <a:latin typeface="Malgun Gothic" pitchFamily="34" charset="0"/>
-                <a:ea typeface="Malgun Gothic" pitchFamily="34" charset="-122"/>
-                <a:cs typeface="Malgun Gothic" pitchFamily="34" charset="-120"/>
+                <a:latin typeface="Arial" pitchFamily="34" charset="0"/>
+                <a:ea typeface="Arial" pitchFamily="34" charset="-122"/>
+                <a:cs typeface="Arial" pitchFamily="34" charset="-120"/>
               </a:rPr>
-              <a:t>결론: EV Speed Advisor는 소비량 예측을 넘어, 사용 목적에 맞는 속도를 선택하게 하는 실용적 의사결정 지원 도구다.</a:t>
+              <a:t>현재 데이터는 결측·이상치가 거의 없는 정제된 구조라 실제 주행 데이터 기반 검증이 필요하다.</a:t>
             </a:r>
             <a:endParaRPr lang="en-US" sz="1350" dirty="0"/>
           </a:p>
@@ -13154,14 +12241,14 @@
       </p:sp>
       <p:sp>
         <p:nvSpPr>
-          <p:cNvPr id="31" name="Text 29"/>
-          <p:cNvSpPr/>
-          <p:nvPr/>
-        </p:nvSpPr>
-        <p:spPr>
-          <a:xfrm>
-            <a:off x="11397122" y="6477000"/>
-            <a:ext cx="146890" cy="171450"/>
+          <p:cNvPr id="10" name="Text 8"/>
+          <p:cNvSpPr/>
+          <p:nvPr/>
+        </p:nvSpPr>
+        <p:spPr>
+          <a:xfrm>
+            <a:off x="971526" y="3714750"/>
+            <a:ext cx="4514737" cy="253901"/>
           </a:xfrm>
           <a:prstGeom prst="rect">
             <a:avLst/>
@@ -13177,13 +12264,589 @@
               <a:buNone/>
             </a:pPr>
             <a:r>
-              <a:rPr lang="en-US" sz="1050">
+              <a:rPr lang="en-US" sz="1600" b="1" dirty="0">
                 <a:solidFill>
-                  <a:srgbClr val="6F8F86"/>
+                  <a:srgbClr val="071B26"/>
                 </a:solidFill>
-                <a:latin typeface="Malgun Gothic" pitchFamily="34" charset="0"/>
-                <a:ea typeface="Malgun Gothic" pitchFamily="34" charset="-122"/>
-                <a:cs typeface="Malgun Gothic" pitchFamily="34" charset="-120"/>
+                <a:latin typeface="Arial" pitchFamily="34" charset="0"/>
+                <a:ea typeface="Arial" pitchFamily="34" charset="-122"/>
+                <a:cs typeface="Arial" pitchFamily="34" charset="-120"/>
+              </a:rPr>
+              <a:t>경로 표현 한계</a:t>
+            </a:r>
+            <a:endParaRPr lang="en-US" sz="1600" dirty="0"/>
+          </a:p>
+        </p:txBody>
+      </p:sp>
+      <p:sp>
+        <p:nvSpPr>
+          <p:cNvPr id="11" name="Text 9"/>
+          <p:cNvSpPr/>
+          <p:nvPr/>
+        </p:nvSpPr>
+        <p:spPr>
+          <a:xfrm>
+            <a:off x="971526" y="3968651"/>
+            <a:ext cx="4514737" cy="490240"/>
+          </a:xfrm>
+          <a:prstGeom prst="rect">
+            <a:avLst/>
+          </a:prstGeom>
+          <a:noFill/>
+          <a:ln/>
+        </p:spPr>
+        <p:txBody>
+          <a:bodyPr wrap="square" lIns="0" tIns="0" rIns="0" bIns="0" rtlCol="0" anchor="t"/>
+          <a:lstStyle/>
+          <a:p>
+            <a:pPr marL="0" indent="0" algn="l">
+              <a:buNone/>
+            </a:pPr>
+            <a:r>
+              <a:rPr lang="en-US" sz="1350" dirty="0">
+                <a:solidFill>
+                  <a:srgbClr val="536C76"/>
+                </a:solidFill>
+                <a:latin typeface="Arial" pitchFamily="34" charset="0"/>
+                <a:ea typeface="Arial" pitchFamily="34" charset="-122"/>
+                <a:cs typeface="Arial" pitchFamily="34" charset="-120"/>
+              </a:rPr>
+              <a:t>현재는 평균 경사도를 입력하지만 실제 도로는 구간별 경사도 변화가 존재한다.</a:t>
+            </a:r>
+            <a:endParaRPr lang="en-US" sz="1350" dirty="0"/>
+          </a:p>
+        </p:txBody>
+      </p:sp>
+      <p:sp>
+        <p:nvSpPr>
+          <p:cNvPr id="12" name="Text 10"/>
+          <p:cNvSpPr/>
+          <p:nvPr/>
+        </p:nvSpPr>
+        <p:spPr>
+          <a:xfrm>
+            <a:off x="971526" y="4781550"/>
+            <a:ext cx="4514737" cy="253901"/>
+          </a:xfrm>
+          <a:prstGeom prst="rect">
+            <a:avLst/>
+          </a:prstGeom>
+          <a:noFill/>
+          <a:ln/>
+        </p:spPr>
+        <p:txBody>
+          <a:bodyPr wrap="square" lIns="0" tIns="0" rIns="0" bIns="0" rtlCol="0" anchor="t"/>
+          <a:lstStyle/>
+          <a:p>
+            <a:pPr marL="0" indent="0" algn="l">
+              <a:buNone/>
+            </a:pPr>
+            <a:r>
+              <a:rPr lang="en-US" sz="1600" b="1" dirty="0">
+                <a:solidFill>
+                  <a:srgbClr val="071B26"/>
+                </a:solidFill>
+                <a:latin typeface="Arial" pitchFamily="34" charset="0"/>
+                <a:ea typeface="Arial" pitchFamily="34" charset="-122"/>
+                <a:cs typeface="Arial" pitchFamily="34" charset="-120"/>
+              </a:rPr>
+              <a:t>차량별 특성 미반영</a:t>
+            </a:r>
+            <a:endParaRPr lang="en-US" sz="1600" dirty="0"/>
+          </a:p>
+        </p:txBody>
+      </p:sp>
+      <p:sp>
+        <p:nvSpPr>
+          <p:cNvPr id="13" name="Text 11"/>
+          <p:cNvSpPr/>
+          <p:nvPr/>
+        </p:nvSpPr>
+        <p:spPr>
+          <a:xfrm>
+            <a:off x="971526" y="5035451"/>
+            <a:ext cx="4514737" cy="490240"/>
+          </a:xfrm>
+          <a:prstGeom prst="rect">
+            <a:avLst/>
+          </a:prstGeom>
+          <a:noFill/>
+          <a:ln/>
+        </p:spPr>
+        <p:txBody>
+          <a:bodyPr wrap="square" lIns="0" tIns="0" rIns="0" bIns="0" rtlCol="0" anchor="t"/>
+          <a:lstStyle/>
+          <a:p>
+            <a:pPr marL="0" indent="0" algn="l">
+              <a:buNone/>
+            </a:pPr>
+            <a:r>
+              <a:rPr lang="en-US" sz="1350" dirty="0">
+                <a:solidFill>
+                  <a:srgbClr val="536C76"/>
+                </a:solidFill>
+                <a:latin typeface="Arial" pitchFamily="34" charset="0"/>
+                <a:ea typeface="Arial" pitchFamily="34" charset="-122"/>
+                <a:cs typeface="Arial" pitchFamily="34" charset="-120"/>
+              </a:rPr>
+              <a:t>차종, 공기저항, 배터리 용량, 타이어 규격 등이 모델에 포함되지 않았다.</a:t>
+            </a:r>
+            <a:endParaRPr lang="en-US" sz="1350" dirty="0"/>
+          </a:p>
+        </p:txBody>
+      </p:sp>
+      <p:sp>
+        <p:nvSpPr>
+          <p:cNvPr id="14" name="Shape 12"/>
+          <p:cNvSpPr/>
+          <p:nvPr/>
+        </p:nvSpPr>
+        <p:spPr>
+          <a:xfrm>
+            <a:off x="647684" y="1619250"/>
+            <a:ext cx="5219570" cy="76200"/>
+          </a:xfrm>
+          <a:prstGeom prst="rect">
+            <a:avLst/>
+          </a:prstGeom>
+          <a:solidFill>
+            <a:srgbClr val="FF5148"/>
+          </a:solidFill>
+          <a:ln w="12700">
+            <a:solidFill>
+              <a:srgbClr val="FFFFFF">
+                <a:alpha val="0"/>
+              </a:srgbClr>
+            </a:solidFill>
+            <a:prstDash val="solid"/>
+          </a:ln>
+        </p:spPr>
+      </p:sp>
+      <p:sp>
+        <p:nvSpPr>
+          <p:cNvPr id="15" name="Shape 13"/>
+          <p:cNvSpPr/>
+          <p:nvPr/>
+        </p:nvSpPr>
+        <p:spPr>
+          <a:xfrm>
+            <a:off x="6019650" y="1619250"/>
+            <a:ext cx="5219570" cy="4000500"/>
+          </a:xfrm>
+          <a:prstGeom prst="rect">
+            <a:avLst/>
+          </a:prstGeom>
+          <a:solidFill>
+            <a:srgbClr val="102832"/>
+          </a:solidFill>
+          <a:ln w="12700">
+            <a:solidFill>
+              <a:srgbClr val="FFFFFF">
+                <a:alpha val="0"/>
+              </a:srgbClr>
+            </a:solidFill>
+            <a:prstDash val="solid"/>
+          </a:ln>
+        </p:spPr>
+      </p:sp>
+      <p:sp>
+        <p:nvSpPr>
+          <p:cNvPr id="16" name="Text 14"/>
+          <p:cNvSpPr/>
+          <p:nvPr/>
+        </p:nvSpPr>
+        <p:spPr>
+          <a:xfrm>
+            <a:off x="6343491" y="1905000"/>
+            <a:ext cx="1155770" cy="381000"/>
+          </a:xfrm>
+          <a:prstGeom prst="rect">
+            <a:avLst/>
+          </a:prstGeom>
+          <a:noFill/>
+          <a:ln/>
+        </p:spPr>
+        <p:txBody>
+          <a:bodyPr wrap="square" lIns="0" tIns="0" rIns="0" bIns="0" rtlCol="0" anchor="t"/>
+          <a:lstStyle/>
+          <a:p>
+            <a:pPr marL="0" indent="0" algn="l">
+              <a:buNone/>
+            </a:pPr>
+            <a:r>
+              <a:rPr lang="en-US" sz="2100" b="1" dirty="0">
+                <a:solidFill>
+                  <a:srgbClr val="21D6B0"/>
+                </a:solidFill>
+                <a:latin typeface="Arial" pitchFamily="34" charset="0"/>
+                <a:ea typeface="Arial" pitchFamily="34" charset="-122"/>
+                <a:cs typeface="Arial" pitchFamily="34" charset="-120"/>
+              </a:rPr>
+              <a:t>확장 방향</a:t>
+            </a:r>
+            <a:endParaRPr lang="en-US" sz="2100" dirty="0"/>
+          </a:p>
+        </p:txBody>
+      </p:sp>
+      <p:sp>
+        <p:nvSpPr>
+          <p:cNvPr id="17" name="Text 15"/>
+          <p:cNvSpPr/>
+          <p:nvPr/>
+        </p:nvSpPr>
+        <p:spPr>
+          <a:xfrm>
+            <a:off x="6343491" y="2647950"/>
+            <a:ext cx="4514737" cy="253901"/>
+          </a:xfrm>
+          <a:prstGeom prst="rect">
+            <a:avLst/>
+          </a:prstGeom>
+          <a:noFill/>
+          <a:ln/>
+        </p:spPr>
+        <p:txBody>
+          <a:bodyPr wrap="square" lIns="0" tIns="0" rIns="0" bIns="0" rtlCol="0" anchor="t"/>
+          <a:lstStyle/>
+          <a:p>
+            <a:pPr marL="0" indent="0" algn="l">
+              <a:buNone/>
+            </a:pPr>
+            <a:r>
+              <a:rPr lang="en-US" sz="1600" b="1" dirty="0">
+                <a:solidFill>
+                  <a:srgbClr val="FFFFFF"/>
+                </a:solidFill>
+                <a:latin typeface="Arial" pitchFamily="34" charset="0"/>
+                <a:ea typeface="Arial" pitchFamily="34" charset="-122"/>
+                <a:cs typeface="Arial" pitchFamily="34" charset="-120"/>
+              </a:rPr>
+              <a:t>지도·고도 데이터 연동</a:t>
+            </a:r>
+            <a:endParaRPr lang="en-US" sz="1600" dirty="0"/>
+          </a:p>
+        </p:txBody>
+      </p:sp>
+      <p:sp>
+        <p:nvSpPr>
+          <p:cNvPr id="18" name="Text 16"/>
+          <p:cNvSpPr/>
+          <p:nvPr/>
+        </p:nvSpPr>
+        <p:spPr>
+          <a:xfrm>
+            <a:off x="6343491" y="2901851"/>
+            <a:ext cx="4514737" cy="490240"/>
+          </a:xfrm>
+          <a:prstGeom prst="rect">
+            <a:avLst/>
+          </a:prstGeom>
+          <a:noFill/>
+          <a:ln/>
+        </p:spPr>
+        <p:txBody>
+          <a:bodyPr wrap="square" lIns="0" tIns="0" rIns="0" bIns="0" rtlCol="0" anchor="t"/>
+          <a:lstStyle/>
+          <a:p>
+            <a:pPr marL="0" indent="0" algn="l">
+              <a:buNone/>
+            </a:pPr>
+            <a:r>
+              <a:rPr lang="en-US" sz="1350" dirty="0">
+                <a:solidFill>
+                  <a:srgbClr val="C7D5DA"/>
+                </a:solidFill>
+                <a:latin typeface="Arial" pitchFamily="34" charset="0"/>
+                <a:ea typeface="Arial" pitchFamily="34" charset="-122"/>
+                <a:cs typeface="Arial" pitchFamily="34" charset="-120"/>
+              </a:rPr>
+              <a:t>출발지와 도착지를 입력하면 구간별 elevation profile을 자동 추출한다.</a:t>
+            </a:r>
+            <a:endParaRPr lang="en-US" sz="1350" dirty="0"/>
+          </a:p>
+        </p:txBody>
+      </p:sp>
+      <p:sp>
+        <p:nvSpPr>
+          <p:cNvPr id="19" name="Text 17"/>
+          <p:cNvSpPr/>
+          <p:nvPr/>
+        </p:nvSpPr>
+        <p:spPr>
+          <a:xfrm>
+            <a:off x="6343491" y="3714750"/>
+            <a:ext cx="4514737" cy="253901"/>
+          </a:xfrm>
+          <a:prstGeom prst="rect">
+            <a:avLst/>
+          </a:prstGeom>
+          <a:noFill/>
+          <a:ln/>
+        </p:spPr>
+        <p:txBody>
+          <a:bodyPr wrap="square" lIns="0" tIns="0" rIns="0" bIns="0" rtlCol="0" anchor="t"/>
+          <a:lstStyle/>
+          <a:p>
+            <a:pPr marL="0" indent="0" algn="l">
+              <a:buNone/>
+            </a:pPr>
+            <a:r>
+              <a:rPr lang="en-US" sz="1600" b="1" dirty="0">
+                <a:solidFill>
+                  <a:srgbClr val="FFFFFF"/>
+                </a:solidFill>
+                <a:latin typeface="Arial" pitchFamily="34" charset="0"/>
+                <a:ea typeface="Arial" pitchFamily="34" charset="-122"/>
+                <a:cs typeface="Arial" pitchFamily="34" charset="-120"/>
+              </a:rPr>
+              <a:t>외부 API 연결</a:t>
+            </a:r>
+            <a:endParaRPr lang="en-US" sz="1600" dirty="0"/>
+          </a:p>
+        </p:txBody>
+      </p:sp>
+      <p:sp>
+        <p:nvSpPr>
+          <p:cNvPr id="20" name="Text 18"/>
+          <p:cNvSpPr/>
+          <p:nvPr/>
+        </p:nvSpPr>
+        <p:spPr>
+          <a:xfrm>
+            <a:off x="6343491" y="3968651"/>
+            <a:ext cx="4514737" cy="490240"/>
+          </a:xfrm>
+          <a:prstGeom prst="rect">
+            <a:avLst/>
+          </a:prstGeom>
+          <a:noFill/>
+          <a:ln/>
+        </p:spPr>
+        <p:txBody>
+          <a:bodyPr wrap="square" lIns="0" tIns="0" rIns="0" bIns="0" rtlCol="0" anchor="t"/>
+          <a:lstStyle/>
+          <a:p>
+            <a:pPr marL="0" indent="0" algn="l">
+              <a:buNone/>
+            </a:pPr>
+            <a:r>
+              <a:rPr lang="en-US" sz="1350" dirty="0">
+                <a:solidFill>
+                  <a:srgbClr val="C7D5DA"/>
+                </a:solidFill>
+                <a:latin typeface="Arial" pitchFamily="34" charset="0"/>
+                <a:ea typeface="Arial" pitchFamily="34" charset="-122"/>
+                <a:cs typeface="Arial" pitchFamily="34" charset="-120"/>
+              </a:rPr>
+              <a:t>날씨 API로 외기 온도를 자동 입력하고, 차량 데이터로 배터리 온도를 반영한다.</a:t>
+            </a:r>
+            <a:endParaRPr lang="en-US" sz="1350" dirty="0"/>
+          </a:p>
+        </p:txBody>
+      </p:sp>
+      <p:sp>
+        <p:nvSpPr>
+          <p:cNvPr id="21" name="Text 19"/>
+          <p:cNvSpPr/>
+          <p:nvPr/>
+        </p:nvSpPr>
+        <p:spPr>
+          <a:xfrm>
+            <a:off x="6343491" y="4781550"/>
+            <a:ext cx="4514737" cy="253901"/>
+          </a:xfrm>
+          <a:prstGeom prst="rect">
+            <a:avLst/>
+          </a:prstGeom>
+          <a:noFill/>
+          <a:ln/>
+        </p:spPr>
+        <p:txBody>
+          <a:bodyPr wrap="square" lIns="0" tIns="0" rIns="0" bIns="0" rtlCol="0" anchor="t"/>
+          <a:lstStyle/>
+          <a:p>
+            <a:pPr marL="0" indent="0" algn="l">
+              <a:buNone/>
+            </a:pPr>
+            <a:r>
+              <a:rPr lang="en-US" sz="1600" b="1" dirty="0">
+                <a:solidFill>
+                  <a:srgbClr val="FFFFFF"/>
+                </a:solidFill>
+                <a:latin typeface="Arial" pitchFamily="34" charset="0"/>
+                <a:ea typeface="Arial" pitchFamily="34" charset="-122"/>
+                <a:cs typeface="Arial" pitchFamily="34" charset="-120"/>
+              </a:rPr>
+              <a:t>서비스 구조 확장</a:t>
+            </a:r>
+            <a:endParaRPr lang="en-US" sz="1600" dirty="0"/>
+          </a:p>
+        </p:txBody>
+      </p:sp>
+      <p:sp>
+        <p:nvSpPr>
+          <p:cNvPr id="22" name="Text 20"/>
+          <p:cNvSpPr/>
+          <p:nvPr/>
+        </p:nvSpPr>
+        <p:spPr>
+          <a:xfrm>
+            <a:off x="6343491" y="5035451"/>
+            <a:ext cx="4514737" cy="490240"/>
+          </a:xfrm>
+          <a:prstGeom prst="rect">
+            <a:avLst/>
+          </a:prstGeom>
+          <a:noFill/>
+          <a:ln/>
+        </p:spPr>
+        <p:txBody>
+          <a:bodyPr wrap="square" lIns="0" tIns="0" rIns="0" bIns="0" rtlCol="0" anchor="t"/>
+          <a:lstStyle/>
+          <a:p>
+            <a:pPr marL="0" indent="0" algn="l">
+              <a:buNone/>
+            </a:pPr>
+            <a:r>
+              <a:rPr lang="en-US" sz="1350" dirty="0">
+                <a:solidFill>
+                  <a:srgbClr val="C7D5DA"/>
+                </a:solidFill>
+                <a:latin typeface="Arial" pitchFamily="34" charset="0"/>
+                <a:ea typeface="Arial" pitchFamily="34" charset="-122"/>
+                <a:cs typeface="Arial" pitchFamily="34" charset="-120"/>
+              </a:rPr>
+              <a:t>Streamlit MVP 이후 FastAPI + Web/Mobile frontend 구조로 확장할 수 있다.</a:t>
+            </a:r>
+            <a:endParaRPr lang="en-US" sz="1350" dirty="0"/>
+          </a:p>
+        </p:txBody>
+      </p:sp>
+      <p:sp>
+        <p:nvSpPr>
+          <p:cNvPr id="23" name="Shape 21"/>
+          <p:cNvSpPr/>
+          <p:nvPr/>
+        </p:nvSpPr>
+        <p:spPr>
+          <a:xfrm>
+            <a:off x="6019650" y="1619250"/>
+            <a:ext cx="5219570" cy="76200"/>
+          </a:xfrm>
+          <a:prstGeom prst="rect">
+            <a:avLst/>
+          </a:prstGeom>
+          <a:solidFill>
+            <a:srgbClr val="21D6B0"/>
+          </a:solidFill>
+          <a:ln w="12700">
+            <a:solidFill>
+              <a:srgbClr val="FFFFFF">
+                <a:alpha val="0"/>
+              </a:srgbClr>
+            </a:solidFill>
+            <a:prstDash val="solid"/>
+          </a:ln>
+        </p:spPr>
+      </p:sp>
+      <p:sp>
+        <p:nvSpPr>
+          <p:cNvPr id="24" name="Shape 22"/>
+          <p:cNvSpPr/>
+          <p:nvPr/>
+        </p:nvSpPr>
+        <p:spPr>
+          <a:xfrm>
+            <a:off x="647684" y="5905500"/>
+            <a:ext cx="10591535" cy="552450"/>
+          </a:xfrm>
+          <a:prstGeom prst="rect">
+            <a:avLst/>
+          </a:prstGeom>
+          <a:solidFill>
+            <a:srgbClr val="102832"/>
+          </a:solidFill>
+          <a:ln w="12700">
+            <a:solidFill>
+              <a:srgbClr val="FFFFFF">
+                <a:alpha val="0"/>
+              </a:srgbClr>
+            </a:solidFill>
+            <a:prstDash val="solid"/>
+          </a:ln>
+        </p:spPr>
+      </p:sp>
+      <p:sp>
+        <p:nvSpPr>
+          <p:cNvPr id="25" name="Text 23"/>
+          <p:cNvSpPr/>
+          <p:nvPr/>
+        </p:nvSpPr>
+        <p:spPr>
+          <a:xfrm>
+            <a:off x="933427" y="6067425"/>
+            <a:ext cx="9953376" cy="255389"/>
+          </a:xfrm>
+          <a:prstGeom prst="rect">
+            <a:avLst/>
+          </a:prstGeom>
+          <a:noFill/>
+          <a:ln/>
+        </p:spPr>
+        <p:txBody>
+          <a:bodyPr wrap="square" lIns="0" tIns="0" rIns="0" bIns="0" rtlCol="0" anchor="t"/>
+          <a:lstStyle/>
+          <a:p>
+            <a:pPr marL="0" indent="0" algn="ctr">
+              <a:buNone/>
+            </a:pPr>
+            <a:r>
+              <a:rPr lang="en-US" sz="1750" b="1" dirty="0">
+                <a:solidFill>
+                  <a:srgbClr val="FFFFFF"/>
+                </a:solidFill>
+                <a:latin typeface="Arial" pitchFamily="34" charset="0"/>
+                <a:ea typeface="Arial" pitchFamily="34" charset="-122"/>
+                <a:cs typeface="Arial" pitchFamily="34" charset="-120"/>
+              </a:rPr>
+              <a:t>최종 방향: 단일 평균 속도 추천에서 구간별 speed profile 추천으로 확장</a:t>
+            </a:r>
+            <a:endParaRPr lang="en-US" sz="1750" dirty="0"/>
+          </a:p>
+        </p:txBody>
+      </p:sp>
+      <p:sp>
+        <p:nvSpPr>
+          <p:cNvPr id="26" name="Text 24"/>
+          <p:cNvSpPr/>
+          <p:nvPr/>
+        </p:nvSpPr>
+        <p:spPr>
+          <a:xfrm>
+            <a:off x="11226800" y="6477000"/>
+            <a:ext cx="355600" cy="203200"/>
+          </a:xfrm>
+          <a:prstGeom prst="rect">
+            <a:avLst/>
+          </a:prstGeom>
+          <a:noFill/>
+          <a:ln/>
+        </p:spPr>
+        <p:txBody>
+          <a:bodyPr wrap="square" lIns="0" tIns="0" rIns="0" bIns="0" rtlCol="0" anchor="t"/>
+          <a:lstStyle/>
+          <a:p>
+            <a:pPr marL="0" indent="0" algn="l">
+              <a:buNone/>
+            </a:pPr>
+            <a:r>
+              <a:rPr lang="en-US" sz="1050" dirty="0">
+                <a:solidFill>
+                  <a:srgbClr val="748B93"/>
+                </a:solidFill>
+                <a:latin typeface="Arial" pitchFamily="34" charset="0"/>
+                <a:ea typeface="Arial" pitchFamily="34" charset="-122"/>
+                <a:cs typeface="Arial" pitchFamily="34" charset="-120"/>
               </a:rPr>
               <a:t>09</a:t>
             </a:r>
@@ -13191,243 +12854,7 @@
           </a:p>
         </p:txBody>
       </p:sp>
-      <p:sp>
-        <p:nvSpPr>
-          <p:cNvPr id="5" name="직사각형 4">
-            <a:extLst>
-              <a:ext uri="{FF2B5EF4-FFF2-40B4-BE49-F238E27FC236}">
-                <a16:creationId xmlns:a16="http://schemas.microsoft.com/office/drawing/2014/main" id="{2F770AA3-CFD4-419C-9DE1-529DE78CF542}"/>
-              </a:ext>
-            </a:extLst>
-          </p:cNvPr>
-          <p:cNvSpPr/>
-          <p:nvPr/>
-        </p:nvSpPr>
-        <p:spPr>
-          <a:xfrm>
-            <a:off x="8064500" y="1600200"/>
-            <a:ext cx="3467100" cy="4127500"/>
-          </a:xfrm>
-          <a:prstGeom prst="rect">
-            <a:avLst/>
-          </a:prstGeom>
-          <a:solidFill>
-            <a:srgbClr val="F4F8F6"/>
-          </a:solidFill>
-          <a:ln w="12700" cap="flat" cmpd="sng" algn="ctr">
-            <a:noFill/>
-            <a:prstDash val="solid"/>
-            <a:miter lim="800000"/>
-          </a:ln>
-        </p:spPr>
-        <p:style>
-          <a:lnRef idx="2">
-            <a:schemeClr val="accent1">
-              <a:shade val="15000"/>
-            </a:schemeClr>
-          </a:lnRef>
-          <a:fillRef idx="1">
-            <a:schemeClr val="accent1"/>
-          </a:fillRef>
-          <a:effectRef idx="0">
-            <a:schemeClr val="accent1"/>
-          </a:effectRef>
-          <a:fontRef idx="minor">
-            <a:schemeClr val="lt1"/>
-          </a:fontRef>
-        </p:style>
-        <p:txBody>
-          <a:bodyPr vertOverflow="clip" horzOverflow="clip" rtlCol="0" anchor="t"/>
-          <a:lstStyle/>
-          <a:p>
-            <a:pPr algn="l"/>
-            <a:endParaRPr lang="ko-KR" altLang="en-US"/>
-          </a:p>
-        </p:txBody>
-      </p:sp>
-      <p:sp>
-        <p:nvSpPr>
-          <p:cNvPr id="6" name="TextBox 5">
-            <a:extLst>
-              <a:ext uri="{FF2B5EF4-FFF2-40B4-BE49-F238E27FC236}">
-                <a16:creationId xmlns:a16="http://schemas.microsoft.com/office/drawing/2014/main" id="{F0BED2CE-BE93-4ED9-A439-FCD1969120E3}"/>
-              </a:ext>
-            </a:extLst>
-          </p:cNvPr>
-          <p:cNvSpPr txBox="1"/>
-          <p:nvPr/>
-        </p:nvSpPr>
-        <p:spPr>
-          <a:xfrm>
-            <a:off x="8382000" y="1905000"/>
-            <a:ext cx="2794000" cy="330200"/>
-          </a:xfrm>
-          <a:prstGeom prst="rect">
-            <a:avLst/>
-          </a:prstGeom>
-          <a:noFill/>
-        </p:spPr>
-        <p:txBody>
-          <a:bodyPr vertOverflow="overflow" vert="horz" wrap="square" rtlCol="0" anchor="t">
-            <a:spAutoFit/>
-          </a:bodyPr>
-          <a:lstStyle/>
-          <a:p>
-            <a:pPr algn="l"/>
-            <a:r>
-              <a:rPr lang="ko-KR" altLang="en-US" sz="2000" b="1">
-                <a:solidFill>
-                  <a:srgbClr val="10232B"/>
-                </a:solidFill>
-                <a:latin typeface="Malgun Gothic"/>
-                <a:ea typeface="Malgun Gothic"/>
-              </a:rPr>
-              <a:t>현재 검증 한계</a:t>
-            </a:r>
-          </a:p>
-        </p:txBody>
-      </p:sp>
-      <p:sp>
-        <p:nvSpPr>
-          <p:cNvPr id="7" name="TextBox 6">
-            <a:extLst>
-              <a:ext uri="{FF2B5EF4-FFF2-40B4-BE49-F238E27FC236}">
-                <a16:creationId xmlns:a16="http://schemas.microsoft.com/office/drawing/2014/main" id="{9F6F4C82-8D22-44C9-ADB5-60CA4432104C}"/>
-              </a:ext>
-            </a:extLst>
-          </p:cNvPr>
-          <p:cNvSpPr txBox="1"/>
-          <p:nvPr/>
-        </p:nvSpPr>
-        <p:spPr>
-          <a:xfrm>
-            <a:off x="8382000" y="2489200"/>
-            <a:ext cx="2794000" cy="2603500"/>
-          </a:xfrm>
-          <a:prstGeom prst="rect">
-            <a:avLst/>
-          </a:prstGeom>
-          <a:noFill/>
-        </p:spPr>
-        <p:txBody>
-          <a:bodyPr vertOverflow="overflow" vert="horz" wrap="square" rtlCol="0" anchor="t">
-            <a:spAutoFit/>
-          </a:bodyPr>
-          <a:lstStyle/>
-          <a:p>
-            <a:pPr algn="l"/>
-            <a:r>
-              <a:rPr lang="en-US" altLang="ko-KR" sz="1500">
-                <a:solidFill>
-                  <a:srgbClr val="4E655E"/>
-                </a:solidFill>
-                <a:latin typeface="Malgun Gothic"/>
-                <a:ea typeface="Malgun Gothic"/>
-              </a:rPr>
-              <a:t>• Synthetic </a:t>
-            </a:r>
-            <a:r>
-              <a:rPr lang="ko-KR" altLang="en-US" sz="1500">
-                <a:solidFill>
-                  <a:srgbClr val="4E655E"/>
-                </a:solidFill>
-                <a:latin typeface="Malgun Gothic"/>
-                <a:ea typeface="Malgun Gothic"/>
-              </a:rPr>
-              <a:t>성격의 학습 데이터
-</a:t>
-            </a:r>
-            <a:r>
-              <a:rPr lang="en-US" altLang="ko-KR" sz="1500">
-                <a:solidFill>
-                  <a:srgbClr val="4E655E"/>
-                </a:solidFill>
-                <a:latin typeface="Malgun Gothic"/>
-                <a:ea typeface="Malgun Gothic"/>
-              </a:rPr>
-              <a:t>• </a:t>
-            </a:r>
-            <a:r>
-              <a:rPr lang="ko-KR" altLang="en-US" sz="1500">
-                <a:solidFill>
-                  <a:srgbClr val="4E655E"/>
-                </a:solidFill>
-                <a:latin typeface="Malgun Gothic"/>
-                <a:ea typeface="Malgun Gothic"/>
-              </a:rPr>
-              <a:t>단일 평균 경사도 입력
-</a:t>
-            </a:r>
-            <a:r>
-              <a:rPr lang="en-US" altLang="ko-KR" sz="1500">
-                <a:solidFill>
-                  <a:srgbClr val="4E655E"/>
-                </a:solidFill>
-                <a:latin typeface="Malgun Gothic"/>
-                <a:ea typeface="Malgun Gothic"/>
-              </a:rPr>
-              <a:t>• </a:t>
-            </a:r>
-            <a:r>
-              <a:rPr lang="ko-KR" altLang="en-US" sz="1500">
-                <a:solidFill>
-                  <a:srgbClr val="4E655E"/>
-                </a:solidFill>
-                <a:latin typeface="Malgun Gothic"/>
-                <a:ea typeface="Malgun Gothic"/>
-              </a:rPr>
-              <a:t>차량별 배터리</a:t>
-            </a:r>
-            <a:r>
-              <a:rPr lang="en-US" altLang="ko-KR" sz="1500">
-                <a:solidFill>
-                  <a:srgbClr val="4E655E"/>
-                </a:solidFill>
-                <a:latin typeface="Malgun Gothic"/>
-                <a:ea typeface="Malgun Gothic"/>
-              </a:rPr>
-              <a:t>·</a:t>
-            </a:r>
-            <a:r>
-              <a:rPr lang="ko-KR" altLang="en-US" sz="1500">
-                <a:solidFill>
-                  <a:srgbClr val="4E655E"/>
-                </a:solidFill>
-                <a:latin typeface="Malgun Gothic"/>
-                <a:ea typeface="Malgun Gothic"/>
-              </a:rPr>
-              <a:t>공기저항 미반영
-</a:t>
-            </a:r>
-            <a:r>
-              <a:rPr lang="en-US" altLang="ko-KR" sz="1500">
-                <a:solidFill>
-                  <a:srgbClr val="4E655E"/>
-                </a:solidFill>
-                <a:latin typeface="Malgun Gothic"/>
-                <a:ea typeface="Malgun Gothic"/>
-              </a:rPr>
-              <a:t>• </a:t>
-            </a:r>
-            <a:r>
-              <a:rPr lang="ko-KR" altLang="en-US" sz="1500">
-                <a:solidFill>
-                  <a:srgbClr val="4E655E"/>
-                </a:solidFill>
-                <a:latin typeface="Malgun Gothic"/>
-                <a:ea typeface="Malgun Gothic"/>
-              </a:rPr>
-              <a:t>실제 도로 환경 일반화 검증 필요</a:t>
-            </a:r>
-          </a:p>
-        </p:txBody>
-      </p:sp>
     </p:spTree>
-    <p:extLst>
-      <p:ext uri="{BB962C8B-B14F-4D97-AF65-F5344CB8AC3E}">
-        <p14:creationId xmlns:p14="http://schemas.microsoft.com/office/powerpoint/2010/main" val="4129257147"/>
-      </p:ext>
-    </p:extLst>
   </p:cSld>
   <p:clrMapOvr>
     <a:masterClrMapping/>
